--- a/in_class_slides/geog4300_L02-Working-with-data.pptx
+++ b/in_class_slides/geog4300_L02-Working-with-data.pptx
@@ -2,7 +2,7 @@
 <file path=ppt/presentation.xml><?xml version="1.0" encoding="utf-8"?>
 <p:presentation xmlns:a="http://schemas.openxmlformats.org/drawingml/2006/main" xmlns:r="http://schemas.openxmlformats.org/officeDocument/2006/relationships" xmlns:p="http://schemas.openxmlformats.org/presentationml/2006/main" saveSubsetFonts="1" autoCompressPictures="0">
   <p:sldMasterIdLst>
-    <p:sldMasterId id="2147483690" r:id="rId1"/>
+    <p:sldMasterId id="2147483732" r:id="rId1"/>
   </p:sldMasterIdLst>
   <p:notesMasterIdLst>
     <p:notesMasterId r:id="rId13"/>
@@ -207,7 +207,7 @@
           <a:p>
             <a:fld id="{8A1EE231-1E25-554B-A8A9-203D2F60356A}" type="datetimeFigureOut">
               <a:rPr lang="en-US" smtClean="0"/>
-              <a:t>8/26/25</a:t>
+              <a:t>8/3/2026</a:t>
             </a:fld>
             <a:endParaRPr lang="en-US"/>
           </a:p>
@@ -1146,7 +1146,7 @@
 </file>
 
 <file path=ppt/slideLayouts/slideLayout1.xml><?xml version="1.0" encoding="utf-8"?>
-<p:sldLayout xmlns:a="http://schemas.openxmlformats.org/drawingml/2006/main" xmlns:r="http://schemas.openxmlformats.org/officeDocument/2006/relationships" xmlns:p="http://schemas.openxmlformats.org/presentationml/2006/main" type="title" preserve="1">
+<p:sldLayout xmlns:a="http://schemas.openxmlformats.org/drawingml/2006/main" xmlns:r="http://schemas.openxmlformats.org/officeDocument/2006/relationships" xmlns:p="http://schemas.openxmlformats.org/presentationml/2006/main" showMasterSp="0" type="title" preserve="1">
   <p:cSld name="Title Slide">
     <p:spTree>
       <p:nvGrpSpPr>
@@ -1164,145 +1164,185 @@
       </p:grpSpPr>
       <p:sp>
         <p:nvSpPr>
-          <p:cNvPr id="2" name="Title 1"/>
-          <p:cNvSpPr>
-            <a:spLocks noGrp="1"/>
-          </p:cNvSpPr>
-          <p:nvPr>
-            <p:ph type="ctrTitle"/>
-          </p:nvPr>
+          <p:cNvPr id="7" name="Rectangle 6"/>
+          <p:cNvSpPr/>
+          <p:nvPr/>
         </p:nvSpPr>
         <p:spPr>
           <a:xfrm>
-            <a:off x="1154955" y="1447800"/>
-            <a:ext cx="8825658" cy="3329581"/>
+            <a:off x="3175" y="6400800"/>
+            <a:ext cx="12188825" cy="457200"/>
+          </a:xfrm>
+          <a:prstGeom prst="rect">
+            <a:avLst/>
+          </a:prstGeom>
+          <a:solidFill>
+            <a:schemeClr val="accent2"/>
+          </a:solidFill>
+          <a:ln>
+            <a:noFill/>
+          </a:ln>
+        </p:spPr>
+        <p:style>
+          <a:lnRef idx="2">
+            <a:schemeClr val="accent1">
+              <a:shade val="50000"/>
+            </a:schemeClr>
+          </a:lnRef>
+          <a:fillRef idx="1">
+            <a:schemeClr val="accent1"/>
+          </a:fillRef>
+          <a:effectRef idx="0">
+            <a:schemeClr val="accent1"/>
+          </a:effectRef>
+          <a:fontRef idx="minor">
+            <a:schemeClr val="lt1"/>
+          </a:fontRef>
+        </p:style>
+      </p:sp>
+      <p:sp>
+        <p:nvSpPr>
+          <p:cNvPr id="8" name="Rectangle 7"/>
+          <p:cNvSpPr/>
+          <p:nvPr/>
+        </p:nvSpPr>
+        <p:spPr>
+          <a:xfrm>
+            <a:off x="15" y="6334316"/>
+            <a:ext cx="12188825" cy="64008"/>
+          </a:xfrm>
+          <a:prstGeom prst="rect">
+            <a:avLst/>
+          </a:prstGeom>
+          <a:solidFill>
+            <a:schemeClr val="accent1"/>
+          </a:solidFill>
+          <a:ln>
+            <a:noFill/>
+          </a:ln>
+        </p:spPr>
+        <p:style>
+          <a:lnRef idx="2">
+            <a:schemeClr val="accent1">
+              <a:shade val="50000"/>
+            </a:schemeClr>
+          </a:lnRef>
+          <a:fillRef idx="1">
+            <a:schemeClr val="accent1"/>
+          </a:fillRef>
+          <a:effectRef idx="0">
+            <a:schemeClr val="accent1"/>
+          </a:effectRef>
+          <a:fontRef idx="minor">
+            <a:schemeClr val="lt1"/>
+          </a:fontRef>
+        </p:style>
+      </p:sp>
+      <p:sp>
+        <p:nvSpPr>
+          <p:cNvPr id="2" name="Title 1"/>
+          <p:cNvSpPr>
+            <a:spLocks noGrp="1"/>
+          </p:cNvSpPr>
+          <p:nvPr>
+            <p:ph type="ctrTitle"/>
+          </p:nvPr>
+        </p:nvSpPr>
+        <p:spPr>
+          <a:xfrm>
+            <a:off x="1097280" y="758952"/>
+            <a:ext cx="10058400" cy="3566160"/>
           </a:xfrm>
         </p:spPr>
         <p:txBody>
-          <a:bodyPr anchor="b"/>
+          <a:bodyPr anchor="b">
+            <a:normAutofit/>
+          </a:bodyPr>
           <a:lstStyle>
-            <a:lvl1pPr>
-              <a:defRPr sz="7200"/>
-            </a:lvl1pPr>
-          </a:lstStyle>
-          <a:p>
-            <a:r>
-              <a:rPr lang="en-US"/>
-              <a:t>Click to edit Master title style</a:t>
-            </a:r>
-            <a:endParaRPr lang="en-US" dirty="0"/>
-          </a:p>
-        </p:txBody>
-      </p:sp>
-      <p:sp>
-        <p:nvSpPr>
-          <p:cNvPr id="3" name="Subtitle 2"/>
-          <p:cNvSpPr>
-            <a:spLocks noGrp="1"/>
-          </p:cNvSpPr>
-          <p:nvPr>
-            <p:ph type="subTitle" idx="1"/>
-          </p:nvPr>
-        </p:nvSpPr>
-        <p:spPr>
-          <a:xfrm>
-            <a:off x="1154955" y="4777380"/>
-            <a:ext cx="8825658" cy="861420"/>
-          </a:xfrm>
-        </p:spPr>
-        <p:txBody>
-          <a:bodyPr anchor="t"/>
-          <a:lstStyle>
-            <a:lvl1pPr marL="0" indent="0" algn="l">
-              <a:buNone/>
-              <a:defRPr cap="all">
+            <a:lvl1pPr algn="l">
+              <a:lnSpc>
+                <a:spcPct val="85000"/>
+              </a:lnSpc>
+              <a:defRPr sz="8000" spc="-50" baseline="0">
                 <a:solidFill>
-                  <a:schemeClr val="bg2">
-                    <a:lumMod val="40000"/>
-                    <a:lumOff val="60000"/>
+                  <a:schemeClr val="tx1">
+                    <a:lumMod val="85000"/>
+                    <a:lumOff val="15000"/>
                   </a:schemeClr>
                 </a:solidFill>
               </a:defRPr>
             </a:lvl1pPr>
+          </a:lstStyle>
+          <a:p>
+            <a:r>
+              <a:rPr lang="en-US"/>
+              <a:t>Click to edit Master title style</a:t>
+            </a:r>
+            <a:endParaRPr lang="en-US" dirty="0"/>
+          </a:p>
+        </p:txBody>
+      </p:sp>
+      <p:sp>
+        <p:nvSpPr>
+          <p:cNvPr id="3" name="Subtitle 2"/>
+          <p:cNvSpPr>
+            <a:spLocks noGrp="1"/>
+          </p:cNvSpPr>
+          <p:nvPr>
+            <p:ph type="subTitle" idx="1"/>
+          </p:nvPr>
+        </p:nvSpPr>
+        <p:spPr>
+          <a:xfrm>
+            <a:off x="1100051" y="4455620"/>
+            <a:ext cx="10058400" cy="1143000"/>
+          </a:xfrm>
+        </p:spPr>
+        <p:txBody>
+          <a:bodyPr lIns="91440" rIns="91440">
+            <a:normAutofit/>
+          </a:bodyPr>
+          <a:lstStyle>
+            <a:lvl1pPr marL="0" indent="0" algn="l">
+              <a:buNone/>
+              <a:defRPr sz="2400" cap="all" spc="200" baseline="0">
+                <a:solidFill>
+                  <a:schemeClr val="tx2"/>
+                </a:solidFill>
+                <a:latin typeface="+mj-lt"/>
+              </a:defRPr>
+            </a:lvl1pPr>
             <a:lvl2pPr marL="457200" indent="0" algn="ctr">
               <a:buNone/>
-              <a:defRPr>
-                <a:solidFill>
-                  <a:schemeClr val="tx1">
-                    <a:tint val="75000"/>
-                  </a:schemeClr>
-                </a:solidFill>
-              </a:defRPr>
+              <a:defRPr sz="2400"/>
             </a:lvl2pPr>
             <a:lvl3pPr marL="914400" indent="0" algn="ctr">
               <a:buNone/>
-              <a:defRPr>
-                <a:solidFill>
-                  <a:schemeClr val="tx1">
-                    <a:tint val="75000"/>
-                  </a:schemeClr>
-                </a:solidFill>
-              </a:defRPr>
+              <a:defRPr sz="2400"/>
             </a:lvl3pPr>
             <a:lvl4pPr marL="1371600" indent="0" algn="ctr">
               <a:buNone/>
-              <a:defRPr>
-                <a:solidFill>
-                  <a:schemeClr val="tx1">
-                    <a:tint val="75000"/>
-                  </a:schemeClr>
-                </a:solidFill>
-              </a:defRPr>
+              <a:defRPr sz="2000"/>
             </a:lvl4pPr>
             <a:lvl5pPr marL="1828800" indent="0" algn="ctr">
               <a:buNone/>
-              <a:defRPr>
-                <a:solidFill>
-                  <a:schemeClr val="tx1">
-                    <a:tint val="75000"/>
-                  </a:schemeClr>
-                </a:solidFill>
-              </a:defRPr>
+              <a:defRPr sz="2000"/>
             </a:lvl5pPr>
             <a:lvl6pPr marL="2286000" indent="0" algn="ctr">
               <a:buNone/>
-              <a:defRPr>
-                <a:solidFill>
-                  <a:schemeClr val="tx1">
-                    <a:tint val="75000"/>
-                  </a:schemeClr>
-                </a:solidFill>
-              </a:defRPr>
+              <a:defRPr sz="2000"/>
             </a:lvl6pPr>
             <a:lvl7pPr marL="2743200" indent="0" algn="ctr">
               <a:buNone/>
-              <a:defRPr>
-                <a:solidFill>
-                  <a:schemeClr val="tx1">
-                    <a:tint val="75000"/>
-                  </a:schemeClr>
-                </a:solidFill>
-              </a:defRPr>
+              <a:defRPr sz="2000"/>
             </a:lvl7pPr>
             <a:lvl8pPr marL="3200400" indent="0" algn="ctr">
               <a:buNone/>
-              <a:defRPr>
-                <a:solidFill>
-                  <a:schemeClr val="tx1">
-                    <a:tint val="75000"/>
-                  </a:schemeClr>
-                </a:solidFill>
-              </a:defRPr>
+              <a:defRPr sz="2000"/>
             </a:lvl8pPr>
             <a:lvl9pPr marL="3657600" indent="0" algn="ctr">
               <a:buNone/>
-              <a:defRPr>
-                <a:solidFill>
-                  <a:schemeClr val="tx1">
-                    <a:tint val="75000"/>
-                  </a:schemeClr>
-                </a:solidFill>
-              </a:defRPr>
+              <a:defRPr sz="2000"/>
             </a:lvl9pPr>
           </a:lstStyle>
           <a:p>
@@ -1331,7 +1371,7 @@
           <a:p>
             <a:fld id="{60135C24-EB33-6645-B51A-6348BD58F2AA}" type="datetimeFigureOut">
               <a:rPr lang="en-US" smtClean="0"/>
-              <a:t>8/26/25</a:t>
+              <a:t>8/3/2026</a:t>
             </a:fld>
             <a:endParaRPr lang="en-US"/>
           </a:p>
@@ -1379,10 +1419,48 @@
           </a:p>
         </p:txBody>
       </p:sp>
+      <p:cxnSp>
+        <p:nvCxnSpPr>
+          <p:cNvPr id="9" name="Straight Connector 8"/>
+          <p:cNvCxnSpPr/>
+          <p:nvPr/>
+        </p:nvCxnSpPr>
+        <p:spPr>
+          <a:xfrm>
+            <a:off x="1207658" y="4343400"/>
+            <a:ext cx="9875520" cy="0"/>
+          </a:xfrm>
+          <a:prstGeom prst="line">
+            <a:avLst/>
+          </a:prstGeom>
+          <a:ln w="6350">
+            <a:solidFill>
+              <a:schemeClr val="tx1">
+                <a:lumMod val="50000"/>
+                <a:lumOff val="50000"/>
+              </a:schemeClr>
+            </a:solidFill>
+          </a:ln>
+        </p:spPr>
+        <p:style>
+          <a:lnRef idx="1">
+            <a:schemeClr val="accent1"/>
+          </a:lnRef>
+          <a:fillRef idx="0">
+            <a:schemeClr val="accent1"/>
+          </a:fillRef>
+          <a:effectRef idx="0">
+            <a:schemeClr val="accent1"/>
+          </a:effectRef>
+          <a:fontRef idx="minor">
+            <a:schemeClr val="tx1"/>
+          </a:fontRef>
+        </p:style>
+      </p:cxnSp>
     </p:spTree>
     <p:extLst>
       <p:ext uri="{BB962C8B-B14F-4D97-AF65-F5344CB8AC3E}">
-        <p14:creationId xmlns:p14="http://schemas.microsoft.com/office/powerpoint/2010/main" val="2963749201"/>
+        <p14:creationId xmlns:p14="http://schemas.microsoft.com/office/powerpoint/2010/main" val="4023896393"/>
       </p:ext>
     </p:extLst>
   </p:cSld>
@@ -1393,8 +1471,8 @@
 </file>
 
 <file path=ppt/slideLayouts/slideLayout10.xml><?xml version="1.0" encoding="utf-8"?>
-<p:sldLayout xmlns:a="http://schemas.openxmlformats.org/drawingml/2006/main" xmlns:r="http://schemas.openxmlformats.org/officeDocument/2006/relationships" xmlns:p="http://schemas.openxmlformats.org/presentationml/2006/main" preserve="1">
-  <p:cSld name="Panoramic Picture with Caption">
+<p:sldLayout xmlns:a="http://schemas.openxmlformats.org/drawingml/2006/main" xmlns:r="http://schemas.openxmlformats.org/officeDocument/2006/relationships" xmlns:p="http://schemas.openxmlformats.org/presentationml/2006/main" type="vertTx" preserve="1">
+  <p:cSld name="Title and Vertical Text">
     <p:spTree>
       <p:nvGrpSpPr>
         <p:cNvPr id="1" name=""/>
@@ -1419,21 +1497,10 @@
             <p:ph type="title"/>
           </p:nvPr>
         </p:nvSpPr>
-        <p:spPr>
-          <a:xfrm>
-            <a:off x="1154956" y="4800587"/>
-            <a:ext cx="8825657" cy="566738"/>
-          </a:xfrm>
-        </p:spPr>
-        <p:txBody>
-          <a:bodyPr anchor="b">
-            <a:normAutofit/>
-          </a:bodyPr>
-          <a:lstStyle>
-            <a:lvl1pPr algn="l">
-              <a:defRPr sz="2400" b="0"/>
-            </a:lvl1pPr>
-          </a:lstStyle>
+        <p:spPr/>
+        <p:txBody>
+          <a:bodyPr/>
+          <a:lstStyle/>
           <a:p>
             <a:r>
               <a:rPr lang="en-US"/>
@@ -1445,141 +1512,18 @@
       </p:sp>
       <p:sp>
         <p:nvSpPr>
-          <p:cNvPr id="3" name="Picture Placeholder 2"/>
-          <p:cNvSpPr>
-            <a:spLocks noGrp="1" noChangeAspect="1"/>
-          </p:cNvSpPr>
-          <p:nvPr>
-            <p:ph type="pic" idx="1"/>
-          </p:nvPr>
-        </p:nvSpPr>
-        <p:spPr>
-          <a:xfrm>
-            <a:off x="1154955" y="685800"/>
-            <a:ext cx="8825658" cy="3640666"/>
-          </a:xfrm>
-          <a:prstGeom prst="roundRect">
-            <a:avLst>
-              <a:gd name="adj" fmla="val 1858"/>
-            </a:avLst>
-          </a:prstGeom>
-          <a:effectLst>
-            <a:outerShdw blurRad="50800" dist="50800" dir="5400000" algn="tl" rotWithShape="0">
-              <a:srgbClr val="000000">
-                <a:alpha val="43000"/>
-              </a:srgbClr>
-            </a:outerShdw>
-          </a:effectLst>
-        </p:spPr>
-        <p:txBody>
-          <a:bodyPr anchor="t">
-            <a:normAutofit/>
-          </a:bodyPr>
-          <a:lstStyle>
-            <a:lvl1pPr marL="0" indent="0" algn="ctr">
-              <a:buNone/>
-              <a:defRPr sz="1600"/>
-            </a:lvl1pPr>
-            <a:lvl2pPr marL="457200" indent="0">
-              <a:buNone/>
-              <a:defRPr sz="1600"/>
-            </a:lvl2pPr>
-            <a:lvl3pPr marL="914400" indent="0">
-              <a:buNone/>
-              <a:defRPr sz="1600"/>
-            </a:lvl3pPr>
-            <a:lvl4pPr marL="1371600" indent="0">
-              <a:buNone/>
-              <a:defRPr sz="1600"/>
-            </a:lvl4pPr>
-            <a:lvl5pPr marL="1828800" indent="0">
-              <a:buNone/>
-              <a:defRPr sz="1600"/>
-            </a:lvl5pPr>
-            <a:lvl6pPr marL="2286000" indent="0">
-              <a:buNone/>
-              <a:defRPr sz="1600"/>
-            </a:lvl6pPr>
-            <a:lvl7pPr marL="2743200" indent="0">
-              <a:buNone/>
-              <a:defRPr sz="1600"/>
-            </a:lvl7pPr>
-            <a:lvl8pPr marL="3200400" indent="0">
-              <a:buNone/>
-              <a:defRPr sz="1600"/>
-            </a:lvl8pPr>
-            <a:lvl9pPr marL="3657600" indent="0">
-              <a:buNone/>
-              <a:defRPr sz="1600"/>
-            </a:lvl9pPr>
-          </a:lstStyle>
-          <a:p>
-            <a:r>
-              <a:rPr lang="en-US"/>
-              <a:t>Click icon to add picture</a:t>
-            </a:r>
-            <a:endParaRPr lang="en-US" dirty="0"/>
-          </a:p>
-        </p:txBody>
-      </p:sp>
-      <p:sp>
-        <p:nvSpPr>
-          <p:cNvPr id="4" name="Text Placeholder 3"/>
-          <p:cNvSpPr>
-            <a:spLocks noGrp="1"/>
-          </p:cNvSpPr>
-          <p:nvPr>
-            <p:ph type="body" sz="half" idx="2"/>
-          </p:nvPr>
-        </p:nvSpPr>
-        <p:spPr>
-          <a:xfrm>
-            <a:off x="1154956" y="5367325"/>
-            <a:ext cx="8825656" cy="493712"/>
-          </a:xfrm>
-        </p:spPr>
-        <p:txBody>
-          <a:bodyPr>
-            <a:normAutofit/>
-          </a:bodyPr>
-          <a:lstStyle>
-            <a:lvl1pPr marL="0" indent="0">
-              <a:buNone/>
-              <a:defRPr sz="1200"/>
-            </a:lvl1pPr>
-            <a:lvl2pPr marL="457200" indent="0">
-              <a:buNone/>
-              <a:defRPr sz="1200"/>
-            </a:lvl2pPr>
-            <a:lvl3pPr marL="914400" indent="0">
-              <a:buNone/>
-              <a:defRPr sz="1000"/>
-            </a:lvl3pPr>
-            <a:lvl4pPr marL="1371600" indent="0">
-              <a:buNone/>
-              <a:defRPr sz="900"/>
-            </a:lvl4pPr>
-            <a:lvl5pPr marL="1828800" indent="0">
-              <a:buNone/>
-              <a:defRPr sz="900"/>
-            </a:lvl5pPr>
-            <a:lvl6pPr marL="2286000" indent="0">
-              <a:buNone/>
-              <a:defRPr sz="900"/>
-            </a:lvl6pPr>
-            <a:lvl7pPr marL="2743200" indent="0">
-              <a:buNone/>
-              <a:defRPr sz="900"/>
-            </a:lvl7pPr>
-            <a:lvl8pPr marL="3200400" indent="0">
-              <a:buNone/>
-              <a:defRPr sz="900"/>
-            </a:lvl8pPr>
-            <a:lvl9pPr marL="3657600" indent="0">
-              <a:buNone/>
-              <a:defRPr sz="900"/>
-            </a:lvl9pPr>
-          </a:lstStyle>
+          <p:cNvPr id="3" name="Vertical Text Placeholder 2"/>
+          <p:cNvSpPr>
+            <a:spLocks noGrp="1"/>
+          </p:cNvSpPr>
+          <p:nvPr>
+            <p:ph type="body" orient="vert" idx="1"/>
+          </p:nvPr>
+        </p:nvSpPr>
+        <p:spPr/>
+        <p:txBody>
+          <a:bodyPr vert="eaVert" lIns="45720" tIns="0" rIns="45720" bIns="0"/>
+          <a:lstStyle/>
           <a:p>
             <a:pPr lvl="0"/>
             <a:r>
@@ -1587,11 +1531,40 @@
               <a:t>Click to edit Master text styles</a:t>
             </a:r>
           </a:p>
-        </p:txBody>
-      </p:sp>
-      <p:sp>
-        <p:nvSpPr>
-          <p:cNvPr id="5" name="Date Placeholder 4"/>
+          <a:p>
+            <a:pPr lvl="1"/>
+            <a:r>
+              <a:rPr lang="en-US"/>
+              <a:t>Second level</a:t>
+            </a:r>
+          </a:p>
+          <a:p>
+            <a:pPr lvl="2"/>
+            <a:r>
+              <a:rPr lang="en-US"/>
+              <a:t>Third level</a:t>
+            </a:r>
+          </a:p>
+          <a:p>
+            <a:pPr lvl="3"/>
+            <a:r>
+              <a:rPr lang="en-US"/>
+              <a:t>Fourth level</a:t>
+            </a:r>
+          </a:p>
+          <a:p>
+            <a:pPr lvl="4"/>
+            <a:r>
+              <a:rPr lang="en-US"/>
+              <a:t>Fifth level</a:t>
+            </a:r>
+            <a:endParaRPr lang="en-US" dirty="0"/>
+          </a:p>
+        </p:txBody>
+      </p:sp>
+      <p:sp>
+        <p:nvSpPr>
+          <p:cNvPr id="4" name="Date Placeholder 3"/>
           <p:cNvSpPr>
             <a:spLocks noGrp="1"/>
           </p:cNvSpPr>
@@ -1606,7 +1579,7 @@
           <a:p>
             <a:fld id="{60135C24-EB33-6645-B51A-6348BD58F2AA}" type="datetimeFigureOut">
               <a:rPr lang="en-US" smtClean="0"/>
-              <a:t>8/26/25</a:t>
+              <a:t>8/3/2026</a:t>
             </a:fld>
             <a:endParaRPr lang="en-US"/>
           </a:p>
@@ -1614,7 +1587,7 @@
       </p:sp>
       <p:sp>
         <p:nvSpPr>
-          <p:cNvPr id="6" name="Footer Placeholder 5"/>
+          <p:cNvPr id="5" name="Footer Placeholder 4"/>
           <p:cNvSpPr>
             <a:spLocks noGrp="1"/>
           </p:cNvSpPr>
@@ -1633,7 +1606,7 @@
       </p:sp>
       <p:sp>
         <p:nvSpPr>
-          <p:cNvPr id="7" name="Slide Number Placeholder 6"/>
+          <p:cNvPr id="6" name="Slide Number Placeholder 5"/>
           <p:cNvSpPr>
             <a:spLocks noGrp="1"/>
           </p:cNvSpPr>
@@ -1657,7 +1630,7 @@
     </p:spTree>
     <p:extLst>
       <p:ext uri="{BB962C8B-B14F-4D97-AF65-F5344CB8AC3E}">
-        <p14:creationId xmlns:p14="http://schemas.microsoft.com/office/powerpoint/2010/main" val="1944156215"/>
+        <p14:creationId xmlns:p14="http://schemas.microsoft.com/office/powerpoint/2010/main" val="378147101"/>
       </p:ext>
     </p:extLst>
   </p:cSld>
@@ -1668,8 +1641,8 @@
 </file>
 
 <file path=ppt/slideLayouts/slideLayout11.xml><?xml version="1.0" encoding="utf-8"?>
-<p:sldLayout xmlns:a="http://schemas.openxmlformats.org/drawingml/2006/main" xmlns:r="http://schemas.openxmlformats.org/officeDocument/2006/relationships" xmlns:p="http://schemas.openxmlformats.org/presentationml/2006/main" preserve="1">
-  <p:cSld name="Title and Caption">
+<p:sldLayout xmlns:a="http://schemas.openxmlformats.org/drawingml/2006/main" xmlns:r="http://schemas.openxmlformats.org/officeDocument/2006/relationships" xmlns:p="http://schemas.openxmlformats.org/presentationml/2006/main" showMasterSp="0" type="vertTitleAndTx" preserve="1">
+  <p:cSld name="Vertical Title and Text">
     <p:spTree>
       <p:nvGrpSpPr>
         <p:cNvPr id="1" name=""/>
@@ -1686,27 +1659,99 @@
       </p:grpSpPr>
       <p:sp>
         <p:nvSpPr>
-          <p:cNvPr id="2" name="Title 1"/>
-          <p:cNvSpPr>
-            <a:spLocks noGrp="1"/>
-          </p:cNvSpPr>
-          <p:nvPr>
-            <p:ph type="title"/>
-          </p:nvPr>
+          <p:cNvPr id="7" name="Rectangle 6"/>
+          <p:cNvSpPr/>
+          <p:nvPr/>
         </p:nvSpPr>
         <p:spPr>
           <a:xfrm>
-            <a:off x="1154954" y="1447800"/>
-            <a:ext cx="8825659" cy="1981200"/>
+            <a:off x="3175" y="6400800"/>
+            <a:ext cx="12188825" cy="457200"/>
+          </a:xfrm>
+          <a:prstGeom prst="rect">
+            <a:avLst/>
+          </a:prstGeom>
+          <a:solidFill>
+            <a:schemeClr val="accent2"/>
+          </a:solidFill>
+          <a:ln>
+            <a:noFill/>
+          </a:ln>
+        </p:spPr>
+        <p:style>
+          <a:lnRef idx="2">
+            <a:schemeClr val="accent1">
+              <a:shade val="50000"/>
+            </a:schemeClr>
+          </a:lnRef>
+          <a:fillRef idx="1">
+            <a:schemeClr val="accent1"/>
+          </a:fillRef>
+          <a:effectRef idx="0">
+            <a:schemeClr val="accent1"/>
+          </a:effectRef>
+          <a:fontRef idx="minor">
+            <a:schemeClr val="lt1"/>
+          </a:fontRef>
+        </p:style>
+      </p:sp>
+      <p:sp>
+        <p:nvSpPr>
+          <p:cNvPr id="8" name="Rectangle 7"/>
+          <p:cNvSpPr/>
+          <p:nvPr/>
+        </p:nvSpPr>
+        <p:spPr>
+          <a:xfrm>
+            <a:off x="15" y="6334316"/>
+            <a:ext cx="12188825" cy="64008"/>
+          </a:xfrm>
+          <a:prstGeom prst="rect">
+            <a:avLst/>
+          </a:prstGeom>
+          <a:solidFill>
+            <a:schemeClr val="accent1"/>
+          </a:solidFill>
+          <a:ln>
+            <a:noFill/>
+          </a:ln>
+        </p:spPr>
+        <p:style>
+          <a:lnRef idx="2">
+            <a:schemeClr val="accent1">
+              <a:shade val="50000"/>
+            </a:schemeClr>
+          </a:lnRef>
+          <a:fillRef idx="1">
+            <a:schemeClr val="accent1"/>
+          </a:fillRef>
+          <a:effectRef idx="0">
+            <a:schemeClr val="accent1"/>
+          </a:effectRef>
+          <a:fontRef idx="minor">
+            <a:schemeClr val="lt1"/>
+          </a:fontRef>
+        </p:style>
+      </p:sp>
+      <p:sp>
+        <p:nvSpPr>
+          <p:cNvPr id="2" name="Vertical Title 1"/>
+          <p:cNvSpPr>
+            <a:spLocks noGrp="1"/>
+          </p:cNvSpPr>
+          <p:nvPr>
+            <p:ph type="title" orient="vert"/>
+          </p:nvPr>
+        </p:nvSpPr>
+        <p:spPr>
+          <a:xfrm>
+            <a:off x="8724900" y="414778"/>
+            <a:ext cx="2628900" cy="5757421"/>
           </a:xfrm>
         </p:spPr>
         <p:txBody>
-          <a:bodyPr/>
-          <a:lstStyle>
-            <a:lvl1pPr>
-              <a:defRPr sz="4800"/>
-            </a:lvl1pPr>
-          </a:lstStyle>
+          <a:bodyPr vert="eaVert"/>
+          <a:lstStyle/>
           <a:p>
             <a:r>
               <a:rPr lang="en-US"/>
@@ -1718,62 +1763,23 @@
       </p:sp>
       <p:sp>
         <p:nvSpPr>
-          <p:cNvPr id="8" name="Text Placeholder 3"/>
-          <p:cNvSpPr>
-            <a:spLocks noGrp="1"/>
-          </p:cNvSpPr>
-          <p:nvPr>
-            <p:ph type="body" sz="half" idx="2"/>
+          <p:cNvPr id="3" name="Vertical Text Placeholder 2"/>
+          <p:cNvSpPr>
+            <a:spLocks noGrp="1"/>
+          </p:cNvSpPr>
+          <p:nvPr>
+            <p:ph type="body" orient="vert" idx="1"/>
           </p:nvPr>
         </p:nvSpPr>
         <p:spPr>
           <a:xfrm>
-            <a:off x="1154954" y="3657600"/>
-            <a:ext cx="8825659" cy="2362200"/>
+            <a:off x="838200" y="414778"/>
+            <a:ext cx="7734300" cy="5757422"/>
           </a:xfrm>
         </p:spPr>
         <p:txBody>
-          <a:bodyPr anchor="ctr">
-            <a:normAutofit/>
-          </a:bodyPr>
-          <a:lstStyle>
-            <a:lvl1pPr marL="0" indent="0">
-              <a:buNone/>
-              <a:defRPr sz="1800"/>
-            </a:lvl1pPr>
-            <a:lvl2pPr marL="457200" indent="0">
-              <a:buNone/>
-              <a:defRPr sz="1200"/>
-            </a:lvl2pPr>
-            <a:lvl3pPr marL="914400" indent="0">
-              <a:buNone/>
-              <a:defRPr sz="1000"/>
-            </a:lvl3pPr>
-            <a:lvl4pPr marL="1371600" indent="0">
-              <a:buNone/>
-              <a:defRPr sz="900"/>
-            </a:lvl4pPr>
-            <a:lvl5pPr marL="1828800" indent="0">
-              <a:buNone/>
-              <a:defRPr sz="900"/>
-            </a:lvl5pPr>
-            <a:lvl6pPr marL="2286000" indent="0">
-              <a:buNone/>
-              <a:defRPr sz="900"/>
-            </a:lvl6pPr>
-            <a:lvl7pPr marL="2743200" indent="0">
-              <a:buNone/>
-              <a:defRPr sz="900"/>
-            </a:lvl7pPr>
-            <a:lvl8pPr marL="3200400" indent="0">
-              <a:buNone/>
-              <a:defRPr sz="900"/>
-            </a:lvl8pPr>
-            <a:lvl9pPr marL="3657600" indent="0">
-              <a:buNone/>
-              <a:defRPr sz="900"/>
-            </a:lvl9pPr>
-          </a:lstStyle>
+          <a:bodyPr vert="eaVert" lIns="45720" tIns="0" rIns="45720" bIns="0"/>
+          <a:lstStyle/>
           <a:p>
             <a:pPr lvl="0"/>
             <a:r>
@@ -1781,6 +1787,35 @@
               <a:t>Click to edit Master text styles</a:t>
             </a:r>
           </a:p>
+          <a:p>
+            <a:pPr lvl="1"/>
+            <a:r>
+              <a:rPr lang="en-US"/>
+              <a:t>Second level</a:t>
+            </a:r>
+          </a:p>
+          <a:p>
+            <a:pPr lvl="2"/>
+            <a:r>
+              <a:rPr lang="en-US"/>
+              <a:t>Third level</a:t>
+            </a:r>
+          </a:p>
+          <a:p>
+            <a:pPr lvl="3"/>
+            <a:r>
+              <a:rPr lang="en-US"/>
+              <a:t>Fourth level</a:t>
+            </a:r>
+          </a:p>
+          <a:p>
+            <a:pPr lvl="4"/>
+            <a:r>
+              <a:rPr lang="en-US"/>
+              <a:t>Fifth level</a:t>
+            </a:r>
+            <a:endParaRPr lang="en-US" dirty="0"/>
+          </a:p>
         </p:txBody>
       </p:sp>
       <p:sp>
@@ -1800,7 +1835,7 @@
           <a:p>
             <a:fld id="{60135C24-EB33-6645-B51A-6348BD58F2AA}" type="datetimeFigureOut">
               <a:rPr lang="en-US" smtClean="0"/>
-              <a:t>8/26/25</a:t>
+              <a:t>8/3/2026</a:t>
             </a:fld>
             <a:endParaRPr lang="en-US"/>
           </a:p>
@@ -1851,7 +1886,7 @@
     </p:spTree>
     <p:extLst>
       <p:ext uri="{BB962C8B-B14F-4D97-AF65-F5344CB8AC3E}">
-        <p14:creationId xmlns:p14="http://schemas.microsoft.com/office/powerpoint/2010/main" val="2513506764"/>
+        <p14:creationId xmlns:p14="http://schemas.microsoft.com/office/powerpoint/2010/main" val="1426795467"/>
       </p:ext>
     </p:extLst>
   </p:cSld>
@@ -1861,9 +1896,9 @@
 </p:sldLayout>
 </file>
 
-<file path=ppt/slideLayouts/slideLayout12.xml><?xml version="1.0" encoding="utf-8"?>
-<p:sldLayout xmlns:a="http://schemas.openxmlformats.org/drawingml/2006/main" xmlns:r="http://schemas.openxmlformats.org/officeDocument/2006/relationships" xmlns:p="http://schemas.openxmlformats.org/presentationml/2006/main" preserve="1">
-  <p:cSld name="Quote with Caption">
+<file path=ppt/slideLayouts/slideLayout2.xml><?xml version="1.0" encoding="utf-8"?>
+<p:sldLayout xmlns:a="http://schemas.openxmlformats.org/drawingml/2006/main" xmlns:r="http://schemas.openxmlformats.org/officeDocument/2006/relationships" xmlns:p="http://schemas.openxmlformats.org/presentationml/2006/main" type="obj" preserve="1">
+  <p:cSld name="Title and Content">
     <p:spTree>
       <p:nvGrpSpPr>
         <p:cNvPr id="1" name=""/>
@@ -1888,17 +1923,12 @@
             <p:ph type="title"/>
           </p:nvPr>
         </p:nvSpPr>
-        <p:spPr>
-          <a:xfrm>
-            <a:off x="1574801" y="1447800"/>
-            <a:ext cx="7999315" cy="2323374"/>
-          </a:xfrm>
-        </p:spPr>
+        <p:spPr/>
         <p:txBody>
           <a:bodyPr/>
           <a:lstStyle>
-            <a:lvl1pPr>
-              <a:defRPr sz="4800"/>
+            <a:lvl1pPr marL="0">
+              <a:defRPr/>
             </a:lvl1pPr>
           </a:lstStyle>
           <a:p>
@@ -1912,146 +1942,69 @@
       </p:sp>
       <p:sp>
         <p:nvSpPr>
-          <p:cNvPr id="11" name="Text Placeholder 3"/>
-          <p:cNvSpPr>
-            <a:spLocks noGrp="1"/>
-          </p:cNvSpPr>
-          <p:nvPr>
-            <p:ph type="body" sz="half" idx="14"/>
-          </p:nvPr>
-        </p:nvSpPr>
-        <p:spPr>
-          <a:xfrm>
-            <a:off x="1930400" y="3771174"/>
-            <a:ext cx="7279649" cy="342174"/>
-          </a:xfrm>
-        </p:spPr>
-        <p:txBody>
-          <a:bodyPr vert="horz" lIns="91440" tIns="45720" rIns="91440" bIns="45720" rtlCol="0" anchor="t">
+          <p:cNvPr id="3" name="Content Placeholder 2"/>
+          <p:cNvSpPr>
+            <a:spLocks noGrp="1"/>
+          </p:cNvSpPr>
+          <p:nvPr>
+            <p:ph idx="1"/>
+          </p:nvPr>
+        </p:nvSpPr>
+        <p:spPr/>
+        <p:txBody>
+          <a:bodyPr>
             <a:normAutofit/>
           </a:bodyPr>
           <a:lstStyle>
-            <a:lvl1pPr marL="0" indent="0">
-              <a:buNone/>
-              <a:defRPr lang="en-US" sz="1400" b="0" i="0" kern="1200" cap="small" dirty="0">
-                <a:solidFill>
-                  <a:schemeClr val="bg2">
-                    <a:lumMod val="40000"/>
-                    <a:lumOff val="60000"/>
-                  </a:schemeClr>
-                </a:solidFill>
-                <a:latin typeface="+mj-lt"/>
-                <a:ea typeface="+mj-ea"/>
-                <a:cs typeface="+mj-cs"/>
-              </a:defRPr>
+            <a:lvl1pPr>
+              <a:defRPr sz="2400"/>
             </a:lvl1pPr>
-            <a:lvl2pPr marL="457200" indent="0">
-              <a:buNone/>
-              <a:defRPr sz="1200"/>
+            <a:lvl2pPr>
+              <a:defRPr sz="2000"/>
             </a:lvl2pPr>
-            <a:lvl3pPr marL="914400" indent="0">
-              <a:buNone/>
-              <a:defRPr sz="1000"/>
+            <a:lvl3pPr>
+              <a:defRPr sz="1600"/>
             </a:lvl3pPr>
-            <a:lvl4pPr marL="1371600" indent="0">
-              <a:buNone/>
-              <a:defRPr sz="900"/>
+            <a:lvl4pPr>
+              <a:defRPr sz="1600"/>
             </a:lvl4pPr>
-            <a:lvl5pPr marL="1828800" indent="0">
-              <a:buNone/>
-              <a:defRPr sz="900"/>
+            <a:lvl5pPr>
+              <a:defRPr sz="1600"/>
             </a:lvl5pPr>
-            <a:lvl6pPr marL="2286000" indent="0">
-              <a:buNone/>
-              <a:defRPr sz="900"/>
-            </a:lvl6pPr>
-            <a:lvl7pPr marL="2743200" indent="0">
-              <a:buNone/>
-              <a:defRPr sz="900"/>
-            </a:lvl7pPr>
-            <a:lvl8pPr marL="3200400" indent="0">
-              <a:buNone/>
-              <a:defRPr sz="900"/>
-            </a:lvl8pPr>
-            <a:lvl9pPr marL="3657600" indent="0">
-              <a:buNone/>
-              <a:defRPr sz="900"/>
-            </a:lvl9pPr>
           </a:lstStyle>
           <a:p>
-            <a:pPr marL="0" lvl="0" indent="0">
-              <a:buNone/>
-            </a:pPr>
-            <a:r>
-              <a:rPr lang="en-US"/>
+            <a:pPr lvl="0"/>
+            <a:r>
+              <a:rPr lang="en-US" dirty="0"/>
               <a:t>Click to edit Master text styles</a:t>
             </a:r>
           </a:p>
-        </p:txBody>
-      </p:sp>
-      <p:sp>
-        <p:nvSpPr>
-          <p:cNvPr id="10" name="Text Placeholder 3"/>
-          <p:cNvSpPr>
-            <a:spLocks noGrp="1"/>
-          </p:cNvSpPr>
-          <p:nvPr>
-            <p:ph type="body" sz="half" idx="2"/>
-          </p:nvPr>
-        </p:nvSpPr>
-        <p:spPr>
-          <a:xfrm>
-            <a:off x="1154954" y="4350657"/>
-            <a:ext cx="8825659" cy="1676400"/>
-          </a:xfrm>
-        </p:spPr>
-        <p:txBody>
-          <a:bodyPr anchor="ctr">
-            <a:normAutofit/>
-          </a:bodyPr>
-          <a:lstStyle>
-            <a:lvl1pPr marL="0" indent="0">
-              <a:buNone/>
-              <a:defRPr sz="1800"/>
-            </a:lvl1pPr>
-            <a:lvl2pPr marL="457200" indent="0">
-              <a:buNone/>
-              <a:defRPr sz="1200"/>
-            </a:lvl2pPr>
-            <a:lvl3pPr marL="914400" indent="0">
-              <a:buNone/>
-              <a:defRPr sz="1000"/>
-            </a:lvl3pPr>
-            <a:lvl4pPr marL="1371600" indent="0">
-              <a:buNone/>
-              <a:defRPr sz="900"/>
-            </a:lvl4pPr>
-            <a:lvl5pPr marL="1828800" indent="0">
-              <a:buNone/>
-              <a:defRPr sz="900"/>
-            </a:lvl5pPr>
-            <a:lvl6pPr marL="2286000" indent="0">
-              <a:buNone/>
-              <a:defRPr sz="900"/>
-            </a:lvl6pPr>
-            <a:lvl7pPr marL="2743200" indent="0">
-              <a:buNone/>
-              <a:defRPr sz="900"/>
-            </a:lvl7pPr>
-            <a:lvl8pPr marL="3200400" indent="0">
-              <a:buNone/>
-              <a:defRPr sz="900"/>
-            </a:lvl8pPr>
-            <a:lvl9pPr marL="3657600" indent="0">
-              <a:buNone/>
-              <a:defRPr sz="900"/>
-            </a:lvl9pPr>
-          </a:lstStyle>
-          <a:p>
-            <a:pPr lvl="0"/>
-            <a:r>
-              <a:rPr lang="en-US"/>
-              <a:t>Click to edit Master text styles</a:t>
+          <a:p>
+            <a:pPr lvl="1"/>
+            <a:r>
+              <a:rPr lang="en-US" dirty="0"/>
+              <a:t>Second level</a:t>
+            </a:r>
+          </a:p>
+          <a:p>
+            <a:pPr lvl="2"/>
+            <a:r>
+              <a:rPr lang="en-US" dirty="0"/>
+              <a:t>Third level</a:t>
+            </a:r>
+          </a:p>
+          <a:p>
+            <a:pPr lvl="3"/>
+            <a:r>
+              <a:rPr lang="en-US" dirty="0"/>
+              <a:t>Fourth level</a:t>
+            </a:r>
+          </a:p>
+          <a:p>
+            <a:pPr lvl="4"/>
+            <a:r>
+              <a:rPr lang="en-US" dirty="0"/>
+              <a:t>Fifth level</a:t>
             </a:r>
           </a:p>
         </p:txBody>
@@ -2073,7 +2026,7 @@
           <a:p>
             <a:fld id="{60135C24-EB33-6645-B51A-6348BD58F2AA}" type="datetimeFigureOut">
               <a:rPr lang="en-US" smtClean="0"/>
-              <a:t>8/26/25</a:t>
+              <a:t>8/3/2026</a:t>
             </a:fld>
             <a:endParaRPr lang="en-US"/>
           </a:p>
@@ -2121,104 +2074,10 @@
           </a:p>
         </p:txBody>
       </p:sp>
-      <p:sp>
-        <p:nvSpPr>
-          <p:cNvPr id="12" name="TextBox 11"/>
-          <p:cNvSpPr txBox="1"/>
-          <p:nvPr/>
-        </p:nvSpPr>
-        <p:spPr>
-          <a:xfrm>
-            <a:off x="898295" y="971253"/>
-            <a:ext cx="801912" cy="1969770"/>
-          </a:xfrm>
-          <a:prstGeom prst="rect">
-            <a:avLst/>
-          </a:prstGeom>
-          <a:noFill/>
-        </p:spPr>
-        <p:txBody>
-          <a:bodyPr wrap="square" rtlCol="0">
-            <a:spAutoFit/>
-          </a:bodyPr>
-          <a:lstStyle>
-            <a:defPPr>
-              <a:defRPr lang="en-US"/>
-            </a:defPPr>
-            <a:lvl1pPr algn="r">
-              <a:defRPr sz="12200" b="0" i="0">
-                <a:solidFill>
-                  <a:schemeClr val="bg2">
-                    <a:lumMod val="40000"/>
-                    <a:lumOff val="60000"/>
-                  </a:schemeClr>
-                </a:solidFill>
-                <a:latin typeface="Arial"/>
-                <a:ea typeface="+mj-ea"/>
-                <a:cs typeface="+mj-cs"/>
-              </a:defRPr>
-            </a:lvl1pPr>
-          </a:lstStyle>
-          <a:p>
-            <a:pPr lvl="0"/>
-            <a:r>
-              <a:rPr lang="en-US" dirty="0"/>
-              <a:t>“</a:t>
-            </a:r>
-          </a:p>
-        </p:txBody>
-      </p:sp>
-      <p:sp>
-        <p:nvSpPr>
-          <p:cNvPr id="15" name="TextBox 14"/>
-          <p:cNvSpPr txBox="1"/>
-          <p:nvPr/>
-        </p:nvSpPr>
-        <p:spPr>
-          <a:xfrm>
-            <a:off x="9330490" y="2613787"/>
-            <a:ext cx="801912" cy="1969770"/>
-          </a:xfrm>
-          <a:prstGeom prst="rect">
-            <a:avLst/>
-          </a:prstGeom>
-          <a:noFill/>
-        </p:spPr>
-        <p:txBody>
-          <a:bodyPr wrap="square" rtlCol="0">
-            <a:spAutoFit/>
-          </a:bodyPr>
-          <a:lstStyle>
-            <a:defPPr>
-              <a:defRPr lang="en-US"/>
-            </a:defPPr>
-            <a:lvl1pPr algn="r">
-              <a:defRPr sz="12200" b="0" i="0">
-                <a:solidFill>
-                  <a:schemeClr val="bg2">
-                    <a:lumMod val="40000"/>
-                    <a:lumOff val="60000"/>
-                  </a:schemeClr>
-                </a:solidFill>
-                <a:latin typeface="Arial"/>
-                <a:ea typeface="+mj-ea"/>
-                <a:cs typeface="+mj-cs"/>
-              </a:defRPr>
-            </a:lvl1pPr>
-          </a:lstStyle>
-          <a:p>
-            <a:pPr lvl="0"/>
-            <a:r>
-              <a:rPr lang="en-US" dirty="0"/>
-              <a:t>”</a:t>
-            </a:r>
-          </a:p>
-        </p:txBody>
-      </p:sp>
     </p:spTree>
     <p:extLst>
       <p:ext uri="{BB962C8B-B14F-4D97-AF65-F5344CB8AC3E}">
-        <p14:creationId xmlns:p14="http://schemas.microsoft.com/office/powerpoint/2010/main" val="141244401"/>
+        <p14:creationId xmlns:p14="http://schemas.microsoft.com/office/powerpoint/2010/main" val="1278697910"/>
       </p:ext>
     </p:extLst>
   </p:cSld>
@@ -2228,9 +2087,17 @@
 </p:sldLayout>
 </file>
 
-<file path=ppt/slideLayouts/slideLayout13.xml><?xml version="1.0" encoding="utf-8"?>
-<p:sldLayout xmlns:a="http://schemas.openxmlformats.org/drawingml/2006/main" xmlns:r="http://schemas.openxmlformats.org/officeDocument/2006/relationships" xmlns:p="http://schemas.openxmlformats.org/presentationml/2006/main" preserve="1">
-  <p:cSld name="Name Card">
+<file path=ppt/slideLayouts/slideLayout3.xml><?xml version="1.0" encoding="utf-8"?>
+<p:sldLayout xmlns:a="http://schemas.openxmlformats.org/drawingml/2006/main" xmlns:r="http://schemas.openxmlformats.org/officeDocument/2006/relationships" xmlns:p="http://schemas.openxmlformats.org/presentationml/2006/main" showMasterSp="0" type="secHead" preserve="1">
+  <p:cSld name="Section Header">
+    <p:bg>
+      <p:bgPr>
+        <a:solidFill>
+          <a:schemeClr val="bg1"/>
+        </a:solidFill>
+        <a:effectLst/>
+      </p:bgPr>
+    </p:bg>
     <p:spTree>
       <p:nvGrpSpPr>
         <p:cNvPr id="1" name=""/>
@@ -2247,25 +2114,113 @@
       </p:grpSpPr>
       <p:sp>
         <p:nvSpPr>
-          <p:cNvPr id="2" name="Title 1"/>
-          <p:cNvSpPr>
-            <a:spLocks noGrp="1"/>
-          </p:cNvSpPr>
-          <p:nvPr>
-            <p:ph type="title"/>
-          </p:nvPr>
+          <p:cNvPr id="7" name="Rectangle 6"/>
+          <p:cNvSpPr/>
+          <p:nvPr/>
         </p:nvSpPr>
         <p:spPr>
           <a:xfrm>
-            <a:off x="1154954" y="3124201"/>
-            <a:ext cx="8825660" cy="1653180"/>
+            <a:off x="3175" y="6400800"/>
+            <a:ext cx="12188825" cy="457200"/>
+          </a:xfrm>
+          <a:prstGeom prst="rect">
+            <a:avLst/>
+          </a:prstGeom>
+          <a:solidFill>
+            <a:schemeClr val="accent2"/>
+          </a:solidFill>
+          <a:ln>
+            <a:noFill/>
+          </a:ln>
+        </p:spPr>
+        <p:style>
+          <a:lnRef idx="2">
+            <a:schemeClr val="accent1">
+              <a:shade val="50000"/>
+            </a:schemeClr>
+          </a:lnRef>
+          <a:fillRef idx="1">
+            <a:schemeClr val="accent1"/>
+          </a:fillRef>
+          <a:effectRef idx="0">
+            <a:schemeClr val="accent1"/>
+          </a:effectRef>
+          <a:fontRef idx="minor">
+            <a:schemeClr val="lt1"/>
+          </a:fontRef>
+        </p:style>
+      </p:sp>
+      <p:sp>
+        <p:nvSpPr>
+          <p:cNvPr id="8" name="Rectangle 7"/>
+          <p:cNvSpPr/>
+          <p:nvPr/>
+        </p:nvSpPr>
+        <p:spPr>
+          <a:xfrm>
+            <a:off x="15" y="6334316"/>
+            <a:ext cx="12188825" cy="64008"/>
+          </a:xfrm>
+          <a:prstGeom prst="rect">
+            <a:avLst/>
+          </a:prstGeom>
+          <a:solidFill>
+            <a:schemeClr val="accent1"/>
+          </a:solidFill>
+          <a:ln>
+            <a:noFill/>
+          </a:ln>
+        </p:spPr>
+        <p:style>
+          <a:lnRef idx="2">
+            <a:schemeClr val="accent1">
+              <a:shade val="50000"/>
+            </a:schemeClr>
+          </a:lnRef>
+          <a:fillRef idx="1">
+            <a:schemeClr val="accent1"/>
+          </a:fillRef>
+          <a:effectRef idx="0">
+            <a:schemeClr val="accent1"/>
+          </a:effectRef>
+          <a:fontRef idx="minor">
+            <a:schemeClr val="lt1"/>
+          </a:fontRef>
+        </p:style>
+      </p:sp>
+      <p:sp>
+        <p:nvSpPr>
+          <p:cNvPr id="2" name="Title 1"/>
+          <p:cNvSpPr>
+            <a:spLocks noGrp="1"/>
+          </p:cNvSpPr>
+          <p:nvPr>
+            <p:ph type="title"/>
+          </p:nvPr>
+        </p:nvSpPr>
+        <p:spPr>
+          <a:xfrm>
+            <a:off x="1097280" y="758952"/>
+            <a:ext cx="10058400" cy="3566160"/>
           </a:xfrm>
         </p:spPr>
         <p:txBody>
-          <a:bodyPr anchor="b"/>
+          <a:bodyPr anchor="b" anchorCtr="0">
+            <a:normAutofit/>
+          </a:bodyPr>
           <a:lstStyle>
-            <a:lvl1pPr algn="l">
-              <a:defRPr sz="4000" b="0" cap="none"/>
+            <a:lvl1pPr>
+              <a:lnSpc>
+                <a:spcPct val="85000"/>
+              </a:lnSpc>
+              <a:defRPr sz="8000" b="0">
+                <a:solidFill>
+                  <a:schemeClr val="tx1">
+                    <a:lumMod val="85000"/>
+                    <a:lumOff val="15000"/>
+                  </a:schemeClr>
+                </a:solidFill>
+              </a:defRPr>
             </a:lvl1pPr>
           </a:lstStyle>
           <a:p>
@@ -2289,22 +2244,22 @@
         </p:nvSpPr>
         <p:spPr>
           <a:xfrm>
-            <a:off x="1154954" y="4777381"/>
-            <a:ext cx="8825659" cy="860400"/>
+            <a:off x="1097280" y="4453128"/>
+            <a:ext cx="10058400" cy="1143000"/>
           </a:xfrm>
         </p:spPr>
         <p:txBody>
-          <a:bodyPr anchor="t"/>
+          <a:bodyPr lIns="91440" rIns="91440" anchor="t" anchorCtr="0">
+            <a:normAutofit/>
+          </a:bodyPr>
           <a:lstStyle>
-            <a:lvl1pPr marL="0" indent="0" algn="l">
+            <a:lvl1pPr marL="0" indent="0">
               <a:buNone/>
-              <a:defRPr sz="2000" cap="none">
+              <a:defRPr sz="2400" cap="all" spc="200" baseline="0">
                 <a:solidFill>
-                  <a:schemeClr val="bg2">
-                    <a:lumMod val="40000"/>
-                    <a:lumOff val="60000"/>
-                  </a:schemeClr>
+                  <a:schemeClr val="tx2"/>
                 </a:solidFill>
+                <a:latin typeface="+mj-lt"/>
               </a:defRPr>
             </a:lvl1pPr>
             <a:lvl2pPr marL="457200" indent="0">
@@ -2414,7 +2369,7 @@
           <a:p>
             <a:fld id="{60135C24-EB33-6645-B51A-6348BD58F2AA}" type="datetimeFigureOut">
               <a:rPr lang="en-US" smtClean="0"/>
-              <a:t>8/26/25</a:t>
+              <a:t>8/3/2026</a:t>
             </a:fld>
             <a:endParaRPr lang="en-US"/>
           </a:p>
@@ -2462,10 +2417,48 @@
           </a:p>
         </p:txBody>
       </p:sp>
+      <p:cxnSp>
+        <p:nvCxnSpPr>
+          <p:cNvPr id="9" name="Straight Connector 8"/>
+          <p:cNvCxnSpPr/>
+          <p:nvPr/>
+        </p:nvCxnSpPr>
+        <p:spPr>
+          <a:xfrm>
+            <a:off x="1207658" y="4343400"/>
+            <a:ext cx="9875520" cy="0"/>
+          </a:xfrm>
+          <a:prstGeom prst="line">
+            <a:avLst/>
+          </a:prstGeom>
+          <a:ln w="6350">
+            <a:solidFill>
+              <a:schemeClr val="tx1">
+                <a:lumMod val="50000"/>
+                <a:lumOff val="50000"/>
+              </a:schemeClr>
+            </a:solidFill>
+          </a:ln>
+        </p:spPr>
+        <p:style>
+          <a:lnRef idx="1">
+            <a:schemeClr val="accent1"/>
+          </a:lnRef>
+          <a:fillRef idx="0">
+            <a:schemeClr val="accent1"/>
+          </a:fillRef>
+          <a:effectRef idx="0">
+            <a:schemeClr val="accent1"/>
+          </a:effectRef>
+          <a:fontRef idx="minor">
+            <a:schemeClr val="tx1"/>
+          </a:fontRef>
+        </p:style>
+      </p:cxnSp>
     </p:spTree>
     <p:extLst>
       <p:ext uri="{BB962C8B-B14F-4D97-AF65-F5344CB8AC3E}">
-        <p14:creationId xmlns:p14="http://schemas.microsoft.com/office/powerpoint/2010/main" val="224820027"/>
+        <p14:creationId xmlns:p14="http://schemas.microsoft.com/office/powerpoint/2010/main" val="3799787595"/>
       </p:ext>
     </p:extLst>
   </p:cSld>
@@ -2475,9 +2468,9 @@
 </p:sldLayout>
 </file>
 
-<file path=ppt/slideLayouts/slideLayout14.xml><?xml version="1.0" encoding="utf-8"?>
-<p:sldLayout xmlns:a="http://schemas.openxmlformats.org/drawingml/2006/main" xmlns:r="http://schemas.openxmlformats.org/officeDocument/2006/relationships" xmlns:p="http://schemas.openxmlformats.org/presentationml/2006/main" preserve="1">
-  <p:cSld name="3 Column">
+<file path=ppt/slideLayouts/slideLayout4.xml><?xml version="1.0" encoding="utf-8"?>
+<p:sldLayout xmlns:a="http://schemas.openxmlformats.org/drawingml/2006/main" xmlns:r="http://schemas.openxmlformats.org/officeDocument/2006/relationships" xmlns:p="http://schemas.openxmlformats.org/presentationml/2006/main" type="twoObj" preserve="1">
+  <p:cSld name="Two Content">
     <p:spTree>
       <p:nvGrpSpPr>
         <p:cNvPr id="1" name=""/>
@@ -2494,7 +2487,7 @@
       </p:grpSpPr>
       <p:sp>
         <p:nvSpPr>
-          <p:cNvPr id="2" name="Title 1"/>
+          <p:cNvPr id="8" name="Title 7"/>
           <p:cNvSpPr>
             <a:spLocks noGrp="1"/>
           </p:cNvSpPr>
@@ -2502,14 +2495,15 @@
             <p:ph type="title"/>
           </p:nvPr>
         </p:nvSpPr>
-        <p:spPr/>
+        <p:spPr>
+          <a:xfrm>
+            <a:off x="1097280" y="286603"/>
+            <a:ext cx="10058400" cy="1450757"/>
+          </a:xfrm>
+        </p:spPr>
         <p:txBody>
           <a:bodyPr/>
-          <a:lstStyle>
-            <a:lvl1pPr>
-              <a:defRPr sz="4200"/>
-            </a:lvl1pPr>
-          </a:lstStyle>
+          <a:lstStyle/>
           <a:p>
             <a:r>
               <a:rPr lang="en-US"/>
@@ -2521,33 +2515,267 @@
       </p:sp>
       <p:sp>
         <p:nvSpPr>
-          <p:cNvPr id="3" name="Text Placeholder 2"/>
-          <p:cNvSpPr>
-            <a:spLocks noGrp="1"/>
-          </p:cNvSpPr>
-          <p:nvPr>
-            <p:ph type="body" idx="1"/>
+          <p:cNvPr id="3" name="Content Placeholder 2"/>
+          <p:cNvSpPr>
+            <a:spLocks noGrp="1"/>
+          </p:cNvSpPr>
+          <p:nvPr>
+            <p:ph sz="half" idx="1"/>
           </p:nvPr>
         </p:nvSpPr>
         <p:spPr>
           <a:xfrm>
-            <a:off x="632947" y="1981200"/>
-            <a:ext cx="2946866" cy="576262"/>
+            <a:off x="1097279" y="1845734"/>
+            <a:ext cx="4937760" cy="4023360"/>
           </a:xfrm>
         </p:spPr>
         <p:txBody>
-          <a:bodyPr anchor="b">
-            <a:noAutofit/>
+          <a:bodyPr/>
+          <a:lstStyle/>
+          <a:p>
+            <a:pPr lvl="0"/>
+            <a:r>
+              <a:rPr lang="en-US"/>
+              <a:t>Click to edit Master text styles</a:t>
+            </a:r>
+          </a:p>
+          <a:p>
+            <a:pPr lvl="1"/>
+            <a:r>
+              <a:rPr lang="en-US"/>
+              <a:t>Second level</a:t>
+            </a:r>
+          </a:p>
+          <a:p>
+            <a:pPr lvl="2"/>
+            <a:r>
+              <a:rPr lang="en-US"/>
+              <a:t>Third level</a:t>
+            </a:r>
+          </a:p>
+          <a:p>
+            <a:pPr lvl="3"/>
+            <a:r>
+              <a:rPr lang="en-US"/>
+              <a:t>Fourth level</a:t>
+            </a:r>
+          </a:p>
+          <a:p>
+            <a:pPr lvl="4"/>
+            <a:r>
+              <a:rPr lang="en-US"/>
+              <a:t>Fifth level</a:t>
+            </a:r>
+            <a:endParaRPr lang="en-US" dirty="0"/>
+          </a:p>
+        </p:txBody>
+      </p:sp>
+      <p:sp>
+        <p:nvSpPr>
+          <p:cNvPr id="4" name="Content Placeholder 3"/>
+          <p:cNvSpPr>
+            <a:spLocks noGrp="1"/>
+          </p:cNvSpPr>
+          <p:nvPr>
+            <p:ph sz="half" idx="2"/>
+          </p:nvPr>
+        </p:nvSpPr>
+        <p:spPr>
+          <a:xfrm>
+            <a:off x="6217920" y="1845735"/>
+            <a:ext cx="4937760" cy="4023360"/>
+          </a:xfrm>
+        </p:spPr>
+        <p:txBody>
+          <a:bodyPr/>
+          <a:lstStyle/>
+          <a:p>
+            <a:pPr lvl="0"/>
+            <a:r>
+              <a:rPr lang="en-US"/>
+              <a:t>Click to edit Master text styles</a:t>
+            </a:r>
+          </a:p>
+          <a:p>
+            <a:pPr lvl="1"/>
+            <a:r>
+              <a:rPr lang="en-US"/>
+              <a:t>Second level</a:t>
+            </a:r>
+          </a:p>
+          <a:p>
+            <a:pPr lvl="2"/>
+            <a:r>
+              <a:rPr lang="en-US"/>
+              <a:t>Third level</a:t>
+            </a:r>
+          </a:p>
+          <a:p>
+            <a:pPr lvl="3"/>
+            <a:r>
+              <a:rPr lang="en-US"/>
+              <a:t>Fourth level</a:t>
+            </a:r>
+          </a:p>
+          <a:p>
+            <a:pPr lvl="4"/>
+            <a:r>
+              <a:rPr lang="en-US"/>
+              <a:t>Fifth level</a:t>
+            </a:r>
+            <a:endParaRPr lang="en-US" dirty="0"/>
+          </a:p>
+        </p:txBody>
+      </p:sp>
+      <p:sp>
+        <p:nvSpPr>
+          <p:cNvPr id="5" name="Date Placeholder 4"/>
+          <p:cNvSpPr>
+            <a:spLocks noGrp="1"/>
+          </p:cNvSpPr>
+          <p:nvPr>
+            <p:ph type="dt" sz="half" idx="10"/>
+          </p:nvPr>
+        </p:nvSpPr>
+        <p:spPr/>
+        <p:txBody>
+          <a:bodyPr/>
+          <a:lstStyle/>
+          <a:p>
+            <a:fld id="{60135C24-EB33-6645-B51A-6348BD58F2AA}" type="datetimeFigureOut">
+              <a:rPr lang="en-US" smtClean="0"/>
+              <a:t>8/3/2026</a:t>
+            </a:fld>
+            <a:endParaRPr lang="en-US"/>
+          </a:p>
+        </p:txBody>
+      </p:sp>
+      <p:sp>
+        <p:nvSpPr>
+          <p:cNvPr id="6" name="Footer Placeholder 5"/>
+          <p:cNvSpPr>
+            <a:spLocks noGrp="1"/>
+          </p:cNvSpPr>
+          <p:nvPr>
+            <p:ph type="ftr" sz="quarter" idx="11"/>
+          </p:nvPr>
+        </p:nvSpPr>
+        <p:spPr/>
+        <p:txBody>
+          <a:bodyPr/>
+          <a:lstStyle/>
+          <a:p>
+            <a:endParaRPr lang="en-US"/>
+          </a:p>
+        </p:txBody>
+      </p:sp>
+      <p:sp>
+        <p:nvSpPr>
+          <p:cNvPr id="7" name="Slide Number Placeholder 6"/>
+          <p:cNvSpPr>
+            <a:spLocks noGrp="1"/>
+          </p:cNvSpPr>
+          <p:nvPr>
+            <p:ph type="sldNum" sz="quarter" idx="12"/>
+          </p:nvPr>
+        </p:nvSpPr>
+        <p:spPr/>
+        <p:txBody>
+          <a:bodyPr/>
+          <a:lstStyle/>
+          <a:p>
+            <a:fld id="{292730AB-017E-7B48-BDF2-98302496DA1B}" type="slidenum">
+              <a:rPr lang="en-US" smtClean="0"/>
+              <a:t>‹#›</a:t>
+            </a:fld>
+            <a:endParaRPr lang="en-US"/>
+          </a:p>
+        </p:txBody>
+      </p:sp>
+    </p:spTree>
+    <p:extLst>
+      <p:ext uri="{BB962C8B-B14F-4D97-AF65-F5344CB8AC3E}">
+        <p14:creationId xmlns:p14="http://schemas.microsoft.com/office/powerpoint/2010/main" val="1627272602"/>
+      </p:ext>
+    </p:extLst>
+  </p:cSld>
+  <p:clrMapOvr>
+    <a:masterClrMapping/>
+  </p:clrMapOvr>
+</p:sldLayout>
+</file>
+
+<file path=ppt/slideLayouts/slideLayout5.xml><?xml version="1.0" encoding="utf-8"?>
+<p:sldLayout xmlns:a="http://schemas.openxmlformats.org/drawingml/2006/main" xmlns:r="http://schemas.openxmlformats.org/officeDocument/2006/relationships" xmlns:p="http://schemas.openxmlformats.org/presentationml/2006/main" type="twoTxTwoObj" preserve="1">
+  <p:cSld name="Comparison">
+    <p:spTree>
+      <p:nvGrpSpPr>
+        <p:cNvPr id="1" name=""/>
+        <p:cNvGrpSpPr/>
+        <p:nvPr/>
+      </p:nvGrpSpPr>
+      <p:grpSpPr>
+        <a:xfrm>
+          <a:off x="0" y="0"/>
+          <a:ext cx="0" cy="0"/>
+          <a:chOff x="0" y="0"/>
+          <a:chExt cx="0" cy="0"/>
+        </a:xfrm>
+      </p:grpSpPr>
+      <p:sp>
+        <p:nvSpPr>
+          <p:cNvPr id="10" name="Title 9"/>
+          <p:cNvSpPr>
+            <a:spLocks noGrp="1"/>
+          </p:cNvSpPr>
+          <p:nvPr>
+            <p:ph type="title"/>
+          </p:nvPr>
+        </p:nvSpPr>
+        <p:spPr>
+          <a:xfrm>
+            <a:off x="1097280" y="286603"/>
+            <a:ext cx="10058400" cy="1450757"/>
+          </a:xfrm>
+        </p:spPr>
+        <p:txBody>
+          <a:bodyPr/>
+          <a:lstStyle/>
+          <a:p>
+            <a:r>
+              <a:rPr lang="en-US"/>
+              <a:t>Click to edit Master title style</a:t>
+            </a:r>
+            <a:endParaRPr lang="en-US" dirty="0"/>
+          </a:p>
+        </p:txBody>
+      </p:sp>
+      <p:sp>
+        <p:nvSpPr>
+          <p:cNvPr id="3" name="Text Placeholder 2"/>
+          <p:cNvSpPr>
+            <a:spLocks noGrp="1"/>
+          </p:cNvSpPr>
+          <p:nvPr>
+            <p:ph type="body" idx="1"/>
+          </p:nvPr>
+        </p:nvSpPr>
+        <p:spPr>
+          <a:xfrm>
+            <a:off x="1097280" y="1846052"/>
+            <a:ext cx="4937760" cy="736282"/>
+          </a:xfrm>
+        </p:spPr>
+        <p:txBody>
+          <a:bodyPr lIns="91440" rIns="91440" anchor="ctr">
+            <a:normAutofit/>
           </a:bodyPr>
           <a:lstStyle>
             <a:lvl1pPr marL="0" indent="0">
               <a:buNone/>
-              <a:defRPr sz="2400" b="0">
+              <a:defRPr sz="2000" b="0" cap="all" baseline="0">
                 <a:solidFill>
-                  <a:schemeClr val="bg2">
-                    <a:lumMod val="40000"/>
-                    <a:lumOff val="60000"/>
-                  </a:schemeClr>
+                  <a:schemeClr val="tx2"/>
                 </a:solidFill>
               </a:defRPr>
             </a:lvl1pPr>
@@ -2595,100 +2823,87 @@
       </p:sp>
       <p:sp>
         <p:nvSpPr>
-          <p:cNvPr id="16" name="Text Placeholder 3"/>
-          <p:cNvSpPr>
-            <a:spLocks noGrp="1"/>
-          </p:cNvSpPr>
-          <p:nvPr>
-            <p:ph type="body" sz="half" idx="15"/>
+          <p:cNvPr id="4" name="Content Placeholder 3"/>
+          <p:cNvSpPr>
+            <a:spLocks noGrp="1"/>
+          </p:cNvSpPr>
+          <p:nvPr>
+            <p:ph sz="half" idx="2"/>
           </p:nvPr>
         </p:nvSpPr>
         <p:spPr>
           <a:xfrm>
-            <a:off x="652463" y="2667000"/>
-            <a:ext cx="2927350" cy="3589338"/>
+            <a:off x="1097280" y="2582334"/>
+            <a:ext cx="4937760" cy="3378200"/>
           </a:xfrm>
         </p:spPr>
         <p:txBody>
-          <a:bodyPr anchor="t">
+          <a:bodyPr/>
+          <a:lstStyle/>
+          <a:p>
+            <a:pPr lvl="0"/>
+            <a:r>
+              <a:rPr lang="en-US"/>
+              <a:t>Click to edit Master text styles</a:t>
+            </a:r>
+          </a:p>
+          <a:p>
+            <a:pPr lvl="1"/>
+            <a:r>
+              <a:rPr lang="en-US"/>
+              <a:t>Second level</a:t>
+            </a:r>
+          </a:p>
+          <a:p>
+            <a:pPr lvl="2"/>
+            <a:r>
+              <a:rPr lang="en-US"/>
+              <a:t>Third level</a:t>
+            </a:r>
+          </a:p>
+          <a:p>
+            <a:pPr lvl="3"/>
+            <a:r>
+              <a:rPr lang="en-US"/>
+              <a:t>Fourth level</a:t>
+            </a:r>
+          </a:p>
+          <a:p>
+            <a:pPr lvl="4"/>
+            <a:r>
+              <a:rPr lang="en-US"/>
+              <a:t>Fifth level</a:t>
+            </a:r>
+            <a:endParaRPr lang="en-US" dirty="0"/>
+          </a:p>
+        </p:txBody>
+      </p:sp>
+      <p:sp>
+        <p:nvSpPr>
+          <p:cNvPr id="5" name="Text Placeholder 4"/>
+          <p:cNvSpPr>
+            <a:spLocks noGrp="1"/>
+          </p:cNvSpPr>
+          <p:nvPr>
+            <p:ph type="body" sz="quarter" idx="3"/>
+          </p:nvPr>
+        </p:nvSpPr>
+        <p:spPr>
+          <a:xfrm>
+            <a:off x="6217920" y="1846052"/>
+            <a:ext cx="4937760" cy="736282"/>
+          </a:xfrm>
+        </p:spPr>
+        <p:txBody>
+          <a:bodyPr lIns="91440" rIns="91440" anchor="ctr">
             <a:normAutofit/>
           </a:bodyPr>
           <a:lstStyle>
             <a:lvl1pPr marL="0" indent="0">
               <a:buNone/>
-              <a:defRPr sz="1400"/>
-            </a:lvl1pPr>
-            <a:lvl2pPr marL="457200" indent="0">
-              <a:buNone/>
-              <a:defRPr sz="1200"/>
-            </a:lvl2pPr>
-            <a:lvl3pPr marL="914400" indent="0">
-              <a:buNone/>
-              <a:defRPr sz="1000"/>
-            </a:lvl3pPr>
-            <a:lvl4pPr marL="1371600" indent="0">
-              <a:buNone/>
-              <a:defRPr sz="900"/>
-            </a:lvl4pPr>
-            <a:lvl5pPr marL="1828800" indent="0">
-              <a:buNone/>
-              <a:defRPr sz="900"/>
-            </a:lvl5pPr>
-            <a:lvl6pPr marL="2286000" indent="0">
-              <a:buNone/>
-              <a:defRPr sz="900"/>
-            </a:lvl6pPr>
-            <a:lvl7pPr marL="2743200" indent="0">
-              <a:buNone/>
-              <a:defRPr sz="900"/>
-            </a:lvl7pPr>
-            <a:lvl8pPr marL="3200400" indent="0">
-              <a:buNone/>
-              <a:defRPr sz="900"/>
-            </a:lvl8pPr>
-            <a:lvl9pPr marL="3657600" indent="0">
-              <a:buNone/>
-              <a:defRPr sz="900"/>
-            </a:lvl9pPr>
-          </a:lstStyle>
-          <a:p>
-            <a:pPr lvl="0"/>
-            <a:r>
-              <a:rPr lang="en-US"/>
-              <a:t>Click to edit Master text styles</a:t>
-            </a:r>
-          </a:p>
-        </p:txBody>
-      </p:sp>
-      <p:sp>
-        <p:nvSpPr>
-          <p:cNvPr id="5" name="Text Placeholder 4"/>
-          <p:cNvSpPr>
-            <a:spLocks noGrp="1"/>
-          </p:cNvSpPr>
-          <p:nvPr>
-            <p:ph type="body" sz="quarter" idx="3"/>
-          </p:nvPr>
-        </p:nvSpPr>
-        <p:spPr>
-          <a:xfrm>
-            <a:off x="3883659" y="1981200"/>
-            <a:ext cx="2936241" cy="576262"/>
-          </a:xfrm>
-        </p:spPr>
-        <p:txBody>
-          <a:bodyPr anchor="b">
-            <a:noAutofit/>
-          </a:bodyPr>
-          <a:lstStyle>
-            <a:lvl1pPr marL="0" indent="0">
-              <a:buNone/>
-              <a:defRPr sz="2400" b="0">
+              <a:defRPr sz="2000" b="0" cap="all" baseline="0">
                 <a:solidFill>
-                  <a:schemeClr val="bg2">
-                    <a:lumMod val="40000"/>
-                    <a:lumOff val="60000"/>
-                  </a:schemeClr>
+                  <a:schemeClr val="tx2"/>
                 </a:solidFill>
               </a:defRPr>
             </a:lvl1pPr>
@@ -2736,28 +2951,652 @@
       </p:sp>
       <p:sp>
         <p:nvSpPr>
-          <p:cNvPr id="19" name="Text Placeholder 3"/>
-          <p:cNvSpPr>
-            <a:spLocks noGrp="1"/>
-          </p:cNvSpPr>
-          <p:nvPr>
-            <p:ph type="body" sz="half" idx="16"/>
+          <p:cNvPr id="6" name="Content Placeholder 5"/>
+          <p:cNvSpPr>
+            <a:spLocks noGrp="1"/>
+          </p:cNvSpPr>
+          <p:nvPr>
+            <p:ph sz="quarter" idx="4"/>
           </p:nvPr>
         </p:nvSpPr>
         <p:spPr>
           <a:xfrm>
-            <a:off x="3873106" y="2667000"/>
-            <a:ext cx="2946794" cy="3589338"/>
+            <a:off x="6217920" y="2582334"/>
+            <a:ext cx="4937760" cy="3378200"/>
           </a:xfrm>
         </p:spPr>
         <p:txBody>
-          <a:bodyPr anchor="t">
+          <a:bodyPr/>
+          <a:lstStyle/>
+          <a:p>
+            <a:pPr lvl="0"/>
+            <a:r>
+              <a:rPr lang="en-US"/>
+              <a:t>Click to edit Master text styles</a:t>
+            </a:r>
+          </a:p>
+          <a:p>
+            <a:pPr lvl="1"/>
+            <a:r>
+              <a:rPr lang="en-US"/>
+              <a:t>Second level</a:t>
+            </a:r>
+          </a:p>
+          <a:p>
+            <a:pPr lvl="2"/>
+            <a:r>
+              <a:rPr lang="en-US"/>
+              <a:t>Third level</a:t>
+            </a:r>
+          </a:p>
+          <a:p>
+            <a:pPr lvl="3"/>
+            <a:r>
+              <a:rPr lang="en-US"/>
+              <a:t>Fourth level</a:t>
+            </a:r>
+          </a:p>
+          <a:p>
+            <a:pPr lvl="4"/>
+            <a:r>
+              <a:rPr lang="en-US"/>
+              <a:t>Fifth level</a:t>
+            </a:r>
+            <a:endParaRPr lang="en-US" dirty="0"/>
+          </a:p>
+        </p:txBody>
+      </p:sp>
+      <p:sp>
+        <p:nvSpPr>
+          <p:cNvPr id="7" name="Date Placeholder 6"/>
+          <p:cNvSpPr>
+            <a:spLocks noGrp="1"/>
+          </p:cNvSpPr>
+          <p:nvPr>
+            <p:ph type="dt" sz="half" idx="10"/>
+          </p:nvPr>
+        </p:nvSpPr>
+        <p:spPr/>
+        <p:txBody>
+          <a:bodyPr/>
+          <a:lstStyle/>
+          <a:p>
+            <a:fld id="{60135C24-EB33-6645-B51A-6348BD58F2AA}" type="datetimeFigureOut">
+              <a:rPr lang="en-US" smtClean="0"/>
+              <a:t>8/3/2026</a:t>
+            </a:fld>
+            <a:endParaRPr lang="en-US"/>
+          </a:p>
+        </p:txBody>
+      </p:sp>
+      <p:sp>
+        <p:nvSpPr>
+          <p:cNvPr id="8" name="Footer Placeholder 7"/>
+          <p:cNvSpPr>
+            <a:spLocks noGrp="1"/>
+          </p:cNvSpPr>
+          <p:nvPr>
+            <p:ph type="ftr" sz="quarter" idx="11"/>
+          </p:nvPr>
+        </p:nvSpPr>
+        <p:spPr/>
+        <p:txBody>
+          <a:bodyPr/>
+          <a:lstStyle/>
+          <a:p>
+            <a:endParaRPr lang="en-US"/>
+          </a:p>
+        </p:txBody>
+      </p:sp>
+      <p:sp>
+        <p:nvSpPr>
+          <p:cNvPr id="9" name="Slide Number Placeholder 8"/>
+          <p:cNvSpPr>
+            <a:spLocks noGrp="1"/>
+          </p:cNvSpPr>
+          <p:nvPr>
+            <p:ph type="sldNum" sz="quarter" idx="12"/>
+          </p:nvPr>
+        </p:nvSpPr>
+        <p:spPr/>
+        <p:txBody>
+          <a:bodyPr/>
+          <a:lstStyle/>
+          <a:p>
+            <a:fld id="{292730AB-017E-7B48-BDF2-98302496DA1B}" type="slidenum">
+              <a:rPr lang="en-US" smtClean="0"/>
+              <a:t>‹#›</a:t>
+            </a:fld>
+            <a:endParaRPr lang="en-US"/>
+          </a:p>
+        </p:txBody>
+      </p:sp>
+    </p:spTree>
+    <p:extLst>
+      <p:ext uri="{BB962C8B-B14F-4D97-AF65-F5344CB8AC3E}">
+        <p14:creationId xmlns:p14="http://schemas.microsoft.com/office/powerpoint/2010/main" val="251863309"/>
+      </p:ext>
+    </p:extLst>
+  </p:cSld>
+  <p:clrMapOvr>
+    <a:masterClrMapping/>
+  </p:clrMapOvr>
+</p:sldLayout>
+</file>
+
+<file path=ppt/slideLayouts/slideLayout6.xml><?xml version="1.0" encoding="utf-8"?>
+<p:sldLayout xmlns:a="http://schemas.openxmlformats.org/drawingml/2006/main" xmlns:r="http://schemas.openxmlformats.org/officeDocument/2006/relationships" xmlns:p="http://schemas.openxmlformats.org/presentationml/2006/main" type="titleOnly" preserve="1">
+  <p:cSld name="Title Only">
+    <p:spTree>
+      <p:nvGrpSpPr>
+        <p:cNvPr id="1" name=""/>
+        <p:cNvGrpSpPr/>
+        <p:nvPr/>
+      </p:nvGrpSpPr>
+      <p:grpSpPr>
+        <a:xfrm>
+          <a:off x="0" y="0"/>
+          <a:ext cx="0" cy="0"/>
+          <a:chOff x="0" y="0"/>
+          <a:chExt cx="0" cy="0"/>
+        </a:xfrm>
+      </p:grpSpPr>
+      <p:sp>
+        <p:nvSpPr>
+          <p:cNvPr id="2" name="Title 1"/>
+          <p:cNvSpPr>
+            <a:spLocks noGrp="1"/>
+          </p:cNvSpPr>
+          <p:nvPr>
+            <p:ph type="title"/>
+          </p:nvPr>
+        </p:nvSpPr>
+        <p:spPr/>
+        <p:txBody>
+          <a:bodyPr/>
+          <a:lstStyle/>
+          <a:p>
+            <a:r>
+              <a:rPr lang="en-US"/>
+              <a:t>Click to edit Master title style</a:t>
+            </a:r>
+            <a:endParaRPr lang="en-US" dirty="0"/>
+          </a:p>
+        </p:txBody>
+      </p:sp>
+      <p:sp>
+        <p:nvSpPr>
+          <p:cNvPr id="3" name="Date Placeholder 2"/>
+          <p:cNvSpPr>
+            <a:spLocks noGrp="1"/>
+          </p:cNvSpPr>
+          <p:nvPr>
+            <p:ph type="dt" sz="half" idx="10"/>
+          </p:nvPr>
+        </p:nvSpPr>
+        <p:spPr/>
+        <p:txBody>
+          <a:bodyPr/>
+          <a:lstStyle/>
+          <a:p>
+            <a:fld id="{60135C24-EB33-6645-B51A-6348BD58F2AA}" type="datetimeFigureOut">
+              <a:rPr lang="en-US" smtClean="0"/>
+              <a:t>8/3/2026</a:t>
+            </a:fld>
+            <a:endParaRPr lang="en-US"/>
+          </a:p>
+        </p:txBody>
+      </p:sp>
+      <p:sp>
+        <p:nvSpPr>
+          <p:cNvPr id="4" name="Footer Placeholder 3"/>
+          <p:cNvSpPr>
+            <a:spLocks noGrp="1"/>
+          </p:cNvSpPr>
+          <p:nvPr>
+            <p:ph type="ftr" sz="quarter" idx="11"/>
+          </p:nvPr>
+        </p:nvSpPr>
+        <p:spPr/>
+        <p:txBody>
+          <a:bodyPr/>
+          <a:lstStyle/>
+          <a:p>
+            <a:endParaRPr lang="en-US"/>
+          </a:p>
+        </p:txBody>
+      </p:sp>
+      <p:sp>
+        <p:nvSpPr>
+          <p:cNvPr id="5" name="Slide Number Placeholder 4"/>
+          <p:cNvSpPr>
+            <a:spLocks noGrp="1"/>
+          </p:cNvSpPr>
+          <p:nvPr>
+            <p:ph type="sldNum" sz="quarter" idx="12"/>
+          </p:nvPr>
+        </p:nvSpPr>
+        <p:spPr/>
+        <p:txBody>
+          <a:bodyPr/>
+          <a:lstStyle/>
+          <a:p>
+            <a:fld id="{292730AB-017E-7B48-BDF2-98302496DA1B}" type="slidenum">
+              <a:rPr lang="en-US" smtClean="0"/>
+              <a:t>‹#›</a:t>
+            </a:fld>
+            <a:endParaRPr lang="en-US"/>
+          </a:p>
+        </p:txBody>
+      </p:sp>
+    </p:spTree>
+    <p:extLst>
+      <p:ext uri="{BB962C8B-B14F-4D97-AF65-F5344CB8AC3E}">
+        <p14:creationId xmlns:p14="http://schemas.microsoft.com/office/powerpoint/2010/main" val="1442813982"/>
+      </p:ext>
+    </p:extLst>
+  </p:cSld>
+  <p:clrMapOvr>
+    <a:masterClrMapping/>
+  </p:clrMapOvr>
+</p:sldLayout>
+</file>
+
+<file path=ppt/slideLayouts/slideLayout7.xml><?xml version="1.0" encoding="utf-8"?>
+<p:sldLayout xmlns:a="http://schemas.openxmlformats.org/drawingml/2006/main" xmlns:r="http://schemas.openxmlformats.org/officeDocument/2006/relationships" xmlns:p="http://schemas.openxmlformats.org/presentationml/2006/main" showMasterSp="0" type="blank" preserve="1">
+  <p:cSld name="Blank">
+    <p:spTree>
+      <p:nvGrpSpPr>
+        <p:cNvPr id="1" name=""/>
+        <p:cNvGrpSpPr/>
+        <p:nvPr/>
+      </p:nvGrpSpPr>
+      <p:grpSpPr>
+        <a:xfrm>
+          <a:off x="0" y="0"/>
+          <a:ext cx="0" cy="0"/>
+          <a:chOff x="0" y="0"/>
+          <a:chExt cx="0" cy="0"/>
+        </a:xfrm>
+      </p:grpSpPr>
+      <p:sp>
+        <p:nvSpPr>
+          <p:cNvPr id="5" name="Rectangle 4"/>
+          <p:cNvSpPr/>
+          <p:nvPr/>
+        </p:nvSpPr>
+        <p:spPr>
+          <a:xfrm>
+            <a:off x="3175" y="6400800"/>
+            <a:ext cx="12188825" cy="457200"/>
+          </a:xfrm>
+          <a:prstGeom prst="rect">
+            <a:avLst/>
+          </a:prstGeom>
+          <a:solidFill>
+            <a:schemeClr val="accent2"/>
+          </a:solidFill>
+          <a:ln>
+            <a:noFill/>
+          </a:ln>
+        </p:spPr>
+        <p:style>
+          <a:lnRef idx="2">
+            <a:schemeClr val="accent1">
+              <a:shade val="50000"/>
+            </a:schemeClr>
+          </a:lnRef>
+          <a:fillRef idx="1">
+            <a:schemeClr val="accent1"/>
+          </a:fillRef>
+          <a:effectRef idx="0">
+            <a:schemeClr val="accent1"/>
+          </a:effectRef>
+          <a:fontRef idx="minor">
+            <a:schemeClr val="lt1"/>
+          </a:fontRef>
+        </p:style>
+      </p:sp>
+      <p:sp>
+        <p:nvSpPr>
+          <p:cNvPr id="6" name="Rectangle 5"/>
+          <p:cNvSpPr/>
+          <p:nvPr/>
+        </p:nvSpPr>
+        <p:spPr>
+          <a:xfrm>
+            <a:off x="15" y="6334316"/>
+            <a:ext cx="12188825" cy="64008"/>
+          </a:xfrm>
+          <a:prstGeom prst="rect">
+            <a:avLst/>
+          </a:prstGeom>
+          <a:solidFill>
+            <a:schemeClr val="accent1"/>
+          </a:solidFill>
+          <a:ln>
+            <a:noFill/>
+          </a:ln>
+        </p:spPr>
+        <p:style>
+          <a:lnRef idx="2">
+            <a:schemeClr val="accent1">
+              <a:shade val="50000"/>
+            </a:schemeClr>
+          </a:lnRef>
+          <a:fillRef idx="1">
+            <a:schemeClr val="accent1"/>
+          </a:fillRef>
+          <a:effectRef idx="0">
+            <a:schemeClr val="accent1"/>
+          </a:effectRef>
+          <a:fontRef idx="minor">
+            <a:schemeClr val="lt1"/>
+          </a:fontRef>
+        </p:style>
+      </p:sp>
+      <p:sp>
+        <p:nvSpPr>
+          <p:cNvPr id="7" name="Date Placeholder 6"/>
+          <p:cNvSpPr>
+            <a:spLocks noGrp="1"/>
+          </p:cNvSpPr>
+          <p:nvPr>
+            <p:ph type="dt" sz="half" idx="10"/>
+          </p:nvPr>
+        </p:nvSpPr>
+        <p:spPr/>
+        <p:txBody>
+          <a:bodyPr/>
+          <a:lstStyle/>
+          <a:p>
+            <a:fld id="{60135C24-EB33-6645-B51A-6348BD58F2AA}" type="datetimeFigureOut">
+              <a:rPr lang="en-US" smtClean="0"/>
+              <a:t>8/3/2026</a:t>
+            </a:fld>
+            <a:endParaRPr lang="en-US"/>
+          </a:p>
+        </p:txBody>
+      </p:sp>
+      <p:sp>
+        <p:nvSpPr>
+          <p:cNvPr id="8" name="Footer Placeholder 7"/>
+          <p:cNvSpPr>
+            <a:spLocks noGrp="1"/>
+          </p:cNvSpPr>
+          <p:nvPr>
+            <p:ph type="ftr" sz="quarter" idx="11"/>
+          </p:nvPr>
+        </p:nvSpPr>
+        <p:spPr/>
+        <p:txBody>
+          <a:bodyPr/>
+          <a:lstStyle>
+            <a:lvl1pPr>
+              <a:defRPr>
+                <a:solidFill>
+                  <a:srgbClr val="FFFFFF"/>
+                </a:solidFill>
+              </a:defRPr>
+            </a:lvl1pPr>
+          </a:lstStyle>
+          <a:p>
+            <a:endParaRPr lang="en-US"/>
+          </a:p>
+        </p:txBody>
+      </p:sp>
+      <p:sp>
+        <p:nvSpPr>
+          <p:cNvPr id="9" name="Slide Number Placeholder 8"/>
+          <p:cNvSpPr>
+            <a:spLocks noGrp="1"/>
+          </p:cNvSpPr>
+          <p:nvPr>
+            <p:ph type="sldNum" sz="quarter" idx="12"/>
+          </p:nvPr>
+        </p:nvSpPr>
+        <p:spPr/>
+        <p:txBody>
+          <a:bodyPr/>
+          <a:lstStyle/>
+          <a:p>
+            <a:fld id="{292730AB-017E-7B48-BDF2-98302496DA1B}" type="slidenum">
+              <a:rPr lang="en-US" smtClean="0"/>
+              <a:t>‹#›</a:t>
+            </a:fld>
+            <a:endParaRPr lang="en-US"/>
+          </a:p>
+        </p:txBody>
+      </p:sp>
+    </p:spTree>
+    <p:extLst>
+      <p:ext uri="{BB962C8B-B14F-4D97-AF65-F5344CB8AC3E}">
+        <p14:creationId xmlns:p14="http://schemas.microsoft.com/office/powerpoint/2010/main" val="790213803"/>
+      </p:ext>
+    </p:extLst>
+  </p:cSld>
+  <p:clrMapOvr>
+    <a:masterClrMapping/>
+  </p:clrMapOvr>
+</p:sldLayout>
+</file>
+
+<file path=ppt/slideLayouts/slideLayout8.xml><?xml version="1.0" encoding="utf-8"?>
+<p:sldLayout xmlns:a="http://schemas.openxmlformats.org/drawingml/2006/main" xmlns:r="http://schemas.openxmlformats.org/officeDocument/2006/relationships" xmlns:p="http://schemas.openxmlformats.org/presentationml/2006/main" showMasterSp="0" type="objTx" preserve="1">
+  <p:cSld name="Content with Caption">
+    <p:spTree>
+      <p:nvGrpSpPr>
+        <p:cNvPr id="1" name=""/>
+        <p:cNvGrpSpPr/>
+        <p:nvPr/>
+      </p:nvGrpSpPr>
+      <p:grpSpPr>
+        <a:xfrm>
+          <a:off x="0" y="0"/>
+          <a:ext cx="0" cy="0"/>
+          <a:chOff x="0" y="0"/>
+          <a:chExt cx="0" cy="0"/>
+        </a:xfrm>
+      </p:grpSpPr>
+      <p:sp>
+        <p:nvSpPr>
+          <p:cNvPr id="8" name="Rectangle 7"/>
+          <p:cNvSpPr/>
+          <p:nvPr/>
+        </p:nvSpPr>
+        <p:spPr>
+          <a:xfrm>
+            <a:off x="16" y="0"/>
+            <a:ext cx="4050791" cy="6858000"/>
+          </a:xfrm>
+          <a:prstGeom prst="rect">
+            <a:avLst/>
+          </a:prstGeom>
+          <a:solidFill>
+            <a:schemeClr val="accent2"/>
+          </a:solidFill>
+          <a:ln>
+            <a:noFill/>
+          </a:ln>
+        </p:spPr>
+        <p:style>
+          <a:lnRef idx="2">
+            <a:schemeClr val="accent1">
+              <a:shade val="50000"/>
+            </a:schemeClr>
+          </a:lnRef>
+          <a:fillRef idx="1">
+            <a:schemeClr val="accent1"/>
+          </a:fillRef>
+          <a:effectRef idx="0">
+            <a:schemeClr val="accent1"/>
+          </a:effectRef>
+          <a:fontRef idx="minor">
+            <a:schemeClr val="lt1"/>
+          </a:fontRef>
+        </p:style>
+      </p:sp>
+      <p:sp>
+        <p:nvSpPr>
+          <p:cNvPr id="9" name="Rectangle 8"/>
+          <p:cNvSpPr/>
+          <p:nvPr/>
+        </p:nvSpPr>
+        <p:spPr>
+          <a:xfrm>
+            <a:off x="4040071" y="0"/>
+            <a:ext cx="64008" cy="6858000"/>
+          </a:xfrm>
+          <a:prstGeom prst="rect">
+            <a:avLst/>
+          </a:prstGeom>
+          <a:solidFill>
+            <a:schemeClr val="accent1"/>
+          </a:solidFill>
+          <a:ln>
+            <a:noFill/>
+          </a:ln>
+        </p:spPr>
+        <p:style>
+          <a:lnRef idx="2">
+            <a:schemeClr val="accent1">
+              <a:shade val="50000"/>
+            </a:schemeClr>
+          </a:lnRef>
+          <a:fillRef idx="1">
+            <a:schemeClr val="accent1"/>
+          </a:fillRef>
+          <a:effectRef idx="0">
+            <a:schemeClr val="accent1"/>
+          </a:effectRef>
+          <a:fontRef idx="minor">
+            <a:schemeClr val="lt1"/>
+          </a:fontRef>
+        </p:style>
+      </p:sp>
+      <p:sp>
+        <p:nvSpPr>
+          <p:cNvPr id="2" name="Title 1"/>
+          <p:cNvSpPr>
+            <a:spLocks noGrp="1"/>
+          </p:cNvSpPr>
+          <p:nvPr>
+            <p:ph type="title"/>
+          </p:nvPr>
+        </p:nvSpPr>
+        <p:spPr>
+          <a:xfrm>
+            <a:off x="457200" y="594359"/>
+            <a:ext cx="3200400" cy="2286000"/>
+          </a:xfrm>
+        </p:spPr>
+        <p:txBody>
+          <a:bodyPr anchor="b">
+            <a:normAutofit/>
+          </a:bodyPr>
+          <a:lstStyle>
+            <a:lvl1pPr>
+              <a:defRPr sz="3600" b="0">
+                <a:solidFill>
+                  <a:srgbClr val="FFFFFF"/>
+                </a:solidFill>
+              </a:defRPr>
+            </a:lvl1pPr>
+          </a:lstStyle>
+          <a:p>
+            <a:r>
+              <a:rPr lang="en-US"/>
+              <a:t>Click to edit Master title style</a:t>
+            </a:r>
+            <a:endParaRPr lang="en-US" dirty="0"/>
+          </a:p>
+        </p:txBody>
+      </p:sp>
+      <p:sp>
+        <p:nvSpPr>
+          <p:cNvPr id="3" name="Content Placeholder 2"/>
+          <p:cNvSpPr>
+            <a:spLocks noGrp="1"/>
+          </p:cNvSpPr>
+          <p:nvPr>
+            <p:ph idx="1"/>
+          </p:nvPr>
+        </p:nvSpPr>
+        <p:spPr>
+          <a:xfrm>
+            <a:off x="4800600" y="731520"/>
+            <a:ext cx="6492240" cy="5257800"/>
+          </a:xfrm>
+        </p:spPr>
+        <p:txBody>
+          <a:bodyPr/>
+          <a:lstStyle/>
+          <a:p>
+            <a:pPr lvl="0"/>
+            <a:r>
+              <a:rPr lang="en-US"/>
+              <a:t>Click to edit Master text styles</a:t>
+            </a:r>
+          </a:p>
+          <a:p>
+            <a:pPr lvl="1"/>
+            <a:r>
+              <a:rPr lang="en-US"/>
+              <a:t>Second level</a:t>
+            </a:r>
+          </a:p>
+          <a:p>
+            <a:pPr lvl="2"/>
+            <a:r>
+              <a:rPr lang="en-US"/>
+              <a:t>Third level</a:t>
+            </a:r>
+          </a:p>
+          <a:p>
+            <a:pPr lvl="3"/>
+            <a:r>
+              <a:rPr lang="en-US"/>
+              <a:t>Fourth level</a:t>
+            </a:r>
+          </a:p>
+          <a:p>
+            <a:pPr lvl="4"/>
+            <a:r>
+              <a:rPr lang="en-US"/>
+              <a:t>Fifth level</a:t>
+            </a:r>
+            <a:endParaRPr lang="en-US" dirty="0"/>
+          </a:p>
+        </p:txBody>
+      </p:sp>
+      <p:sp>
+        <p:nvSpPr>
+          <p:cNvPr id="4" name="Text Placeholder 3"/>
+          <p:cNvSpPr>
+            <a:spLocks noGrp="1"/>
+          </p:cNvSpPr>
+          <p:nvPr>
+            <p:ph type="body" sz="half" idx="2"/>
+          </p:nvPr>
+        </p:nvSpPr>
+        <p:spPr>
+          <a:xfrm>
+            <a:off x="457200" y="2926080"/>
+            <a:ext cx="3200400" cy="3379124"/>
+          </a:xfrm>
+        </p:spPr>
+        <p:txBody>
+          <a:bodyPr lIns="91440" rIns="91440">
             <a:normAutofit/>
           </a:bodyPr>
           <a:lstStyle>
             <a:lvl1pPr marL="0" indent="0">
               <a:buNone/>
-              <a:defRPr sz="1400"/>
+              <a:defRPr sz="1500">
+                <a:solidFill>
+                  <a:srgbClr val="FFFFFF"/>
+                </a:solidFill>
+              </a:defRPr>
             </a:lvl1pPr>
             <a:lvl2pPr marL="457200" indent="0">
               <a:buNone/>
@@ -2803,102 +3642,352 @@
       </p:sp>
       <p:sp>
         <p:nvSpPr>
-          <p:cNvPr id="14" name="Text Placeholder 4"/>
-          <p:cNvSpPr>
-            <a:spLocks noGrp="1"/>
-          </p:cNvSpPr>
-          <p:nvPr>
-            <p:ph type="body" sz="quarter" idx="13"/>
+          <p:cNvPr id="5" name="Date Placeholder 4"/>
+          <p:cNvSpPr>
+            <a:spLocks noGrp="1"/>
+          </p:cNvSpPr>
+          <p:nvPr>
+            <p:ph type="dt" sz="half" idx="10"/>
           </p:nvPr>
         </p:nvSpPr>
         <p:spPr>
           <a:xfrm>
-            <a:off x="7124700" y="1981200"/>
-            <a:ext cx="2932113" cy="576262"/>
+            <a:off x="465512" y="6459785"/>
+            <a:ext cx="2618510" cy="365125"/>
           </a:xfrm>
         </p:spPr>
         <p:txBody>
-          <a:bodyPr anchor="b">
+          <a:bodyPr/>
+          <a:lstStyle>
+            <a:lvl1pPr algn="l">
+              <a:defRPr/>
+            </a:lvl1pPr>
+          </a:lstStyle>
+          <a:p>
+            <a:fld id="{60135C24-EB33-6645-B51A-6348BD58F2AA}" type="datetimeFigureOut">
+              <a:rPr lang="en-US" smtClean="0"/>
+              <a:t>8/3/2026</a:t>
+            </a:fld>
+            <a:endParaRPr lang="en-US"/>
+          </a:p>
+        </p:txBody>
+      </p:sp>
+      <p:sp>
+        <p:nvSpPr>
+          <p:cNvPr id="6" name="Footer Placeholder 5"/>
+          <p:cNvSpPr>
+            <a:spLocks noGrp="1"/>
+          </p:cNvSpPr>
+          <p:nvPr>
+            <p:ph type="ftr" sz="quarter" idx="11"/>
+          </p:nvPr>
+        </p:nvSpPr>
+        <p:spPr>
+          <a:xfrm>
+            <a:off x="4800600" y="6459785"/>
+            <a:ext cx="4648200" cy="365125"/>
+          </a:xfrm>
+        </p:spPr>
+        <p:txBody>
+          <a:bodyPr/>
+          <a:lstStyle>
+            <a:lvl1pPr algn="l">
+              <a:defRPr>
+                <a:solidFill>
+                  <a:schemeClr val="tx2"/>
+                </a:solidFill>
+              </a:defRPr>
+            </a:lvl1pPr>
+          </a:lstStyle>
+          <a:p>
+            <a:endParaRPr lang="en-US"/>
+          </a:p>
+        </p:txBody>
+      </p:sp>
+      <p:sp>
+        <p:nvSpPr>
+          <p:cNvPr id="7" name="Slide Number Placeholder 6"/>
+          <p:cNvSpPr>
+            <a:spLocks noGrp="1"/>
+          </p:cNvSpPr>
+          <p:nvPr>
+            <p:ph type="sldNum" sz="quarter" idx="12"/>
+          </p:nvPr>
+        </p:nvSpPr>
+        <p:spPr/>
+        <p:txBody>
+          <a:bodyPr/>
+          <a:lstStyle>
+            <a:lvl1pPr>
+              <a:defRPr>
+                <a:solidFill>
+                  <a:schemeClr val="tx2"/>
+                </a:solidFill>
+              </a:defRPr>
+            </a:lvl1pPr>
+          </a:lstStyle>
+          <a:p>
+            <a:fld id="{292730AB-017E-7B48-BDF2-98302496DA1B}" type="slidenum">
+              <a:rPr lang="en-US" smtClean="0"/>
+              <a:t>‹#›</a:t>
+            </a:fld>
+            <a:endParaRPr lang="en-US"/>
+          </a:p>
+        </p:txBody>
+      </p:sp>
+    </p:spTree>
+    <p:extLst>
+      <p:ext uri="{BB962C8B-B14F-4D97-AF65-F5344CB8AC3E}">
+        <p14:creationId xmlns:p14="http://schemas.microsoft.com/office/powerpoint/2010/main" val="2808927012"/>
+      </p:ext>
+    </p:extLst>
+  </p:cSld>
+  <p:clrMapOvr>
+    <a:masterClrMapping/>
+  </p:clrMapOvr>
+</p:sldLayout>
+</file>
+
+<file path=ppt/slideLayouts/slideLayout9.xml><?xml version="1.0" encoding="utf-8"?>
+<p:sldLayout xmlns:a="http://schemas.openxmlformats.org/drawingml/2006/main" xmlns:r="http://schemas.openxmlformats.org/officeDocument/2006/relationships" xmlns:p="http://schemas.openxmlformats.org/presentationml/2006/main" showMasterSp="0" type="picTx" preserve="1">
+  <p:cSld name="Picture with Caption">
+    <p:spTree>
+      <p:nvGrpSpPr>
+        <p:cNvPr id="1" name=""/>
+        <p:cNvGrpSpPr/>
+        <p:nvPr/>
+      </p:nvGrpSpPr>
+      <p:grpSpPr>
+        <a:xfrm>
+          <a:off x="0" y="0"/>
+          <a:ext cx="0" cy="0"/>
+          <a:chOff x="0" y="0"/>
+          <a:chExt cx="0" cy="0"/>
+        </a:xfrm>
+      </p:grpSpPr>
+      <p:sp>
+        <p:nvSpPr>
+          <p:cNvPr id="8" name="Rectangle 7"/>
+          <p:cNvSpPr/>
+          <p:nvPr/>
+        </p:nvSpPr>
+        <p:spPr>
+          <a:xfrm>
+            <a:off x="0" y="4953000"/>
+            <a:ext cx="12188825" cy="1905000"/>
+          </a:xfrm>
+          <a:prstGeom prst="rect">
+            <a:avLst/>
+          </a:prstGeom>
+          <a:solidFill>
+            <a:schemeClr val="accent2"/>
+          </a:solidFill>
+          <a:ln>
+            <a:noFill/>
+          </a:ln>
+        </p:spPr>
+        <p:style>
+          <a:lnRef idx="2">
+            <a:schemeClr val="accent1">
+              <a:shade val="50000"/>
+            </a:schemeClr>
+          </a:lnRef>
+          <a:fillRef idx="1">
+            <a:schemeClr val="accent1"/>
+          </a:fillRef>
+          <a:effectRef idx="0">
+            <a:schemeClr val="accent1"/>
+          </a:effectRef>
+          <a:fontRef idx="minor">
+            <a:schemeClr val="lt1"/>
+          </a:fontRef>
+        </p:style>
+      </p:sp>
+      <p:sp>
+        <p:nvSpPr>
+          <p:cNvPr id="9" name="Rectangle 8"/>
+          <p:cNvSpPr/>
+          <p:nvPr/>
+        </p:nvSpPr>
+        <p:spPr>
+          <a:xfrm>
+            <a:off x="15" y="4915076"/>
+            <a:ext cx="12188825" cy="64008"/>
+          </a:xfrm>
+          <a:prstGeom prst="rect">
+            <a:avLst/>
+          </a:prstGeom>
+          <a:solidFill>
+            <a:schemeClr val="accent1"/>
+          </a:solidFill>
+          <a:ln>
+            <a:noFill/>
+          </a:ln>
+        </p:spPr>
+        <p:style>
+          <a:lnRef idx="2">
+            <a:schemeClr val="accent1">
+              <a:shade val="50000"/>
+            </a:schemeClr>
+          </a:lnRef>
+          <a:fillRef idx="1">
+            <a:schemeClr val="accent1"/>
+          </a:fillRef>
+          <a:effectRef idx="0">
+            <a:schemeClr val="accent1"/>
+          </a:effectRef>
+          <a:fontRef idx="minor">
+            <a:schemeClr val="lt1"/>
+          </a:fontRef>
+        </p:style>
+      </p:sp>
+      <p:sp>
+        <p:nvSpPr>
+          <p:cNvPr id="2" name="Title 1"/>
+          <p:cNvSpPr>
+            <a:spLocks noGrp="1"/>
+          </p:cNvSpPr>
+          <p:nvPr>
+            <p:ph type="title"/>
+          </p:nvPr>
+        </p:nvSpPr>
+        <p:spPr>
+          <a:xfrm>
+            <a:off x="1097280" y="5074920"/>
+            <a:ext cx="10113264" cy="822960"/>
+          </a:xfrm>
+        </p:spPr>
+        <p:txBody>
+          <a:bodyPr lIns="91440" tIns="0" rIns="91440" bIns="0" anchor="b">
             <a:noAutofit/>
           </a:bodyPr>
           <a:lstStyle>
+            <a:lvl1pPr>
+              <a:defRPr sz="3600" b="0">
+                <a:solidFill>
+                  <a:srgbClr val="FFFFFF"/>
+                </a:solidFill>
+              </a:defRPr>
+            </a:lvl1pPr>
+          </a:lstStyle>
+          <a:p>
+            <a:r>
+              <a:rPr lang="en-US"/>
+              <a:t>Click to edit Master title style</a:t>
+            </a:r>
+            <a:endParaRPr lang="en-US" dirty="0"/>
+          </a:p>
+        </p:txBody>
+      </p:sp>
+      <p:sp>
+        <p:nvSpPr>
+          <p:cNvPr id="3" name="Picture Placeholder 2"/>
+          <p:cNvSpPr>
+            <a:spLocks noGrp="1" noChangeAspect="1"/>
+          </p:cNvSpPr>
+          <p:nvPr>
+            <p:ph type="pic" idx="1"/>
+          </p:nvPr>
+        </p:nvSpPr>
+        <p:spPr>
+          <a:xfrm>
+            <a:off x="15" y="0"/>
+            <a:ext cx="12191985" cy="4915076"/>
+          </a:xfrm>
+          <a:blipFill>
+            <a:blip r:embed="rId2"/>
+            <a:stretch>
+              <a:fillRect/>
+            </a:stretch>
+          </a:blipFill>
+        </p:spPr>
+        <p:txBody>
+          <a:bodyPr lIns="457200" tIns="457200" anchor="t"/>
+          <a:lstStyle>
             <a:lvl1pPr marL="0" indent="0">
               <a:buNone/>
-              <a:defRPr sz="2400" b="0">
+              <a:defRPr sz="3200">
                 <a:solidFill>
-                  <a:schemeClr val="bg2">
-                    <a:lumMod val="40000"/>
-                    <a:lumOff val="60000"/>
-                  </a:schemeClr>
+                  <a:schemeClr val="bg1"/>
                 </a:solidFill>
               </a:defRPr>
             </a:lvl1pPr>
             <a:lvl2pPr marL="457200" indent="0">
               <a:buNone/>
-              <a:defRPr sz="2000" b="1"/>
+              <a:defRPr sz="2800"/>
             </a:lvl2pPr>
             <a:lvl3pPr marL="914400" indent="0">
               <a:buNone/>
-              <a:defRPr sz="1800" b="1"/>
+              <a:defRPr sz="2400"/>
             </a:lvl3pPr>
             <a:lvl4pPr marL="1371600" indent="0">
               <a:buNone/>
-              <a:defRPr sz="1600" b="1"/>
+              <a:defRPr sz="2000"/>
             </a:lvl4pPr>
             <a:lvl5pPr marL="1828800" indent="0">
               <a:buNone/>
-              <a:defRPr sz="1600" b="1"/>
+              <a:defRPr sz="2000"/>
             </a:lvl5pPr>
             <a:lvl6pPr marL="2286000" indent="0">
               <a:buNone/>
-              <a:defRPr sz="1600" b="1"/>
+              <a:defRPr sz="2000"/>
             </a:lvl6pPr>
             <a:lvl7pPr marL="2743200" indent="0">
               <a:buNone/>
-              <a:defRPr sz="1600" b="1"/>
+              <a:defRPr sz="2000"/>
             </a:lvl7pPr>
             <a:lvl8pPr marL="3200400" indent="0">
               <a:buNone/>
-              <a:defRPr sz="1600" b="1"/>
+              <a:defRPr sz="2000"/>
             </a:lvl8pPr>
             <a:lvl9pPr marL="3657600" indent="0">
               <a:buNone/>
-              <a:defRPr sz="1600" b="1"/>
+              <a:defRPr sz="2000"/>
             </a:lvl9pPr>
           </a:lstStyle>
           <a:p>
-            <a:pPr lvl="0"/>
             <a:r>
               <a:rPr lang="en-US"/>
-              <a:t>Click to edit Master text styles</a:t>
-            </a:r>
-          </a:p>
-        </p:txBody>
-      </p:sp>
-      <p:sp>
-        <p:nvSpPr>
-          <p:cNvPr id="20" name="Text Placeholder 3"/>
-          <p:cNvSpPr>
-            <a:spLocks noGrp="1"/>
-          </p:cNvSpPr>
-          <p:nvPr>
-            <p:ph type="body" sz="half" idx="17"/>
+              <a:t>Click icon to add picture</a:t>
+            </a:r>
+            <a:endParaRPr lang="en-US" dirty="0"/>
+          </a:p>
+        </p:txBody>
+      </p:sp>
+      <p:sp>
+        <p:nvSpPr>
+          <p:cNvPr id="4" name="Text Placeholder 3"/>
+          <p:cNvSpPr>
+            <a:spLocks noGrp="1"/>
+          </p:cNvSpPr>
+          <p:nvPr>
+            <p:ph type="body" sz="half" idx="2"/>
           </p:nvPr>
         </p:nvSpPr>
         <p:spPr>
           <a:xfrm>
-            <a:off x="7124700" y="2667000"/>
-            <a:ext cx="2932113" cy="3589338"/>
+            <a:off x="1097280" y="5907023"/>
+            <a:ext cx="10113264" cy="594360"/>
           </a:xfrm>
         </p:spPr>
         <p:txBody>
-          <a:bodyPr anchor="t">
+          <a:bodyPr lIns="91440" tIns="0" rIns="91440" bIns="0">
             <a:normAutofit/>
           </a:bodyPr>
           <a:lstStyle>
             <a:lvl1pPr marL="0" indent="0">
+              <a:spcBef>
+                <a:spcPts val="0"/>
+              </a:spcBef>
+              <a:spcAft>
+                <a:spcPts val="600"/>
+              </a:spcAft>
               <a:buNone/>
-              <a:defRPr sz="1400"/>
+              <a:defRPr sz="1500">
+                <a:solidFill>
+                  <a:srgbClr val="FFFFFF"/>
+                </a:solidFill>
+              </a:defRPr>
             </a:lvl1pPr>
             <a:lvl2pPr marL="457200" indent="0">
               <a:buNone/>
@@ -2942,87 +4031,9 @@
           </a:p>
         </p:txBody>
       </p:sp>
-      <p:cxnSp>
-        <p:nvCxnSpPr>
-          <p:cNvPr id="17" name="Straight Connector 16"/>
-          <p:cNvCxnSpPr/>
-          <p:nvPr/>
-        </p:nvCxnSpPr>
-        <p:spPr>
-          <a:xfrm>
-            <a:off x="3726142" y="2133600"/>
-            <a:ext cx="0" cy="3962400"/>
-          </a:xfrm>
-          <a:prstGeom prst="line">
-            <a:avLst/>
-          </a:prstGeom>
-          <a:ln w="12700" cmpd="sng">
-            <a:solidFill>
-              <a:schemeClr val="bg2">
-                <a:lumMod val="40000"/>
-                <a:lumOff val="60000"/>
-                <a:alpha val="40000"/>
-              </a:schemeClr>
-            </a:solidFill>
-          </a:ln>
-        </p:spPr>
-        <p:style>
-          <a:lnRef idx="2">
-            <a:schemeClr val="accent1"/>
-          </a:lnRef>
-          <a:fillRef idx="0">
-            <a:schemeClr val="accent1"/>
-          </a:fillRef>
-          <a:effectRef idx="1">
-            <a:schemeClr val="accent1"/>
-          </a:effectRef>
-          <a:fontRef idx="minor">
-            <a:schemeClr val="tx1"/>
-          </a:fontRef>
-        </p:style>
-      </p:cxnSp>
-      <p:cxnSp>
-        <p:nvCxnSpPr>
-          <p:cNvPr id="18" name="Straight Connector 17"/>
-          <p:cNvCxnSpPr/>
-          <p:nvPr/>
-        </p:nvCxnSpPr>
-        <p:spPr>
-          <a:xfrm>
-            <a:off x="6962227" y="2133600"/>
-            <a:ext cx="0" cy="3966882"/>
-          </a:xfrm>
-          <a:prstGeom prst="line">
-            <a:avLst/>
-          </a:prstGeom>
-          <a:ln w="12700" cmpd="sng">
-            <a:solidFill>
-              <a:schemeClr val="bg2">
-                <a:lumMod val="40000"/>
-                <a:lumOff val="60000"/>
-                <a:alpha val="40000"/>
-              </a:schemeClr>
-            </a:solidFill>
-          </a:ln>
-        </p:spPr>
-        <p:style>
-          <a:lnRef idx="2">
-            <a:schemeClr val="accent1"/>
-          </a:lnRef>
-          <a:fillRef idx="0">
-            <a:schemeClr val="accent1"/>
-          </a:fillRef>
-          <a:effectRef idx="1">
-            <a:schemeClr val="accent1"/>
-          </a:effectRef>
-          <a:fontRef idx="minor">
-            <a:schemeClr val="tx1"/>
-          </a:fontRef>
-        </p:style>
-      </p:cxnSp>
-      <p:sp>
-        <p:nvSpPr>
-          <p:cNvPr id="7" name="Date Placeholder 3"/>
+      <p:sp>
+        <p:nvSpPr>
+          <p:cNvPr id="5" name="Date Placeholder 4"/>
           <p:cNvSpPr>
             <a:spLocks noGrp="1"/>
           </p:cNvSpPr>
@@ -3037,7 +4048,7 @@
           <a:p>
             <a:fld id="{60135C24-EB33-6645-B51A-6348BD58F2AA}" type="datetimeFigureOut">
               <a:rPr lang="en-US" smtClean="0"/>
-              <a:t>8/26/25</a:t>
+              <a:t>8/3/2026</a:t>
             </a:fld>
             <a:endParaRPr lang="en-US"/>
           </a:p>
@@ -3045,7 +4056,7 @@
       </p:sp>
       <p:sp>
         <p:nvSpPr>
-          <p:cNvPr id="4" name="Footer Placeholder 4"/>
+          <p:cNvPr id="6" name="Footer Placeholder 5"/>
           <p:cNvSpPr>
             <a:spLocks noGrp="1"/>
           </p:cNvSpPr>
@@ -3064,7 +4075,7 @@
       </p:sp>
       <p:sp>
         <p:nvSpPr>
-          <p:cNvPr id="6" name="Slide Number Placeholder 5"/>
+          <p:cNvPr id="7" name="Slide Number Placeholder 6"/>
           <p:cNvSpPr>
             <a:spLocks noGrp="1"/>
           </p:cNvSpPr>
@@ -3088,3137 +4099,7 @@
     </p:spTree>
     <p:extLst>
       <p:ext uri="{BB962C8B-B14F-4D97-AF65-F5344CB8AC3E}">
-        <p14:creationId xmlns:p14="http://schemas.microsoft.com/office/powerpoint/2010/main" val="2070553725"/>
-      </p:ext>
-    </p:extLst>
-  </p:cSld>
-  <p:clrMapOvr>
-    <a:masterClrMapping/>
-  </p:clrMapOvr>
-</p:sldLayout>
-</file>
-
-<file path=ppt/slideLayouts/slideLayout15.xml><?xml version="1.0" encoding="utf-8"?>
-<p:sldLayout xmlns:a="http://schemas.openxmlformats.org/drawingml/2006/main" xmlns:r="http://schemas.openxmlformats.org/officeDocument/2006/relationships" xmlns:p="http://schemas.openxmlformats.org/presentationml/2006/main" preserve="1">
-  <p:cSld name="3 Picture Column">
-    <p:spTree>
-      <p:nvGrpSpPr>
-        <p:cNvPr id="1" name=""/>
-        <p:cNvGrpSpPr/>
-        <p:nvPr/>
-      </p:nvGrpSpPr>
-      <p:grpSpPr>
-        <a:xfrm>
-          <a:off x="0" y="0"/>
-          <a:ext cx="0" cy="0"/>
-          <a:chOff x="0" y="0"/>
-          <a:chExt cx="0" cy="0"/>
-        </a:xfrm>
-      </p:grpSpPr>
-      <p:sp>
-        <p:nvSpPr>
-          <p:cNvPr id="2" name="Title 1"/>
-          <p:cNvSpPr>
-            <a:spLocks noGrp="1"/>
-          </p:cNvSpPr>
-          <p:nvPr>
-            <p:ph type="title"/>
-          </p:nvPr>
-        </p:nvSpPr>
-        <p:spPr/>
-        <p:txBody>
-          <a:bodyPr/>
-          <a:lstStyle>
-            <a:lvl1pPr>
-              <a:defRPr sz="4200"/>
-            </a:lvl1pPr>
-          </a:lstStyle>
-          <a:p>
-            <a:r>
-              <a:rPr lang="en-US"/>
-              <a:t>Click to edit Master title style</a:t>
-            </a:r>
-            <a:endParaRPr lang="en-US" dirty="0"/>
-          </a:p>
-        </p:txBody>
-      </p:sp>
-      <p:sp>
-        <p:nvSpPr>
-          <p:cNvPr id="3" name="Text Placeholder 2"/>
-          <p:cNvSpPr>
-            <a:spLocks noGrp="1"/>
-          </p:cNvSpPr>
-          <p:nvPr>
-            <p:ph type="body" idx="1"/>
-          </p:nvPr>
-        </p:nvSpPr>
-        <p:spPr>
-          <a:xfrm>
-            <a:off x="652463" y="4250949"/>
-            <a:ext cx="2940050" cy="576262"/>
-          </a:xfrm>
-        </p:spPr>
-        <p:txBody>
-          <a:bodyPr anchor="b">
-            <a:noAutofit/>
-          </a:bodyPr>
-          <a:lstStyle>
-            <a:lvl1pPr marL="0" indent="0">
-              <a:buNone/>
-              <a:defRPr sz="2400" b="0">
-                <a:solidFill>
-                  <a:schemeClr val="bg2">
-                    <a:lumMod val="40000"/>
-                    <a:lumOff val="60000"/>
-                  </a:schemeClr>
-                </a:solidFill>
-              </a:defRPr>
-            </a:lvl1pPr>
-            <a:lvl2pPr marL="457200" indent="0">
-              <a:buNone/>
-              <a:defRPr sz="2000" b="1"/>
-            </a:lvl2pPr>
-            <a:lvl3pPr marL="914400" indent="0">
-              <a:buNone/>
-              <a:defRPr sz="1800" b="1"/>
-            </a:lvl3pPr>
-            <a:lvl4pPr marL="1371600" indent="0">
-              <a:buNone/>
-              <a:defRPr sz="1600" b="1"/>
-            </a:lvl4pPr>
-            <a:lvl5pPr marL="1828800" indent="0">
-              <a:buNone/>
-              <a:defRPr sz="1600" b="1"/>
-            </a:lvl5pPr>
-            <a:lvl6pPr marL="2286000" indent="0">
-              <a:buNone/>
-              <a:defRPr sz="1600" b="1"/>
-            </a:lvl6pPr>
-            <a:lvl7pPr marL="2743200" indent="0">
-              <a:buNone/>
-              <a:defRPr sz="1600" b="1"/>
-            </a:lvl7pPr>
-            <a:lvl8pPr marL="3200400" indent="0">
-              <a:buNone/>
-              <a:defRPr sz="1600" b="1"/>
-            </a:lvl8pPr>
-            <a:lvl9pPr marL="3657600" indent="0">
-              <a:buNone/>
-              <a:defRPr sz="1600" b="1"/>
-            </a:lvl9pPr>
-          </a:lstStyle>
-          <a:p>
-            <a:pPr lvl="0"/>
-            <a:r>
-              <a:rPr lang="en-US"/>
-              <a:t>Click to edit Master text styles</a:t>
-            </a:r>
-          </a:p>
-        </p:txBody>
-      </p:sp>
-      <p:sp>
-        <p:nvSpPr>
-          <p:cNvPr id="29" name="Picture Placeholder 2"/>
-          <p:cNvSpPr>
-            <a:spLocks noGrp="1" noChangeAspect="1"/>
-          </p:cNvSpPr>
-          <p:nvPr>
-            <p:ph type="pic" idx="15"/>
-          </p:nvPr>
-        </p:nvSpPr>
-        <p:spPr>
-          <a:xfrm>
-            <a:off x="652463" y="2209800"/>
-            <a:ext cx="2940050" cy="1524000"/>
-          </a:xfrm>
-          <a:prstGeom prst="roundRect">
-            <a:avLst>
-              <a:gd name="adj" fmla="val 1858"/>
-            </a:avLst>
-          </a:prstGeom>
-          <a:effectLst>
-            <a:outerShdw blurRad="50800" dist="50800" dir="5400000" algn="tl" rotWithShape="0">
-              <a:srgbClr val="000000">
-                <a:alpha val="43000"/>
-              </a:srgbClr>
-            </a:outerShdw>
-          </a:effectLst>
-        </p:spPr>
-        <p:txBody>
-          <a:bodyPr anchor="t">
-            <a:normAutofit/>
-          </a:bodyPr>
-          <a:lstStyle>
-            <a:lvl1pPr marL="0" indent="0" algn="ctr">
-              <a:buNone/>
-              <a:defRPr sz="1600"/>
-            </a:lvl1pPr>
-            <a:lvl2pPr marL="457200" indent="0">
-              <a:buNone/>
-              <a:defRPr sz="1600"/>
-            </a:lvl2pPr>
-            <a:lvl3pPr marL="914400" indent="0">
-              <a:buNone/>
-              <a:defRPr sz="1600"/>
-            </a:lvl3pPr>
-            <a:lvl4pPr marL="1371600" indent="0">
-              <a:buNone/>
-              <a:defRPr sz="1600"/>
-            </a:lvl4pPr>
-            <a:lvl5pPr marL="1828800" indent="0">
-              <a:buNone/>
-              <a:defRPr sz="1600"/>
-            </a:lvl5pPr>
-            <a:lvl6pPr marL="2286000" indent="0">
-              <a:buNone/>
-              <a:defRPr sz="1600"/>
-            </a:lvl6pPr>
-            <a:lvl7pPr marL="2743200" indent="0">
-              <a:buNone/>
-              <a:defRPr sz="1600"/>
-            </a:lvl7pPr>
-            <a:lvl8pPr marL="3200400" indent="0">
-              <a:buNone/>
-              <a:defRPr sz="1600"/>
-            </a:lvl8pPr>
-            <a:lvl9pPr marL="3657600" indent="0">
-              <a:buNone/>
-              <a:defRPr sz="1600"/>
-            </a:lvl9pPr>
-          </a:lstStyle>
-          <a:p>
-            <a:r>
-              <a:rPr lang="en-US"/>
-              <a:t>Click icon to add picture</a:t>
-            </a:r>
-            <a:endParaRPr lang="en-US" dirty="0"/>
-          </a:p>
-        </p:txBody>
-      </p:sp>
-      <p:sp>
-        <p:nvSpPr>
-          <p:cNvPr id="22" name="Text Placeholder 3"/>
-          <p:cNvSpPr>
-            <a:spLocks noGrp="1"/>
-          </p:cNvSpPr>
-          <p:nvPr>
-            <p:ph type="body" sz="half" idx="18"/>
-          </p:nvPr>
-        </p:nvSpPr>
-        <p:spPr>
-          <a:xfrm>
-            <a:off x="652463" y="4827211"/>
-            <a:ext cx="2940050" cy="659189"/>
-          </a:xfrm>
-        </p:spPr>
-        <p:txBody>
-          <a:bodyPr anchor="t">
-            <a:normAutofit/>
-          </a:bodyPr>
-          <a:lstStyle>
-            <a:lvl1pPr marL="0" indent="0">
-              <a:buNone/>
-              <a:defRPr sz="1400"/>
-            </a:lvl1pPr>
-            <a:lvl2pPr marL="457200" indent="0">
-              <a:buNone/>
-              <a:defRPr sz="1200"/>
-            </a:lvl2pPr>
-            <a:lvl3pPr marL="914400" indent="0">
-              <a:buNone/>
-              <a:defRPr sz="1000"/>
-            </a:lvl3pPr>
-            <a:lvl4pPr marL="1371600" indent="0">
-              <a:buNone/>
-              <a:defRPr sz="900"/>
-            </a:lvl4pPr>
-            <a:lvl5pPr marL="1828800" indent="0">
-              <a:buNone/>
-              <a:defRPr sz="900"/>
-            </a:lvl5pPr>
-            <a:lvl6pPr marL="2286000" indent="0">
-              <a:buNone/>
-              <a:defRPr sz="900"/>
-            </a:lvl6pPr>
-            <a:lvl7pPr marL="2743200" indent="0">
-              <a:buNone/>
-              <a:defRPr sz="900"/>
-            </a:lvl7pPr>
-            <a:lvl8pPr marL="3200400" indent="0">
-              <a:buNone/>
-              <a:defRPr sz="900"/>
-            </a:lvl8pPr>
-            <a:lvl9pPr marL="3657600" indent="0">
-              <a:buNone/>
-              <a:defRPr sz="900"/>
-            </a:lvl9pPr>
-          </a:lstStyle>
-          <a:p>
-            <a:pPr lvl="0"/>
-            <a:r>
-              <a:rPr lang="en-US"/>
-              <a:t>Click to edit Master text styles</a:t>
-            </a:r>
-          </a:p>
-        </p:txBody>
-      </p:sp>
-      <p:sp>
-        <p:nvSpPr>
-          <p:cNvPr id="5" name="Text Placeholder 4"/>
-          <p:cNvSpPr>
-            <a:spLocks noGrp="1"/>
-          </p:cNvSpPr>
-          <p:nvPr>
-            <p:ph type="body" sz="quarter" idx="3"/>
-          </p:nvPr>
-        </p:nvSpPr>
-        <p:spPr>
-          <a:xfrm>
-            <a:off x="3889375" y="4250949"/>
-            <a:ext cx="2930525" cy="576262"/>
-          </a:xfrm>
-        </p:spPr>
-        <p:txBody>
-          <a:bodyPr anchor="b">
-            <a:noAutofit/>
-          </a:bodyPr>
-          <a:lstStyle>
-            <a:lvl1pPr marL="0" indent="0">
-              <a:buNone/>
-              <a:defRPr sz="2400" b="0">
-                <a:solidFill>
-                  <a:schemeClr val="bg2">
-                    <a:lumMod val="40000"/>
-                    <a:lumOff val="60000"/>
-                  </a:schemeClr>
-                </a:solidFill>
-              </a:defRPr>
-            </a:lvl1pPr>
-            <a:lvl2pPr marL="457200" indent="0">
-              <a:buNone/>
-              <a:defRPr sz="2000" b="1"/>
-            </a:lvl2pPr>
-            <a:lvl3pPr marL="914400" indent="0">
-              <a:buNone/>
-              <a:defRPr sz="1800" b="1"/>
-            </a:lvl3pPr>
-            <a:lvl4pPr marL="1371600" indent="0">
-              <a:buNone/>
-              <a:defRPr sz="1600" b="1"/>
-            </a:lvl4pPr>
-            <a:lvl5pPr marL="1828800" indent="0">
-              <a:buNone/>
-              <a:defRPr sz="1600" b="1"/>
-            </a:lvl5pPr>
-            <a:lvl6pPr marL="2286000" indent="0">
-              <a:buNone/>
-              <a:defRPr sz="1600" b="1"/>
-            </a:lvl6pPr>
-            <a:lvl7pPr marL="2743200" indent="0">
-              <a:buNone/>
-              <a:defRPr sz="1600" b="1"/>
-            </a:lvl7pPr>
-            <a:lvl8pPr marL="3200400" indent="0">
-              <a:buNone/>
-              <a:defRPr sz="1600" b="1"/>
-            </a:lvl8pPr>
-            <a:lvl9pPr marL="3657600" indent="0">
-              <a:buNone/>
-              <a:defRPr sz="1600" b="1"/>
-            </a:lvl9pPr>
-          </a:lstStyle>
-          <a:p>
-            <a:pPr lvl="0"/>
-            <a:r>
-              <a:rPr lang="en-US"/>
-              <a:t>Click to edit Master text styles</a:t>
-            </a:r>
-          </a:p>
-        </p:txBody>
-      </p:sp>
-      <p:sp>
-        <p:nvSpPr>
-          <p:cNvPr id="30" name="Picture Placeholder 2"/>
-          <p:cNvSpPr>
-            <a:spLocks noGrp="1" noChangeAspect="1"/>
-          </p:cNvSpPr>
-          <p:nvPr>
-            <p:ph type="pic" idx="21"/>
-          </p:nvPr>
-        </p:nvSpPr>
-        <p:spPr>
-          <a:xfrm>
-            <a:off x="3889374" y="2209800"/>
-            <a:ext cx="2930525" cy="1524000"/>
-          </a:xfrm>
-          <a:prstGeom prst="roundRect">
-            <a:avLst>
-              <a:gd name="adj" fmla="val 1858"/>
-            </a:avLst>
-          </a:prstGeom>
-          <a:effectLst>
-            <a:outerShdw blurRad="50800" dist="50800" dir="5400000" algn="tl" rotWithShape="0">
-              <a:srgbClr val="000000">
-                <a:alpha val="43000"/>
-              </a:srgbClr>
-            </a:outerShdw>
-          </a:effectLst>
-        </p:spPr>
-        <p:txBody>
-          <a:bodyPr anchor="t">
-            <a:normAutofit/>
-          </a:bodyPr>
-          <a:lstStyle>
-            <a:lvl1pPr marL="0" indent="0" algn="ctr">
-              <a:buNone/>
-              <a:defRPr sz="1600"/>
-            </a:lvl1pPr>
-            <a:lvl2pPr marL="457200" indent="0">
-              <a:buNone/>
-              <a:defRPr sz="1600"/>
-            </a:lvl2pPr>
-            <a:lvl3pPr marL="914400" indent="0">
-              <a:buNone/>
-              <a:defRPr sz="1600"/>
-            </a:lvl3pPr>
-            <a:lvl4pPr marL="1371600" indent="0">
-              <a:buNone/>
-              <a:defRPr sz="1600"/>
-            </a:lvl4pPr>
-            <a:lvl5pPr marL="1828800" indent="0">
-              <a:buNone/>
-              <a:defRPr sz="1600"/>
-            </a:lvl5pPr>
-            <a:lvl6pPr marL="2286000" indent="0">
-              <a:buNone/>
-              <a:defRPr sz="1600"/>
-            </a:lvl6pPr>
-            <a:lvl7pPr marL="2743200" indent="0">
-              <a:buNone/>
-              <a:defRPr sz="1600"/>
-            </a:lvl7pPr>
-            <a:lvl8pPr marL="3200400" indent="0">
-              <a:buNone/>
-              <a:defRPr sz="1600"/>
-            </a:lvl8pPr>
-            <a:lvl9pPr marL="3657600" indent="0">
-              <a:buNone/>
-              <a:defRPr sz="1600"/>
-            </a:lvl9pPr>
-          </a:lstStyle>
-          <a:p>
-            <a:r>
-              <a:rPr lang="en-US"/>
-              <a:t>Click icon to add picture</a:t>
-            </a:r>
-            <a:endParaRPr lang="en-US" dirty="0"/>
-          </a:p>
-        </p:txBody>
-      </p:sp>
-      <p:sp>
-        <p:nvSpPr>
-          <p:cNvPr id="23" name="Text Placeholder 3"/>
-          <p:cNvSpPr>
-            <a:spLocks noGrp="1"/>
-          </p:cNvSpPr>
-          <p:nvPr>
-            <p:ph type="body" sz="half" idx="19"/>
-          </p:nvPr>
-        </p:nvSpPr>
-        <p:spPr>
-          <a:xfrm>
-            <a:off x="3888022" y="4827210"/>
-            <a:ext cx="2934406" cy="659189"/>
-          </a:xfrm>
-        </p:spPr>
-        <p:txBody>
-          <a:bodyPr anchor="t">
-            <a:normAutofit/>
-          </a:bodyPr>
-          <a:lstStyle>
-            <a:lvl1pPr marL="0" indent="0">
-              <a:buNone/>
-              <a:defRPr sz="1400"/>
-            </a:lvl1pPr>
-            <a:lvl2pPr marL="457200" indent="0">
-              <a:buNone/>
-              <a:defRPr sz="1200"/>
-            </a:lvl2pPr>
-            <a:lvl3pPr marL="914400" indent="0">
-              <a:buNone/>
-              <a:defRPr sz="1000"/>
-            </a:lvl3pPr>
-            <a:lvl4pPr marL="1371600" indent="0">
-              <a:buNone/>
-              <a:defRPr sz="900"/>
-            </a:lvl4pPr>
-            <a:lvl5pPr marL="1828800" indent="0">
-              <a:buNone/>
-              <a:defRPr sz="900"/>
-            </a:lvl5pPr>
-            <a:lvl6pPr marL="2286000" indent="0">
-              <a:buNone/>
-              <a:defRPr sz="900"/>
-            </a:lvl6pPr>
-            <a:lvl7pPr marL="2743200" indent="0">
-              <a:buNone/>
-              <a:defRPr sz="900"/>
-            </a:lvl7pPr>
-            <a:lvl8pPr marL="3200400" indent="0">
-              <a:buNone/>
-              <a:defRPr sz="900"/>
-            </a:lvl8pPr>
-            <a:lvl9pPr marL="3657600" indent="0">
-              <a:buNone/>
-              <a:defRPr sz="900"/>
-            </a:lvl9pPr>
-          </a:lstStyle>
-          <a:p>
-            <a:pPr lvl="0"/>
-            <a:r>
-              <a:rPr lang="en-US"/>
-              <a:t>Click to edit Master text styles</a:t>
-            </a:r>
-          </a:p>
-        </p:txBody>
-      </p:sp>
-      <p:sp>
-        <p:nvSpPr>
-          <p:cNvPr id="14" name="Text Placeholder 4"/>
-          <p:cNvSpPr>
-            <a:spLocks noGrp="1"/>
-          </p:cNvSpPr>
-          <p:nvPr>
-            <p:ph type="body" sz="quarter" idx="13"/>
-          </p:nvPr>
-        </p:nvSpPr>
-        <p:spPr>
-          <a:xfrm>
-            <a:off x="7124700" y="4250949"/>
-            <a:ext cx="2932113" cy="576262"/>
-          </a:xfrm>
-        </p:spPr>
-        <p:txBody>
-          <a:bodyPr anchor="b">
-            <a:noAutofit/>
-          </a:bodyPr>
-          <a:lstStyle>
-            <a:lvl1pPr marL="0" indent="0">
-              <a:buNone/>
-              <a:defRPr sz="2400" b="0">
-                <a:solidFill>
-                  <a:schemeClr val="bg2">
-                    <a:lumMod val="40000"/>
-                    <a:lumOff val="60000"/>
-                  </a:schemeClr>
-                </a:solidFill>
-              </a:defRPr>
-            </a:lvl1pPr>
-            <a:lvl2pPr marL="457200" indent="0">
-              <a:buNone/>
-              <a:defRPr sz="2000" b="1"/>
-            </a:lvl2pPr>
-            <a:lvl3pPr marL="914400" indent="0">
-              <a:buNone/>
-              <a:defRPr sz="1800" b="1"/>
-            </a:lvl3pPr>
-            <a:lvl4pPr marL="1371600" indent="0">
-              <a:buNone/>
-              <a:defRPr sz="1600" b="1"/>
-            </a:lvl4pPr>
-            <a:lvl5pPr marL="1828800" indent="0">
-              <a:buNone/>
-              <a:defRPr sz="1600" b="1"/>
-            </a:lvl5pPr>
-            <a:lvl6pPr marL="2286000" indent="0">
-              <a:buNone/>
-              <a:defRPr sz="1600" b="1"/>
-            </a:lvl6pPr>
-            <a:lvl7pPr marL="2743200" indent="0">
-              <a:buNone/>
-              <a:defRPr sz="1600" b="1"/>
-            </a:lvl7pPr>
-            <a:lvl8pPr marL="3200400" indent="0">
-              <a:buNone/>
-              <a:defRPr sz="1600" b="1"/>
-            </a:lvl8pPr>
-            <a:lvl9pPr marL="3657600" indent="0">
-              <a:buNone/>
-              <a:defRPr sz="1600" b="1"/>
-            </a:lvl9pPr>
-          </a:lstStyle>
-          <a:p>
-            <a:pPr lvl="0"/>
-            <a:r>
-              <a:rPr lang="en-US"/>
-              <a:t>Click to edit Master text styles</a:t>
-            </a:r>
-          </a:p>
-        </p:txBody>
-      </p:sp>
-      <p:sp>
-        <p:nvSpPr>
-          <p:cNvPr id="31" name="Picture Placeholder 2"/>
-          <p:cNvSpPr>
-            <a:spLocks noGrp="1" noChangeAspect="1"/>
-          </p:cNvSpPr>
-          <p:nvPr>
-            <p:ph type="pic" idx="22"/>
-          </p:nvPr>
-        </p:nvSpPr>
-        <p:spPr>
-          <a:xfrm>
-            <a:off x="7124699" y="2209800"/>
-            <a:ext cx="2932113" cy="1524000"/>
-          </a:xfrm>
-          <a:prstGeom prst="roundRect">
-            <a:avLst>
-              <a:gd name="adj" fmla="val 1858"/>
-            </a:avLst>
-          </a:prstGeom>
-          <a:effectLst>
-            <a:outerShdw blurRad="50800" dist="50800" dir="5400000" algn="tl" rotWithShape="0">
-              <a:srgbClr val="000000">
-                <a:alpha val="43000"/>
-              </a:srgbClr>
-            </a:outerShdw>
-          </a:effectLst>
-        </p:spPr>
-        <p:txBody>
-          <a:bodyPr anchor="t">
-            <a:normAutofit/>
-          </a:bodyPr>
-          <a:lstStyle>
-            <a:lvl1pPr marL="0" indent="0" algn="ctr">
-              <a:buNone/>
-              <a:defRPr sz="1600"/>
-            </a:lvl1pPr>
-            <a:lvl2pPr marL="457200" indent="0">
-              <a:buNone/>
-              <a:defRPr sz="1600"/>
-            </a:lvl2pPr>
-            <a:lvl3pPr marL="914400" indent="0">
-              <a:buNone/>
-              <a:defRPr sz="1600"/>
-            </a:lvl3pPr>
-            <a:lvl4pPr marL="1371600" indent="0">
-              <a:buNone/>
-              <a:defRPr sz="1600"/>
-            </a:lvl4pPr>
-            <a:lvl5pPr marL="1828800" indent="0">
-              <a:buNone/>
-              <a:defRPr sz="1600"/>
-            </a:lvl5pPr>
-            <a:lvl6pPr marL="2286000" indent="0">
-              <a:buNone/>
-              <a:defRPr sz="1600"/>
-            </a:lvl6pPr>
-            <a:lvl7pPr marL="2743200" indent="0">
-              <a:buNone/>
-              <a:defRPr sz="1600"/>
-            </a:lvl7pPr>
-            <a:lvl8pPr marL="3200400" indent="0">
-              <a:buNone/>
-              <a:defRPr sz="1600"/>
-            </a:lvl8pPr>
-            <a:lvl9pPr marL="3657600" indent="0">
-              <a:buNone/>
-              <a:defRPr sz="1600"/>
-            </a:lvl9pPr>
-          </a:lstStyle>
-          <a:p>
-            <a:r>
-              <a:rPr lang="en-US"/>
-              <a:t>Click icon to add picture</a:t>
-            </a:r>
-            <a:endParaRPr lang="en-US" dirty="0"/>
-          </a:p>
-        </p:txBody>
-      </p:sp>
-      <p:sp>
-        <p:nvSpPr>
-          <p:cNvPr id="24" name="Text Placeholder 3"/>
-          <p:cNvSpPr>
-            <a:spLocks noGrp="1"/>
-          </p:cNvSpPr>
-          <p:nvPr>
-            <p:ph type="body" sz="half" idx="20"/>
-          </p:nvPr>
-        </p:nvSpPr>
-        <p:spPr>
-          <a:xfrm>
-            <a:off x="7124575" y="4827208"/>
-            <a:ext cx="2935997" cy="659189"/>
-          </a:xfrm>
-        </p:spPr>
-        <p:txBody>
-          <a:bodyPr anchor="t">
-            <a:normAutofit/>
-          </a:bodyPr>
-          <a:lstStyle>
-            <a:lvl1pPr marL="0" indent="0">
-              <a:buNone/>
-              <a:defRPr sz="1400"/>
-            </a:lvl1pPr>
-            <a:lvl2pPr marL="457200" indent="0">
-              <a:buNone/>
-              <a:defRPr sz="1200"/>
-            </a:lvl2pPr>
-            <a:lvl3pPr marL="914400" indent="0">
-              <a:buNone/>
-              <a:defRPr sz="1000"/>
-            </a:lvl3pPr>
-            <a:lvl4pPr marL="1371600" indent="0">
-              <a:buNone/>
-              <a:defRPr sz="900"/>
-            </a:lvl4pPr>
-            <a:lvl5pPr marL="1828800" indent="0">
-              <a:buNone/>
-              <a:defRPr sz="900"/>
-            </a:lvl5pPr>
-            <a:lvl6pPr marL="2286000" indent="0">
-              <a:buNone/>
-              <a:defRPr sz="900"/>
-            </a:lvl6pPr>
-            <a:lvl7pPr marL="2743200" indent="0">
-              <a:buNone/>
-              <a:defRPr sz="900"/>
-            </a:lvl7pPr>
-            <a:lvl8pPr marL="3200400" indent="0">
-              <a:buNone/>
-              <a:defRPr sz="900"/>
-            </a:lvl8pPr>
-            <a:lvl9pPr marL="3657600" indent="0">
-              <a:buNone/>
-              <a:defRPr sz="900"/>
-            </a:lvl9pPr>
-          </a:lstStyle>
-          <a:p>
-            <a:pPr lvl="0"/>
-            <a:r>
-              <a:rPr lang="en-US"/>
-              <a:t>Click to edit Master text styles</a:t>
-            </a:r>
-          </a:p>
-        </p:txBody>
-      </p:sp>
-      <p:cxnSp>
-        <p:nvCxnSpPr>
-          <p:cNvPr id="19" name="Straight Connector 18"/>
-          <p:cNvCxnSpPr/>
-          <p:nvPr/>
-        </p:nvCxnSpPr>
-        <p:spPr>
-          <a:xfrm>
-            <a:off x="3726142" y="2133600"/>
-            <a:ext cx="0" cy="3962400"/>
-          </a:xfrm>
-          <a:prstGeom prst="line">
-            <a:avLst/>
-          </a:prstGeom>
-          <a:ln w="12700" cmpd="sng">
-            <a:solidFill>
-              <a:schemeClr val="bg2">
-                <a:lumMod val="40000"/>
-                <a:lumOff val="60000"/>
-                <a:alpha val="40000"/>
-              </a:schemeClr>
-            </a:solidFill>
-          </a:ln>
-        </p:spPr>
-        <p:style>
-          <a:lnRef idx="2">
-            <a:schemeClr val="accent1"/>
-          </a:lnRef>
-          <a:fillRef idx="0">
-            <a:schemeClr val="accent1"/>
-          </a:fillRef>
-          <a:effectRef idx="1">
-            <a:schemeClr val="accent1"/>
-          </a:effectRef>
-          <a:fontRef idx="minor">
-            <a:schemeClr val="tx1"/>
-          </a:fontRef>
-        </p:style>
-      </p:cxnSp>
-      <p:cxnSp>
-        <p:nvCxnSpPr>
-          <p:cNvPr id="20" name="Straight Connector 19"/>
-          <p:cNvCxnSpPr/>
-          <p:nvPr/>
-        </p:nvCxnSpPr>
-        <p:spPr>
-          <a:xfrm>
-            <a:off x="6962227" y="2133600"/>
-            <a:ext cx="0" cy="3966882"/>
-          </a:xfrm>
-          <a:prstGeom prst="line">
-            <a:avLst/>
-          </a:prstGeom>
-          <a:ln w="12700" cmpd="sng">
-            <a:solidFill>
-              <a:schemeClr val="bg2">
-                <a:lumMod val="40000"/>
-                <a:lumOff val="60000"/>
-                <a:alpha val="40000"/>
-              </a:schemeClr>
-            </a:solidFill>
-          </a:ln>
-        </p:spPr>
-        <p:style>
-          <a:lnRef idx="2">
-            <a:schemeClr val="accent1"/>
-          </a:lnRef>
-          <a:fillRef idx="0">
-            <a:schemeClr val="accent1"/>
-          </a:fillRef>
-          <a:effectRef idx="1">
-            <a:schemeClr val="accent1"/>
-          </a:effectRef>
-          <a:fontRef idx="minor">
-            <a:schemeClr val="tx1"/>
-          </a:fontRef>
-        </p:style>
-      </p:cxnSp>
-      <p:sp>
-        <p:nvSpPr>
-          <p:cNvPr id="7" name="Date Placeholder 3"/>
-          <p:cNvSpPr>
-            <a:spLocks noGrp="1"/>
-          </p:cNvSpPr>
-          <p:nvPr>
-            <p:ph type="dt" sz="half" idx="10"/>
-          </p:nvPr>
-        </p:nvSpPr>
-        <p:spPr/>
-        <p:txBody>
-          <a:bodyPr/>
-          <a:lstStyle/>
-          <a:p>
-            <a:fld id="{60135C24-EB33-6645-B51A-6348BD58F2AA}" type="datetimeFigureOut">
-              <a:rPr lang="en-US" smtClean="0"/>
-              <a:t>8/26/25</a:t>
-            </a:fld>
-            <a:endParaRPr lang="en-US"/>
-          </a:p>
-        </p:txBody>
-      </p:sp>
-      <p:sp>
-        <p:nvSpPr>
-          <p:cNvPr id="4" name="Footer Placeholder 4"/>
-          <p:cNvSpPr>
-            <a:spLocks noGrp="1"/>
-          </p:cNvSpPr>
-          <p:nvPr>
-            <p:ph type="ftr" sz="quarter" idx="11"/>
-          </p:nvPr>
-        </p:nvSpPr>
-        <p:spPr/>
-        <p:txBody>
-          <a:bodyPr/>
-          <a:lstStyle/>
-          <a:p>
-            <a:endParaRPr lang="en-US"/>
-          </a:p>
-        </p:txBody>
-      </p:sp>
-      <p:sp>
-        <p:nvSpPr>
-          <p:cNvPr id="6" name="Slide Number Placeholder 5"/>
-          <p:cNvSpPr>
-            <a:spLocks noGrp="1"/>
-          </p:cNvSpPr>
-          <p:nvPr>
-            <p:ph type="sldNum" sz="quarter" idx="12"/>
-          </p:nvPr>
-        </p:nvSpPr>
-        <p:spPr/>
-        <p:txBody>
-          <a:bodyPr/>
-          <a:lstStyle/>
-          <a:p>
-            <a:fld id="{292730AB-017E-7B48-BDF2-98302496DA1B}" type="slidenum">
-              <a:rPr lang="en-US" smtClean="0"/>
-              <a:t>‹#›</a:t>
-            </a:fld>
-            <a:endParaRPr lang="en-US"/>
-          </a:p>
-        </p:txBody>
-      </p:sp>
-    </p:spTree>
-    <p:extLst>
-      <p:ext uri="{BB962C8B-B14F-4D97-AF65-F5344CB8AC3E}">
-        <p14:creationId xmlns:p14="http://schemas.microsoft.com/office/powerpoint/2010/main" val="3050186267"/>
-      </p:ext>
-    </p:extLst>
-  </p:cSld>
-  <p:clrMapOvr>
-    <a:masterClrMapping/>
-  </p:clrMapOvr>
-</p:sldLayout>
-</file>
-
-<file path=ppt/slideLayouts/slideLayout16.xml><?xml version="1.0" encoding="utf-8"?>
-<p:sldLayout xmlns:a="http://schemas.openxmlformats.org/drawingml/2006/main" xmlns:r="http://schemas.openxmlformats.org/officeDocument/2006/relationships" xmlns:p="http://schemas.openxmlformats.org/presentationml/2006/main" type="vertTx" preserve="1">
-  <p:cSld name="Title and Vertical Text">
-    <p:spTree>
-      <p:nvGrpSpPr>
-        <p:cNvPr id="1" name=""/>
-        <p:cNvGrpSpPr/>
-        <p:nvPr/>
-      </p:nvGrpSpPr>
-      <p:grpSpPr>
-        <a:xfrm>
-          <a:off x="0" y="0"/>
-          <a:ext cx="0" cy="0"/>
-          <a:chOff x="0" y="0"/>
-          <a:chExt cx="0" cy="0"/>
-        </a:xfrm>
-      </p:grpSpPr>
-      <p:sp>
-        <p:nvSpPr>
-          <p:cNvPr id="2" name="Title 1"/>
-          <p:cNvSpPr>
-            <a:spLocks noGrp="1"/>
-          </p:cNvSpPr>
-          <p:nvPr>
-            <p:ph type="title"/>
-          </p:nvPr>
-        </p:nvSpPr>
-        <p:spPr/>
-        <p:txBody>
-          <a:bodyPr/>
-          <a:lstStyle/>
-          <a:p>
-            <a:r>
-              <a:rPr lang="en-US"/>
-              <a:t>Click to edit Master title style</a:t>
-            </a:r>
-            <a:endParaRPr lang="en-US" dirty="0"/>
-          </a:p>
-        </p:txBody>
-      </p:sp>
-      <p:sp>
-        <p:nvSpPr>
-          <p:cNvPr id="3" name="Vertical Text Placeholder 2"/>
-          <p:cNvSpPr>
-            <a:spLocks noGrp="1"/>
-          </p:cNvSpPr>
-          <p:nvPr>
-            <p:ph type="body" orient="vert" idx="1"/>
-          </p:nvPr>
-        </p:nvSpPr>
-        <p:spPr/>
-        <p:txBody>
-          <a:bodyPr vert="eaVert" anchor="t" anchorCtr="0"/>
-          <a:lstStyle/>
-          <a:p>
-            <a:pPr lvl="0"/>
-            <a:r>
-              <a:rPr lang="en-US"/>
-              <a:t>Click to edit Master text styles</a:t>
-            </a:r>
-          </a:p>
-          <a:p>
-            <a:pPr lvl="1"/>
-            <a:r>
-              <a:rPr lang="en-US"/>
-              <a:t>Second level</a:t>
-            </a:r>
-          </a:p>
-          <a:p>
-            <a:pPr lvl="2"/>
-            <a:r>
-              <a:rPr lang="en-US"/>
-              <a:t>Third level</a:t>
-            </a:r>
-          </a:p>
-          <a:p>
-            <a:pPr lvl="3"/>
-            <a:r>
-              <a:rPr lang="en-US"/>
-              <a:t>Fourth level</a:t>
-            </a:r>
-          </a:p>
-          <a:p>
-            <a:pPr lvl="4"/>
-            <a:r>
-              <a:rPr lang="en-US"/>
-              <a:t>Fifth level</a:t>
-            </a:r>
-            <a:endParaRPr lang="en-US" dirty="0"/>
-          </a:p>
-        </p:txBody>
-      </p:sp>
-      <p:sp>
-        <p:nvSpPr>
-          <p:cNvPr id="4" name="Date Placeholder 3"/>
-          <p:cNvSpPr>
-            <a:spLocks noGrp="1"/>
-          </p:cNvSpPr>
-          <p:nvPr>
-            <p:ph type="dt" sz="half" idx="10"/>
-          </p:nvPr>
-        </p:nvSpPr>
-        <p:spPr/>
-        <p:txBody>
-          <a:bodyPr/>
-          <a:lstStyle/>
-          <a:p>
-            <a:fld id="{60135C24-EB33-6645-B51A-6348BD58F2AA}" type="datetimeFigureOut">
-              <a:rPr lang="en-US" smtClean="0"/>
-              <a:t>8/26/25</a:t>
-            </a:fld>
-            <a:endParaRPr lang="en-US"/>
-          </a:p>
-        </p:txBody>
-      </p:sp>
-      <p:sp>
-        <p:nvSpPr>
-          <p:cNvPr id="5" name="Footer Placeholder 4"/>
-          <p:cNvSpPr>
-            <a:spLocks noGrp="1"/>
-          </p:cNvSpPr>
-          <p:nvPr>
-            <p:ph type="ftr" sz="quarter" idx="11"/>
-          </p:nvPr>
-        </p:nvSpPr>
-        <p:spPr/>
-        <p:txBody>
-          <a:bodyPr/>
-          <a:lstStyle/>
-          <a:p>
-            <a:endParaRPr lang="en-US"/>
-          </a:p>
-        </p:txBody>
-      </p:sp>
-      <p:sp>
-        <p:nvSpPr>
-          <p:cNvPr id="6" name="Slide Number Placeholder 5"/>
-          <p:cNvSpPr>
-            <a:spLocks noGrp="1"/>
-          </p:cNvSpPr>
-          <p:nvPr>
-            <p:ph type="sldNum" sz="quarter" idx="12"/>
-          </p:nvPr>
-        </p:nvSpPr>
-        <p:spPr/>
-        <p:txBody>
-          <a:bodyPr/>
-          <a:lstStyle/>
-          <a:p>
-            <a:fld id="{292730AB-017E-7B48-BDF2-98302496DA1B}" type="slidenum">
-              <a:rPr lang="en-US" smtClean="0"/>
-              <a:t>‹#›</a:t>
-            </a:fld>
-            <a:endParaRPr lang="en-US"/>
-          </a:p>
-        </p:txBody>
-      </p:sp>
-    </p:spTree>
-    <p:extLst>
-      <p:ext uri="{BB962C8B-B14F-4D97-AF65-F5344CB8AC3E}">
-        <p14:creationId xmlns:p14="http://schemas.microsoft.com/office/powerpoint/2010/main" val="3994440483"/>
-      </p:ext>
-    </p:extLst>
-  </p:cSld>
-  <p:clrMapOvr>
-    <a:masterClrMapping/>
-  </p:clrMapOvr>
-</p:sldLayout>
-</file>
-
-<file path=ppt/slideLayouts/slideLayout17.xml><?xml version="1.0" encoding="utf-8"?>
-<p:sldLayout xmlns:a="http://schemas.openxmlformats.org/drawingml/2006/main" xmlns:r="http://schemas.openxmlformats.org/officeDocument/2006/relationships" xmlns:p="http://schemas.openxmlformats.org/presentationml/2006/main" type="vertTitleAndTx" preserve="1">
-  <p:cSld name="Vertical Title and Text">
-    <p:spTree>
-      <p:nvGrpSpPr>
-        <p:cNvPr id="1" name=""/>
-        <p:cNvGrpSpPr/>
-        <p:nvPr/>
-      </p:nvGrpSpPr>
-      <p:grpSpPr>
-        <a:xfrm>
-          <a:off x="0" y="0"/>
-          <a:ext cx="0" cy="0"/>
-          <a:chOff x="0" y="0"/>
-          <a:chExt cx="0" cy="0"/>
-        </a:xfrm>
-      </p:grpSpPr>
-      <p:sp>
-        <p:nvSpPr>
-          <p:cNvPr id="2" name="Vertical Title 1"/>
-          <p:cNvSpPr>
-            <a:spLocks noGrp="1"/>
-          </p:cNvSpPr>
-          <p:nvPr>
-            <p:ph type="title" orient="vert"/>
-          </p:nvPr>
-        </p:nvSpPr>
-        <p:spPr>
-          <a:xfrm>
-            <a:off x="8304212" y="430213"/>
-            <a:ext cx="1752601" cy="5826125"/>
-          </a:xfrm>
-        </p:spPr>
-        <p:txBody>
-          <a:bodyPr vert="eaVert" anchor="b" anchorCtr="0"/>
-          <a:lstStyle/>
-          <a:p>
-            <a:r>
-              <a:rPr lang="en-US"/>
-              <a:t>Click to edit Master title style</a:t>
-            </a:r>
-            <a:endParaRPr lang="en-US" dirty="0"/>
-          </a:p>
-        </p:txBody>
-      </p:sp>
-      <p:sp>
-        <p:nvSpPr>
-          <p:cNvPr id="3" name="Vertical Text Placeholder 2"/>
-          <p:cNvSpPr>
-            <a:spLocks noGrp="1"/>
-          </p:cNvSpPr>
-          <p:nvPr>
-            <p:ph type="body" orient="vert" idx="1"/>
-          </p:nvPr>
-        </p:nvSpPr>
-        <p:spPr>
-          <a:xfrm>
-            <a:off x="652463" y="887414"/>
-            <a:ext cx="7423149" cy="5368924"/>
-          </a:xfrm>
-        </p:spPr>
-        <p:txBody>
-          <a:bodyPr vert="eaVert"/>
-          <a:lstStyle/>
-          <a:p>
-            <a:pPr lvl="0"/>
-            <a:r>
-              <a:rPr lang="en-US"/>
-              <a:t>Click to edit Master text styles</a:t>
-            </a:r>
-          </a:p>
-          <a:p>
-            <a:pPr lvl="1"/>
-            <a:r>
-              <a:rPr lang="en-US"/>
-              <a:t>Second level</a:t>
-            </a:r>
-          </a:p>
-          <a:p>
-            <a:pPr lvl="2"/>
-            <a:r>
-              <a:rPr lang="en-US"/>
-              <a:t>Third level</a:t>
-            </a:r>
-          </a:p>
-          <a:p>
-            <a:pPr lvl="3"/>
-            <a:r>
-              <a:rPr lang="en-US"/>
-              <a:t>Fourth level</a:t>
-            </a:r>
-          </a:p>
-          <a:p>
-            <a:pPr lvl="4"/>
-            <a:r>
-              <a:rPr lang="en-US"/>
-              <a:t>Fifth level</a:t>
-            </a:r>
-            <a:endParaRPr lang="en-US" dirty="0"/>
-          </a:p>
-        </p:txBody>
-      </p:sp>
-      <p:sp>
-        <p:nvSpPr>
-          <p:cNvPr id="4" name="Date Placeholder 3"/>
-          <p:cNvSpPr>
-            <a:spLocks noGrp="1"/>
-          </p:cNvSpPr>
-          <p:nvPr>
-            <p:ph type="dt" sz="half" idx="10"/>
-          </p:nvPr>
-        </p:nvSpPr>
-        <p:spPr/>
-        <p:txBody>
-          <a:bodyPr/>
-          <a:lstStyle/>
-          <a:p>
-            <a:fld id="{60135C24-EB33-6645-B51A-6348BD58F2AA}" type="datetimeFigureOut">
-              <a:rPr lang="en-US" smtClean="0"/>
-              <a:t>8/26/25</a:t>
-            </a:fld>
-            <a:endParaRPr lang="en-US"/>
-          </a:p>
-        </p:txBody>
-      </p:sp>
-      <p:sp>
-        <p:nvSpPr>
-          <p:cNvPr id="5" name="Footer Placeholder 4"/>
-          <p:cNvSpPr>
-            <a:spLocks noGrp="1"/>
-          </p:cNvSpPr>
-          <p:nvPr>
-            <p:ph type="ftr" sz="quarter" idx="11"/>
-          </p:nvPr>
-        </p:nvSpPr>
-        <p:spPr/>
-        <p:txBody>
-          <a:bodyPr/>
-          <a:lstStyle/>
-          <a:p>
-            <a:endParaRPr lang="en-US"/>
-          </a:p>
-        </p:txBody>
-      </p:sp>
-      <p:sp>
-        <p:nvSpPr>
-          <p:cNvPr id="6" name="Slide Number Placeholder 5"/>
-          <p:cNvSpPr>
-            <a:spLocks noGrp="1"/>
-          </p:cNvSpPr>
-          <p:nvPr>
-            <p:ph type="sldNum" sz="quarter" idx="12"/>
-          </p:nvPr>
-        </p:nvSpPr>
-        <p:spPr/>
-        <p:txBody>
-          <a:bodyPr/>
-          <a:lstStyle/>
-          <a:p>
-            <a:fld id="{292730AB-017E-7B48-BDF2-98302496DA1B}" type="slidenum">
-              <a:rPr lang="en-US" smtClean="0"/>
-              <a:t>‹#›</a:t>
-            </a:fld>
-            <a:endParaRPr lang="en-US"/>
-          </a:p>
-        </p:txBody>
-      </p:sp>
-    </p:spTree>
-    <p:extLst>
-      <p:ext uri="{BB962C8B-B14F-4D97-AF65-F5344CB8AC3E}">
-        <p14:creationId xmlns:p14="http://schemas.microsoft.com/office/powerpoint/2010/main" val="1172433050"/>
-      </p:ext>
-    </p:extLst>
-  </p:cSld>
-  <p:clrMapOvr>
-    <a:masterClrMapping/>
-  </p:clrMapOvr>
-</p:sldLayout>
-</file>
-
-<file path=ppt/slideLayouts/slideLayout2.xml><?xml version="1.0" encoding="utf-8"?>
-<p:sldLayout xmlns:a="http://schemas.openxmlformats.org/drawingml/2006/main" xmlns:r="http://schemas.openxmlformats.org/officeDocument/2006/relationships" xmlns:p="http://schemas.openxmlformats.org/presentationml/2006/main" type="obj" preserve="1">
-  <p:cSld name="Title and Content">
-    <p:spTree>
-      <p:nvGrpSpPr>
-        <p:cNvPr id="1" name=""/>
-        <p:cNvGrpSpPr/>
-        <p:nvPr/>
-      </p:nvGrpSpPr>
-      <p:grpSpPr>
-        <a:xfrm>
-          <a:off x="0" y="0"/>
-          <a:ext cx="0" cy="0"/>
-          <a:chOff x="0" y="0"/>
-          <a:chExt cx="0" cy="0"/>
-        </a:xfrm>
-      </p:grpSpPr>
-      <p:sp>
-        <p:nvSpPr>
-          <p:cNvPr id="2" name="Title 1"/>
-          <p:cNvSpPr>
-            <a:spLocks noGrp="1"/>
-          </p:cNvSpPr>
-          <p:nvPr>
-            <p:ph type="title"/>
-          </p:nvPr>
-        </p:nvSpPr>
-        <p:spPr/>
-        <p:txBody>
-          <a:bodyPr/>
-          <a:lstStyle/>
-          <a:p>
-            <a:r>
-              <a:rPr lang="en-US"/>
-              <a:t>Click to edit Master title style</a:t>
-            </a:r>
-            <a:endParaRPr lang="en-US" dirty="0"/>
-          </a:p>
-        </p:txBody>
-      </p:sp>
-      <p:sp>
-        <p:nvSpPr>
-          <p:cNvPr id="3" name="Content Placeholder 2"/>
-          <p:cNvSpPr>
-            <a:spLocks noGrp="1"/>
-          </p:cNvSpPr>
-          <p:nvPr>
-            <p:ph idx="1"/>
-          </p:nvPr>
-        </p:nvSpPr>
-        <p:spPr/>
-        <p:txBody>
-          <a:bodyPr/>
-          <a:lstStyle/>
-          <a:p>
-            <a:pPr lvl="0"/>
-            <a:r>
-              <a:rPr lang="en-US"/>
-              <a:t>Click to edit Master text styles</a:t>
-            </a:r>
-          </a:p>
-          <a:p>
-            <a:pPr lvl="1"/>
-            <a:r>
-              <a:rPr lang="en-US"/>
-              <a:t>Second level</a:t>
-            </a:r>
-          </a:p>
-          <a:p>
-            <a:pPr lvl="2"/>
-            <a:r>
-              <a:rPr lang="en-US"/>
-              <a:t>Third level</a:t>
-            </a:r>
-          </a:p>
-          <a:p>
-            <a:pPr lvl="3"/>
-            <a:r>
-              <a:rPr lang="en-US"/>
-              <a:t>Fourth level</a:t>
-            </a:r>
-          </a:p>
-          <a:p>
-            <a:pPr lvl="4"/>
-            <a:r>
-              <a:rPr lang="en-US"/>
-              <a:t>Fifth level</a:t>
-            </a:r>
-            <a:endParaRPr lang="en-US" dirty="0"/>
-          </a:p>
-        </p:txBody>
-      </p:sp>
-      <p:sp>
-        <p:nvSpPr>
-          <p:cNvPr id="7" name="Date Placeholder 3"/>
-          <p:cNvSpPr>
-            <a:spLocks noGrp="1"/>
-          </p:cNvSpPr>
-          <p:nvPr>
-            <p:ph type="dt" sz="half" idx="10"/>
-          </p:nvPr>
-        </p:nvSpPr>
-        <p:spPr/>
-        <p:txBody>
-          <a:bodyPr/>
-          <a:lstStyle/>
-          <a:p>
-            <a:fld id="{60135C24-EB33-6645-B51A-6348BD58F2AA}" type="datetimeFigureOut">
-              <a:rPr lang="en-US" smtClean="0"/>
-              <a:t>8/26/25</a:t>
-            </a:fld>
-            <a:endParaRPr lang="en-US"/>
-          </a:p>
-        </p:txBody>
-      </p:sp>
-      <p:sp>
-        <p:nvSpPr>
-          <p:cNvPr id="5" name="Footer Placeholder 4"/>
-          <p:cNvSpPr>
-            <a:spLocks noGrp="1"/>
-          </p:cNvSpPr>
-          <p:nvPr>
-            <p:ph type="ftr" sz="quarter" idx="11"/>
-          </p:nvPr>
-        </p:nvSpPr>
-        <p:spPr/>
-        <p:txBody>
-          <a:bodyPr/>
-          <a:lstStyle/>
-          <a:p>
-            <a:endParaRPr lang="en-US"/>
-          </a:p>
-        </p:txBody>
-      </p:sp>
-      <p:sp>
-        <p:nvSpPr>
-          <p:cNvPr id="6" name="Slide Number Placeholder 5"/>
-          <p:cNvSpPr>
-            <a:spLocks noGrp="1"/>
-          </p:cNvSpPr>
-          <p:nvPr>
-            <p:ph type="sldNum" sz="quarter" idx="12"/>
-          </p:nvPr>
-        </p:nvSpPr>
-        <p:spPr/>
-        <p:txBody>
-          <a:bodyPr/>
-          <a:lstStyle/>
-          <a:p>
-            <a:fld id="{292730AB-017E-7B48-BDF2-98302496DA1B}" type="slidenum">
-              <a:rPr lang="en-US" smtClean="0"/>
-              <a:t>‹#›</a:t>
-            </a:fld>
-            <a:endParaRPr lang="en-US"/>
-          </a:p>
-        </p:txBody>
-      </p:sp>
-    </p:spTree>
-    <p:extLst>
-      <p:ext uri="{BB962C8B-B14F-4D97-AF65-F5344CB8AC3E}">
-        <p14:creationId xmlns:p14="http://schemas.microsoft.com/office/powerpoint/2010/main" val="1281689808"/>
-      </p:ext>
-    </p:extLst>
-  </p:cSld>
-  <p:clrMapOvr>
-    <a:masterClrMapping/>
-  </p:clrMapOvr>
-</p:sldLayout>
-</file>
-
-<file path=ppt/slideLayouts/slideLayout3.xml><?xml version="1.0" encoding="utf-8"?>
-<p:sldLayout xmlns:a="http://schemas.openxmlformats.org/drawingml/2006/main" xmlns:r="http://schemas.openxmlformats.org/officeDocument/2006/relationships" xmlns:p="http://schemas.openxmlformats.org/presentationml/2006/main" type="secHead" preserve="1">
-  <p:cSld name="Section Header">
-    <p:spTree>
-      <p:nvGrpSpPr>
-        <p:cNvPr id="1" name=""/>
-        <p:cNvGrpSpPr/>
-        <p:nvPr/>
-      </p:nvGrpSpPr>
-      <p:grpSpPr>
-        <a:xfrm>
-          <a:off x="0" y="0"/>
-          <a:ext cx="0" cy="0"/>
-          <a:chOff x="0" y="0"/>
-          <a:chExt cx="0" cy="0"/>
-        </a:xfrm>
-      </p:grpSpPr>
-      <p:sp>
-        <p:nvSpPr>
-          <p:cNvPr id="2" name="Title 1"/>
-          <p:cNvSpPr>
-            <a:spLocks noGrp="1"/>
-          </p:cNvSpPr>
-          <p:nvPr>
-            <p:ph type="title"/>
-          </p:nvPr>
-        </p:nvSpPr>
-        <p:spPr>
-          <a:xfrm>
-            <a:off x="1154956" y="2861733"/>
-            <a:ext cx="8825657" cy="1915647"/>
-          </a:xfrm>
-        </p:spPr>
-        <p:txBody>
-          <a:bodyPr anchor="b"/>
-          <a:lstStyle>
-            <a:lvl1pPr algn="l">
-              <a:defRPr sz="4000" b="0" cap="none"/>
-            </a:lvl1pPr>
-          </a:lstStyle>
-          <a:p>
-            <a:r>
-              <a:rPr lang="en-US"/>
-              <a:t>Click to edit Master title style</a:t>
-            </a:r>
-            <a:endParaRPr lang="en-US" dirty="0"/>
-          </a:p>
-        </p:txBody>
-      </p:sp>
-      <p:sp>
-        <p:nvSpPr>
-          <p:cNvPr id="3" name="Text Placeholder 2"/>
-          <p:cNvSpPr>
-            <a:spLocks noGrp="1"/>
-          </p:cNvSpPr>
-          <p:nvPr>
-            <p:ph type="body" idx="1"/>
-          </p:nvPr>
-        </p:nvSpPr>
-        <p:spPr>
-          <a:xfrm>
-            <a:off x="1154955" y="4777381"/>
-            <a:ext cx="8825658" cy="860400"/>
-          </a:xfrm>
-        </p:spPr>
-        <p:txBody>
-          <a:bodyPr anchor="t"/>
-          <a:lstStyle>
-            <a:lvl1pPr marL="0" indent="0" algn="l">
-              <a:buNone/>
-              <a:defRPr sz="2000" cap="all">
-                <a:solidFill>
-                  <a:schemeClr val="bg2">
-                    <a:lumMod val="40000"/>
-                    <a:lumOff val="60000"/>
-                  </a:schemeClr>
-                </a:solidFill>
-              </a:defRPr>
-            </a:lvl1pPr>
-            <a:lvl2pPr marL="457200" indent="0">
-              <a:buNone/>
-              <a:defRPr sz="1800">
-                <a:solidFill>
-                  <a:schemeClr val="tx1">
-                    <a:tint val="75000"/>
-                  </a:schemeClr>
-                </a:solidFill>
-              </a:defRPr>
-            </a:lvl2pPr>
-            <a:lvl3pPr marL="914400" indent="0">
-              <a:buNone/>
-              <a:defRPr sz="1600">
-                <a:solidFill>
-                  <a:schemeClr val="tx1">
-                    <a:tint val="75000"/>
-                  </a:schemeClr>
-                </a:solidFill>
-              </a:defRPr>
-            </a:lvl3pPr>
-            <a:lvl4pPr marL="1371600" indent="0">
-              <a:buNone/>
-              <a:defRPr sz="1400">
-                <a:solidFill>
-                  <a:schemeClr val="tx1">
-                    <a:tint val="75000"/>
-                  </a:schemeClr>
-                </a:solidFill>
-              </a:defRPr>
-            </a:lvl4pPr>
-            <a:lvl5pPr marL="1828800" indent="0">
-              <a:buNone/>
-              <a:defRPr sz="1400">
-                <a:solidFill>
-                  <a:schemeClr val="tx1">
-                    <a:tint val="75000"/>
-                  </a:schemeClr>
-                </a:solidFill>
-              </a:defRPr>
-            </a:lvl5pPr>
-            <a:lvl6pPr marL="2286000" indent="0">
-              <a:buNone/>
-              <a:defRPr sz="1400">
-                <a:solidFill>
-                  <a:schemeClr val="tx1">
-                    <a:tint val="75000"/>
-                  </a:schemeClr>
-                </a:solidFill>
-              </a:defRPr>
-            </a:lvl6pPr>
-            <a:lvl7pPr marL="2743200" indent="0">
-              <a:buNone/>
-              <a:defRPr sz="1400">
-                <a:solidFill>
-                  <a:schemeClr val="tx1">
-                    <a:tint val="75000"/>
-                  </a:schemeClr>
-                </a:solidFill>
-              </a:defRPr>
-            </a:lvl7pPr>
-            <a:lvl8pPr marL="3200400" indent="0">
-              <a:buNone/>
-              <a:defRPr sz="1400">
-                <a:solidFill>
-                  <a:schemeClr val="tx1">
-                    <a:tint val="75000"/>
-                  </a:schemeClr>
-                </a:solidFill>
-              </a:defRPr>
-            </a:lvl8pPr>
-            <a:lvl9pPr marL="3657600" indent="0">
-              <a:buNone/>
-              <a:defRPr sz="1400">
-                <a:solidFill>
-                  <a:schemeClr val="tx1">
-                    <a:tint val="75000"/>
-                  </a:schemeClr>
-                </a:solidFill>
-              </a:defRPr>
-            </a:lvl9pPr>
-          </a:lstStyle>
-          <a:p>
-            <a:pPr lvl="0"/>
-            <a:r>
-              <a:rPr lang="en-US"/>
-              <a:t>Click to edit Master text styles</a:t>
-            </a:r>
-          </a:p>
-        </p:txBody>
-      </p:sp>
-      <p:sp>
-        <p:nvSpPr>
-          <p:cNvPr id="4" name="Date Placeholder 3"/>
-          <p:cNvSpPr>
-            <a:spLocks noGrp="1"/>
-          </p:cNvSpPr>
-          <p:nvPr>
-            <p:ph type="dt" sz="half" idx="10"/>
-          </p:nvPr>
-        </p:nvSpPr>
-        <p:spPr/>
-        <p:txBody>
-          <a:bodyPr/>
-          <a:lstStyle/>
-          <a:p>
-            <a:fld id="{60135C24-EB33-6645-B51A-6348BD58F2AA}" type="datetimeFigureOut">
-              <a:rPr lang="en-US" smtClean="0"/>
-              <a:t>8/26/25</a:t>
-            </a:fld>
-            <a:endParaRPr lang="en-US"/>
-          </a:p>
-        </p:txBody>
-      </p:sp>
-      <p:sp>
-        <p:nvSpPr>
-          <p:cNvPr id="5" name="Footer Placeholder 4"/>
-          <p:cNvSpPr>
-            <a:spLocks noGrp="1"/>
-          </p:cNvSpPr>
-          <p:nvPr>
-            <p:ph type="ftr" sz="quarter" idx="11"/>
-          </p:nvPr>
-        </p:nvSpPr>
-        <p:spPr/>
-        <p:txBody>
-          <a:bodyPr/>
-          <a:lstStyle/>
-          <a:p>
-            <a:endParaRPr lang="en-US"/>
-          </a:p>
-        </p:txBody>
-      </p:sp>
-      <p:sp>
-        <p:nvSpPr>
-          <p:cNvPr id="6" name="Slide Number Placeholder 5"/>
-          <p:cNvSpPr>
-            <a:spLocks noGrp="1"/>
-          </p:cNvSpPr>
-          <p:nvPr>
-            <p:ph type="sldNum" sz="quarter" idx="12"/>
-          </p:nvPr>
-        </p:nvSpPr>
-        <p:spPr/>
-        <p:txBody>
-          <a:bodyPr/>
-          <a:lstStyle/>
-          <a:p>
-            <a:fld id="{292730AB-017E-7B48-BDF2-98302496DA1B}" type="slidenum">
-              <a:rPr lang="en-US" smtClean="0"/>
-              <a:t>‹#›</a:t>
-            </a:fld>
-            <a:endParaRPr lang="en-US"/>
-          </a:p>
-        </p:txBody>
-      </p:sp>
-    </p:spTree>
-    <p:extLst>
-      <p:ext uri="{BB962C8B-B14F-4D97-AF65-F5344CB8AC3E}">
-        <p14:creationId xmlns:p14="http://schemas.microsoft.com/office/powerpoint/2010/main" val="4000939051"/>
-      </p:ext>
-    </p:extLst>
-  </p:cSld>
-  <p:clrMapOvr>
-    <a:masterClrMapping/>
-  </p:clrMapOvr>
-</p:sldLayout>
-</file>
-
-<file path=ppt/slideLayouts/slideLayout4.xml><?xml version="1.0" encoding="utf-8"?>
-<p:sldLayout xmlns:a="http://schemas.openxmlformats.org/drawingml/2006/main" xmlns:r="http://schemas.openxmlformats.org/officeDocument/2006/relationships" xmlns:p="http://schemas.openxmlformats.org/presentationml/2006/main" type="twoObj" preserve="1">
-  <p:cSld name="Two Content">
-    <p:spTree>
-      <p:nvGrpSpPr>
-        <p:cNvPr id="1" name=""/>
-        <p:cNvGrpSpPr/>
-        <p:nvPr/>
-      </p:nvGrpSpPr>
-      <p:grpSpPr>
-        <a:xfrm>
-          <a:off x="0" y="0"/>
-          <a:ext cx="0" cy="0"/>
-          <a:chOff x="0" y="0"/>
-          <a:chExt cx="0" cy="0"/>
-        </a:xfrm>
-      </p:grpSpPr>
-      <p:sp>
-        <p:nvSpPr>
-          <p:cNvPr id="2" name="Title 1"/>
-          <p:cNvSpPr>
-            <a:spLocks noGrp="1"/>
-          </p:cNvSpPr>
-          <p:nvPr>
-            <p:ph type="title"/>
-          </p:nvPr>
-        </p:nvSpPr>
-        <p:spPr/>
-        <p:txBody>
-          <a:bodyPr/>
-          <a:lstStyle/>
-          <a:p>
-            <a:r>
-              <a:rPr lang="en-US"/>
-              <a:t>Click to edit Master title style</a:t>
-            </a:r>
-            <a:endParaRPr lang="en-US" dirty="0"/>
-          </a:p>
-        </p:txBody>
-      </p:sp>
-      <p:sp>
-        <p:nvSpPr>
-          <p:cNvPr id="3" name="Content Placeholder 2"/>
-          <p:cNvSpPr>
-            <a:spLocks noGrp="1"/>
-          </p:cNvSpPr>
-          <p:nvPr>
-            <p:ph sz="half" idx="1"/>
-          </p:nvPr>
-        </p:nvSpPr>
-        <p:spPr>
-          <a:xfrm>
-            <a:off x="1103312" y="2060575"/>
-            <a:ext cx="4396339" cy="4195763"/>
-          </a:xfrm>
-        </p:spPr>
-        <p:txBody>
-          <a:bodyPr>
-            <a:normAutofit/>
-          </a:bodyPr>
-          <a:lstStyle>
-            <a:lvl1pPr>
-              <a:defRPr sz="1800"/>
-            </a:lvl1pPr>
-            <a:lvl2pPr>
-              <a:defRPr sz="1600"/>
-            </a:lvl2pPr>
-            <a:lvl3pPr>
-              <a:defRPr sz="1400"/>
-            </a:lvl3pPr>
-            <a:lvl4pPr>
-              <a:defRPr sz="1200"/>
-            </a:lvl4pPr>
-            <a:lvl5pPr>
-              <a:defRPr sz="1200"/>
-            </a:lvl5pPr>
-            <a:lvl6pPr>
-              <a:defRPr sz="1200"/>
-            </a:lvl6pPr>
-            <a:lvl7pPr>
-              <a:defRPr sz="1200"/>
-            </a:lvl7pPr>
-            <a:lvl8pPr>
-              <a:defRPr sz="1200"/>
-            </a:lvl8pPr>
-            <a:lvl9pPr>
-              <a:defRPr sz="1200"/>
-            </a:lvl9pPr>
-          </a:lstStyle>
-          <a:p>
-            <a:pPr lvl="0"/>
-            <a:r>
-              <a:rPr lang="en-US"/>
-              <a:t>Click to edit Master text styles</a:t>
-            </a:r>
-          </a:p>
-          <a:p>
-            <a:pPr lvl="1"/>
-            <a:r>
-              <a:rPr lang="en-US"/>
-              <a:t>Second level</a:t>
-            </a:r>
-          </a:p>
-          <a:p>
-            <a:pPr lvl="2"/>
-            <a:r>
-              <a:rPr lang="en-US"/>
-              <a:t>Third level</a:t>
-            </a:r>
-          </a:p>
-          <a:p>
-            <a:pPr lvl="3"/>
-            <a:r>
-              <a:rPr lang="en-US"/>
-              <a:t>Fourth level</a:t>
-            </a:r>
-          </a:p>
-          <a:p>
-            <a:pPr lvl="4"/>
-            <a:r>
-              <a:rPr lang="en-US"/>
-              <a:t>Fifth level</a:t>
-            </a:r>
-            <a:endParaRPr lang="en-US" dirty="0"/>
-          </a:p>
-        </p:txBody>
-      </p:sp>
-      <p:sp>
-        <p:nvSpPr>
-          <p:cNvPr id="4" name="Content Placeholder 3"/>
-          <p:cNvSpPr>
-            <a:spLocks noGrp="1"/>
-          </p:cNvSpPr>
-          <p:nvPr>
-            <p:ph sz="half" idx="2"/>
-          </p:nvPr>
-        </p:nvSpPr>
-        <p:spPr>
-          <a:xfrm>
-            <a:off x="5654493" y="2056092"/>
-            <a:ext cx="4396341" cy="4200245"/>
-          </a:xfrm>
-        </p:spPr>
-        <p:txBody>
-          <a:bodyPr>
-            <a:normAutofit/>
-          </a:bodyPr>
-          <a:lstStyle>
-            <a:lvl1pPr>
-              <a:defRPr sz="1800"/>
-            </a:lvl1pPr>
-            <a:lvl2pPr>
-              <a:defRPr sz="1600"/>
-            </a:lvl2pPr>
-            <a:lvl3pPr>
-              <a:defRPr sz="1400"/>
-            </a:lvl3pPr>
-            <a:lvl4pPr>
-              <a:defRPr sz="1200"/>
-            </a:lvl4pPr>
-            <a:lvl5pPr>
-              <a:defRPr sz="1200"/>
-            </a:lvl5pPr>
-            <a:lvl6pPr>
-              <a:defRPr sz="1200"/>
-            </a:lvl6pPr>
-            <a:lvl7pPr>
-              <a:defRPr sz="1200"/>
-            </a:lvl7pPr>
-            <a:lvl8pPr>
-              <a:defRPr sz="1200"/>
-            </a:lvl8pPr>
-            <a:lvl9pPr>
-              <a:defRPr sz="1200"/>
-            </a:lvl9pPr>
-          </a:lstStyle>
-          <a:p>
-            <a:pPr lvl="0"/>
-            <a:r>
-              <a:rPr lang="en-US"/>
-              <a:t>Click to edit Master text styles</a:t>
-            </a:r>
-          </a:p>
-          <a:p>
-            <a:pPr lvl="1"/>
-            <a:r>
-              <a:rPr lang="en-US"/>
-              <a:t>Second level</a:t>
-            </a:r>
-          </a:p>
-          <a:p>
-            <a:pPr lvl="2"/>
-            <a:r>
-              <a:rPr lang="en-US"/>
-              <a:t>Third level</a:t>
-            </a:r>
-          </a:p>
-          <a:p>
-            <a:pPr lvl="3"/>
-            <a:r>
-              <a:rPr lang="en-US"/>
-              <a:t>Fourth level</a:t>
-            </a:r>
-          </a:p>
-          <a:p>
-            <a:pPr lvl="4"/>
-            <a:r>
-              <a:rPr lang="en-US"/>
-              <a:t>Fifth level</a:t>
-            </a:r>
-            <a:endParaRPr lang="en-US" dirty="0"/>
-          </a:p>
-        </p:txBody>
-      </p:sp>
-      <p:sp>
-        <p:nvSpPr>
-          <p:cNvPr id="5" name="Date Placeholder 4"/>
-          <p:cNvSpPr>
-            <a:spLocks noGrp="1"/>
-          </p:cNvSpPr>
-          <p:nvPr>
-            <p:ph type="dt" sz="half" idx="10"/>
-          </p:nvPr>
-        </p:nvSpPr>
-        <p:spPr/>
-        <p:txBody>
-          <a:bodyPr/>
-          <a:lstStyle/>
-          <a:p>
-            <a:fld id="{60135C24-EB33-6645-B51A-6348BD58F2AA}" type="datetimeFigureOut">
-              <a:rPr lang="en-US" smtClean="0"/>
-              <a:t>8/26/25</a:t>
-            </a:fld>
-            <a:endParaRPr lang="en-US"/>
-          </a:p>
-        </p:txBody>
-      </p:sp>
-      <p:sp>
-        <p:nvSpPr>
-          <p:cNvPr id="6" name="Footer Placeholder 5"/>
-          <p:cNvSpPr>
-            <a:spLocks noGrp="1"/>
-          </p:cNvSpPr>
-          <p:nvPr>
-            <p:ph type="ftr" sz="quarter" idx="11"/>
-          </p:nvPr>
-        </p:nvSpPr>
-        <p:spPr/>
-        <p:txBody>
-          <a:bodyPr/>
-          <a:lstStyle/>
-          <a:p>
-            <a:endParaRPr lang="en-US"/>
-          </a:p>
-        </p:txBody>
-      </p:sp>
-      <p:sp>
-        <p:nvSpPr>
-          <p:cNvPr id="7" name="Slide Number Placeholder 6"/>
-          <p:cNvSpPr>
-            <a:spLocks noGrp="1"/>
-          </p:cNvSpPr>
-          <p:nvPr>
-            <p:ph type="sldNum" sz="quarter" idx="12"/>
-          </p:nvPr>
-        </p:nvSpPr>
-        <p:spPr/>
-        <p:txBody>
-          <a:bodyPr/>
-          <a:lstStyle/>
-          <a:p>
-            <a:fld id="{292730AB-017E-7B48-BDF2-98302496DA1B}" type="slidenum">
-              <a:rPr lang="en-US" smtClean="0"/>
-              <a:t>‹#›</a:t>
-            </a:fld>
-            <a:endParaRPr lang="en-US"/>
-          </a:p>
-        </p:txBody>
-      </p:sp>
-    </p:spTree>
-    <p:extLst>
-      <p:ext uri="{BB962C8B-B14F-4D97-AF65-F5344CB8AC3E}">
-        <p14:creationId xmlns:p14="http://schemas.microsoft.com/office/powerpoint/2010/main" val="3843529399"/>
-      </p:ext>
-    </p:extLst>
-  </p:cSld>
-  <p:clrMapOvr>
-    <a:masterClrMapping/>
-  </p:clrMapOvr>
-</p:sldLayout>
-</file>
-
-<file path=ppt/slideLayouts/slideLayout5.xml><?xml version="1.0" encoding="utf-8"?>
-<p:sldLayout xmlns:a="http://schemas.openxmlformats.org/drawingml/2006/main" xmlns:r="http://schemas.openxmlformats.org/officeDocument/2006/relationships" xmlns:p="http://schemas.openxmlformats.org/presentationml/2006/main" type="twoTxTwoObj" preserve="1">
-  <p:cSld name="Comparison">
-    <p:spTree>
-      <p:nvGrpSpPr>
-        <p:cNvPr id="1" name=""/>
-        <p:cNvGrpSpPr/>
-        <p:nvPr/>
-      </p:nvGrpSpPr>
-      <p:grpSpPr>
-        <a:xfrm>
-          <a:off x="0" y="0"/>
-          <a:ext cx="0" cy="0"/>
-          <a:chOff x="0" y="0"/>
-          <a:chExt cx="0" cy="0"/>
-        </a:xfrm>
-      </p:grpSpPr>
-      <p:sp>
-        <p:nvSpPr>
-          <p:cNvPr id="2" name="Title 1"/>
-          <p:cNvSpPr>
-            <a:spLocks noGrp="1"/>
-          </p:cNvSpPr>
-          <p:nvPr>
-            <p:ph type="title"/>
-          </p:nvPr>
-        </p:nvSpPr>
-        <p:spPr/>
-        <p:txBody>
-          <a:bodyPr/>
-          <a:lstStyle>
-            <a:lvl1pPr>
-              <a:defRPr/>
-            </a:lvl1pPr>
-          </a:lstStyle>
-          <a:p>
-            <a:r>
-              <a:rPr lang="en-US"/>
-              <a:t>Click to edit Master title style</a:t>
-            </a:r>
-            <a:endParaRPr lang="en-US" dirty="0"/>
-          </a:p>
-        </p:txBody>
-      </p:sp>
-      <p:sp>
-        <p:nvSpPr>
-          <p:cNvPr id="3" name="Text Placeholder 2"/>
-          <p:cNvSpPr>
-            <a:spLocks noGrp="1"/>
-          </p:cNvSpPr>
-          <p:nvPr>
-            <p:ph type="body" idx="1"/>
-          </p:nvPr>
-        </p:nvSpPr>
-        <p:spPr>
-          <a:xfrm>
-            <a:off x="1103313" y="1905000"/>
-            <a:ext cx="4396338" cy="576262"/>
-          </a:xfrm>
-        </p:spPr>
-        <p:txBody>
-          <a:bodyPr anchor="b">
-            <a:noAutofit/>
-          </a:bodyPr>
-          <a:lstStyle>
-            <a:lvl1pPr marL="0" indent="0">
-              <a:buNone/>
-              <a:defRPr sz="2400" b="0">
-                <a:solidFill>
-                  <a:schemeClr val="bg2">
-                    <a:lumMod val="40000"/>
-                    <a:lumOff val="60000"/>
-                  </a:schemeClr>
-                </a:solidFill>
-              </a:defRPr>
-            </a:lvl1pPr>
-            <a:lvl2pPr marL="457200" indent="0">
-              <a:buNone/>
-              <a:defRPr sz="2000" b="1"/>
-            </a:lvl2pPr>
-            <a:lvl3pPr marL="914400" indent="0">
-              <a:buNone/>
-              <a:defRPr sz="1800" b="1"/>
-            </a:lvl3pPr>
-            <a:lvl4pPr marL="1371600" indent="0">
-              <a:buNone/>
-              <a:defRPr sz="1600" b="1"/>
-            </a:lvl4pPr>
-            <a:lvl5pPr marL="1828800" indent="0">
-              <a:buNone/>
-              <a:defRPr sz="1600" b="1"/>
-            </a:lvl5pPr>
-            <a:lvl6pPr marL="2286000" indent="0">
-              <a:buNone/>
-              <a:defRPr sz="1600" b="1"/>
-            </a:lvl6pPr>
-            <a:lvl7pPr marL="2743200" indent="0">
-              <a:buNone/>
-              <a:defRPr sz="1600" b="1"/>
-            </a:lvl7pPr>
-            <a:lvl8pPr marL="3200400" indent="0">
-              <a:buNone/>
-              <a:defRPr sz="1600" b="1"/>
-            </a:lvl8pPr>
-            <a:lvl9pPr marL="3657600" indent="0">
-              <a:buNone/>
-              <a:defRPr sz="1600" b="1"/>
-            </a:lvl9pPr>
-          </a:lstStyle>
-          <a:p>
-            <a:pPr lvl="0"/>
-            <a:r>
-              <a:rPr lang="en-US"/>
-              <a:t>Click to edit Master text styles</a:t>
-            </a:r>
-          </a:p>
-        </p:txBody>
-      </p:sp>
-      <p:sp>
-        <p:nvSpPr>
-          <p:cNvPr id="4" name="Content Placeholder 3"/>
-          <p:cNvSpPr>
-            <a:spLocks noGrp="1"/>
-          </p:cNvSpPr>
-          <p:nvPr>
-            <p:ph sz="half" idx="2"/>
-          </p:nvPr>
-        </p:nvSpPr>
-        <p:spPr>
-          <a:xfrm>
-            <a:off x="1103312" y="2514600"/>
-            <a:ext cx="4396339" cy="3741738"/>
-          </a:xfrm>
-        </p:spPr>
-        <p:txBody>
-          <a:bodyPr>
-            <a:normAutofit/>
-          </a:bodyPr>
-          <a:lstStyle>
-            <a:lvl1pPr>
-              <a:defRPr sz="1800"/>
-            </a:lvl1pPr>
-            <a:lvl2pPr>
-              <a:defRPr sz="1600"/>
-            </a:lvl2pPr>
-            <a:lvl3pPr>
-              <a:defRPr sz="1400"/>
-            </a:lvl3pPr>
-            <a:lvl4pPr>
-              <a:defRPr sz="1200"/>
-            </a:lvl4pPr>
-            <a:lvl5pPr>
-              <a:defRPr sz="1200"/>
-            </a:lvl5pPr>
-            <a:lvl6pPr>
-              <a:defRPr sz="1200"/>
-            </a:lvl6pPr>
-            <a:lvl7pPr>
-              <a:defRPr sz="1200"/>
-            </a:lvl7pPr>
-            <a:lvl8pPr>
-              <a:defRPr sz="1200"/>
-            </a:lvl8pPr>
-            <a:lvl9pPr>
-              <a:defRPr sz="1200"/>
-            </a:lvl9pPr>
-          </a:lstStyle>
-          <a:p>
-            <a:pPr lvl="0"/>
-            <a:r>
-              <a:rPr lang="en-US"/>
-              <a:t>Click to edit Master text styles</a:t>
-            </a:r>
-          </a:p>
-          <a:p>
-            <a:pPr lvl="1"/>
-            <a:r>
-              <a:rPr lang="en-US"/>
-              <a:t>Second level</a:t>
-            </a:r>
-          </a:p>
-          <a:p>
-            <a:pPr lvl="2"/>
-            <a:r>
-              <a:rPr lang="en-US"/>
-              <a:t>Third level</a:t>
-            </a:r>
-          </a:p>
-          <a:p>
-            <a:pPr lvl="3"/>
-            <a:r>
-              <a:rPr lang="en-US"/>
-              <a:t>Fourth level</a:t>
-            </a:r>
-          </a:p>
-          <a:p>
-            <a:pPr lvl="4"/>
-            <a:r>
-              <a:rPr lang="en-US"/>
-              <a:t>Fifth level</a:t>
-            </a:r>
-            <a:endParaRPr lang="en-US" dirty="0"/>
-          </a:p>
-        </p:txBody>
-      </p:sp>
-      <p:sp>
-        <p:nvSpPr>
-          <p:cNvPr id="5" name="Text Placeholder 4"/>
-          <p:cNvSpPr>
-            <a:spLocks noGrp="1"/>
-          </p:cNvSpPr>
-          <p:nvPr>
-            <p:ph type="body" sz="quarter" idx="3"/>
-          </p:nvPr>
-        </p:nvSpPr>
-        <p:spPr>
-          <a:xfrm>
-            <a:off x="5654495" y="1905000"/>
-            <a:ext cx="4396339" cy="576262"/>
-          </a:xfrm>
-        </p:spPr>
-        <p:txBody>
-          <a:bodyPr anchor="b">
-            <a:noAutofit/>
-          </a:bodyPr>
-          <a:lstStyle>
-            <a:lvl1pPr marL="0" indent="0">
-              <a:buNone/>
-              <a:defRPr sz="2400" b="0">
-                <a:solidFill>
-                  <a:schemeClr val="bg2">
-                    <a:lumMod val="40000"/>
-                    <a:lumOff val="60000"/>
-                  </a:schemeClr>
-                </a:solidFill>
-              </a:defRPr>
-            </a:lvl1pPr>
-            <a:lvl2pPr marL="457200" indent="0">
-              <a:buNone/>
-              <a:defRPr sz="2000" b="1"/>
-            </a:lvl2pPr>
-            <a:lvl3pPr marL="914400" indent="0">
-              <a:buNone/>
-              <a:defRPr sz="1800" b="1"/>
-            </a:lvl3pPr>
-            <a:lvl4pPr marL="1371600" indent="0">
-              <a:buNone/>
-              <a:defRPr sz="1600" b="1"/>
-            </a:lvl4pPr>
-            <a:lvl5pPr marL="1828800" indent="0">
-              <a:buNone/>
-              <a:defRPr sz="1600" b="1"/>
-            </a:lvl5pPr>
-            <a:lvl6pPr marL="2286000" indent="0">
-              <a:buNone/>
-              <a:defRPr sz="1600" b="1"/>
-            </a:lvl6pPr>
-            <a:lvl7pPr marL="2743200" indent="0">
-              <a:buNone/>
-              <a:defRPr sz="1600" b="1"/>
-            </a:lvl7pPr>
-            <a:lvl8pPr marL="3200400" indent="0">
-              <a:buNone/>
-              <a:defRPr sz="1600" b="1"/>
-            </a:lvl8pPr>
-            <a:lvl9pPr marL="3657600" indent="0">
-              <a:buNone/>
-              <a:defRPr sz="1600" b="1"/>
-            </a:lvl9pPr>
-          </a:lstStyle>
-          <a:p>
-            <a:pPr lvl="0"/>
-            <a:r>
-              <a:rPr lang="en-US"/>
-              <a:t>Click to edit Master text styles</a:t>
-            </a:r>
-          </a:p>
-        </p:txBody>
-      </p:sp>
-      <p:sp>
-        <p:nvSpPr>
-          <p:cNvPr id="6" name="Content Placeholder 5"/>
-          <p:cNvSpPr>
-            <a:spLocks noGrp="1"/>
-          </p:cNvSpPr>
-          <p:nvPr>
-            <p:ph sz="quarter" idx="4"/>
-          </p:nvPr>
-        </p:nvSpPr>
-        <p:spPr>
-          <a:xfrm>
-            <a:off x="5654495" y="2514600"/>
-            <a:ext cx="4396339" cy="3741738"/>
-          </a:xfrm>
-        </p:spPr>
-        <p:txBody>
-          <a:bodyPr>
-            <a:normAutofit/>
-          </a:bodyPr>
-          <a:lstStyle>
-            <a:lvl1pPr>
-              <a:defRPr sz="1800"/>
-            </a:lvl1pPr>
-            <a:lvl2pPr>
-              <a:defRPr sz="1600"/>
-            </a:lvl2pPr>
-            <a:lvl3pPr>
-              <a:defRPr sz="1400"/>
-            </a:lvl3pPr>
-            <a:lvl4pPr>
-              <a:defRPr sz="1200"/>
-            </a:lvl4pPr>
-            <a:lvl5pPr>
-              <a:defRPr sz="1200"/>
-            </a:lvl5pPr>
-            <a:lvl6pPr>
-              <a:defRPr sz="1200"/>
-            </a:lvl6pPr>
-            <a:lvl7pPr>
-              <a:defRPr sz="1200"/>
-            </a:lvl7pPr>
-            <a:lvl8pPr>
-              <a:defRPr sz="1200"/>
-            </a:lvl8pPr>
-            <a:lvl9pPr>
-              <a:defRPr sz="1200"/>
-            </a:lvl9pPr>
-          </a:lstStyle>
-          <a:p>
-            <a:pPr lvl="0"/>
-            <a:r>
-              <a:rPr lang="en-US"/>
-              <a:t>Click to edit Master text styles</a:t>
-            </a:r>
-          </a:p>
-          <a:p>
-            <a:pPr lvl="1"/>
-            <a:r>
-              <a:rPr lang="en-US"/>
-              <a:t>Second level</a:t>
-            </a:r>
-          </a:p>
-          <a:p>
-            <a:pPr lvl="2"/>
-            <a:r>
-              <a:rPr lang="en-US"/>
-              <a:t>Third level</a:t>
-            </a:r>
-          </a:p>
-          <a:p>
-            <a:pPr lvl="3"/>
-            <a:r>
-              <a:rPr lang="en-US"/>
-              <a:t>Fourth level</a:t>
-            </a:r>
-          </a:p>
-          <a:p>
-            <a:pPr lvl="4"/>
-            <a:r>
-              <a:rPr lang="en-US"/>
-              <a:t>Fifth level</a:t>
-            </a:r>
-            <a:endParaRPr lang="en-US" dirty="0"/>
-          </a:p>
-        </p:txBody>
-      </p:sp>
-      <p:sp>
-        <p:nvSpPr>
-          <p:cNvPr id="7" name="Date Placeholder 6"/>
-          <p:cNvSpPr>
-            <a:spLocks noGrp="1"/>
-          </p:cNvSpPr>
-          <p:nvPr>
-            <p:ph type="dt" sz="half" idx="10"/>
-          </p:nvPr>
-        </p:nvSpPr>
-        <p:spPr/>
-        <p:txBody>
-          <a:bodyPr/>
-          <a:lstStyle/>
-          <a:p>
-            <a:fld id="{60135C24-EB33-6645-B51A-6348BD58F2AA}" type="datetimeFigureOut">
-              <a:rPr lang="en-US" smtClean="0"/>
-              <a:t>8/26/25</a:t>
-            </a:fld>
-            <a:endParaRPr lang="en-US"/>
-          </a:p>
-        </p:txBody>
-      </p:sp>
-      <p:sp>
-        <p:nvSpPr>
-          <p:cNvPr id="8" name="Footer Placeholder 7"/>
-          <p:cNvSpPr>
-            <a:spLocks noGrp="1"/>
-          </p:cNvSpPr>
-          <p:nvPr>
-            <p:ph type="ftr" sz="quarter" idx="11"/>
-          </p:nvPr>
-        </p:nvSpPr>
-        <p:spPr/>
-        <p:txBody>
-          <a:bodyPr/>
-          <a:lstStyle/>
-          <a:p>
-            <a:endParaRPr lang="en-US"/>
-          </a:p>
-        </p:txBody>
-      </p:sp>
-      <p:sp>
-        <p:nvSpPr>
-          <p:cNvPr id="9" name="Slide Number Placeholder 8"/>
-          <p:cNvSpPr>
-            <a:spLocks noGrp="1"/>
-          </p:cNvSpPr>
-          <p:nvPr>
-            <p:ph type="sldNum" sz="quarter" idx="12"/>
-          </p:nvPr>
-        </p:nvSpPr>
-        <p:spPr/>
-        <p:txBody>
-          <a:bodyPr/>
-          <a:lstStyle/>
-          <a:p>
-            <a:fld id="{292730AB-017E-7B48-BDF2-98302496DA1B}" type="slidenum">
-              <a:rPr lang="en-US" smtClean="0"/>
-              <a:t>‹#›</a:t>
-            </a:fld>
-            <a:endParaRPr lang="en-US"/>
-          </a:p>
-        </p:txBody>
-      </p:sp>
-    </p:spTree>
-    <p:extLst>
-      <p:ext uri="{BB962C8B-B14F-4D97-AF65-F5344CB8AC3E}">
-        <p14:creationId xmlns:p14="http://schemas.microsoft.com/office/powerpoint/2010/main" val="3983036315"/>
-      </p:ext>
-    </p:extLst>
-  </p:cSld>
-  <p:clrMapOvr>
-    <a:masterClrMapping/>
-  </p:clrMapOvr>
-</p:sldLayout>
-</file>
-
-<file path=ppt/slideLayouts/slideLayout6.xml><?xml version="1.0" encoding="utf-8"?>
-<p:sldLayout xmlns:a="http://schemas.openxmlformats.org/drawingml/2006/main" xmlns:r="http://schemas.openxmlformats.org/officeDocument/2006/relationships" xmlns:p="http://schemas.openxmlformats.org/presentationml/2006/main" type="titleOnly" preserve="1">
-  <p:cSld name="Title Only">
-    <p:spTree>
-      <p:nvGrpSpPr>
-        <p:cNvPr id="1" name=""/>
-        <p:cNvGrpSpPr/>
-        <p:nvPr/>
-      </p:nvGrpSpPr>
-      <p:grpSpPr>
-        <a:xfrm>
-          <a:off x="0" y="0"/>
-          <a:ext cx="0" cy="0"/>
-          <a:chOff x="0" y="0"/>
-          <a:chExt cx="0" cy="0"/>
-        </a:xfrm>
-      </p:grpSpPr>
-      <p:sp>
-        <p:nvSpPr>
-          <p:cNvPr id="2" name="Title 1"/>
-          <p:cNvSpPr>
-            <a:spLocks noGrp="1"/>
-          </p:cNvSpPr>
-          <p:nvPr>
-            <p:ph type="title"/>
-          </p:nvPr>
-        </p:nvSpPr>
-        <p:spPr/>
-        <p:txBody>
-          <a:bodyPr/>
-          <a:lstStyle/>
-          <a:p>
-            <a:r>
-              <a:rPr lang="en-US"/>
-              <a:t>Click to edit Master title style</a:t>
-            </a:r>
-            <a:endParaRPr lang="en-US" dirty="0"/>
-          </a:p>
-        </p:txBody>
-      </p:sp>
-      <p:sp>
-        <p:nvSpPr>
-          <p:cNvPr id="7" name="Date Placeholder 2"/>
-          <p:cNvSpPr>
-            <a:spLocks noGrp="1"/>
-          </p:cNvSpPr>
-          <p:nvPr>
-            <p:ph type="dt" sz="half" idx="10"/>
-          </p:nvPr>
-        </p:nvSpPr>
-        <p:spPr/>
-        <p:txBody>
-          <a:bodyPr/>
-          <a:lstStyle/>
-          <a:p>
-            <a:fld id="{60135C24-EB33-6645-B51A-6348BD58F2AA}" type="datetimeFigureOut">
-              <a:rPr lang="en-US" smtClean="0"/>
-              <a:t>8/26/25</a:t>
-            </a:fld>
-            <a:endParaRPr lang="en-US"/>
-          </a:p>
-        </p:txBody>
-      </p:sp>
-      <p:sp>
-        <p:nvSpPr>
-          <p:cNvPr id="5" name="Footer Placeholder 3"/>
-          <p:cNvSpPr>
-            <a:spLocks noGrp="1"/>
-          </p:cNvSpPr>
-          <p:nvPr>
-            <p:ph type="ftr" sz="quarter" idx="11"/>
-          </p:nvPr>
-        </p:nvSpPr>
-        <p:spPr/>
-        <p:txBody>
-          <a:bodyPr/>
-          <a:lstStyle/>
-          <a:p>
-            <a:endParaRPr lang="en-US"/>
-          </a:p>
-        </p:txBody>
-      </p:sp>
-      <p:sp>
-        <p:nvSpPr>
-          <p:cNvPr id="6" name="Slide Number Placeholder 4"/>
-          <p:cNvSpPr>
-            <a:spLocks noGrp="1"/>
-          </p:cNvSpPr>
-          <p:nvPr>
-            <p:ph type="sldNum" sz="quarter" idx="12"/>
-          </p:nvPr>
-        </p:nvSpPr>
-        <p:spPr/>
-        <p:txBody>
-          <a:bodyPr/>
-          <a:lstStyle/>
-          <a:p>
-            <a:fld id="{292730AB-017E-7B48-BDF2-98302496DA1B}" type="slidenum">
-              <a:rPr lang="en-US" smtClean="0"/>
-              <a:t>‹#›</a:t>
-            </a:fld>
-            <a:endParaRPr lang="en-US"/>
-          </a:p>
-        </p:txBody>
-      </p:sp>
-    </p:spTree>
-    <p:extLst>
-      <p:ext uri="{BB962C8B-B14F-4D97-AF65-F5344CB8AC3E}">
-        <p14:creationId xmlns:p14="http://schemas.microsoft.com/office/powerpoint/2010/main" val="1399908261"/>
-      </p:ext>
-    </p:extLst>
-  </p:cSld>
-  <p:clrMapOvr>
-    <a:masterClrMapping/>
-  </p:clrMapOvr>
-</p:sldLayout>
-</file>
-
-<file path=ppt/slideLayouts/slideLayout7.xml><?xml version="1.0" encoding="utf-8"?>
-<p:sldLayout xmlns:a="http://schemas.openxmlformats.org/drawingml/2006/main" xmlns:r="http://schemas.openxmlformats.org/officeDocument/2006/relationships" xmlns:p="http://schemas.openxmlformats.org/presentationml/2006/main" type="blank" preserve="1">
-  <p:cSld name="Blank">
-    <p:spTree>
-      <p:nvGrpSpPr>
-        <p:cNvPr id="1" name=""/>
-        <p:cNvGrpSpPr/>
-        <p:nvPr/>
-      </p:nvGrpSpPr>
-      <p:grpSpPr>
-        <a:xfrm>
-          <a:off x="0" y="0"/>
-          <a:ext cx="0" cy="0"/>
-          <a:chOff x="0" y="0"/>
-          <a:chExt cx="0" cy="0"/>
-        </a:xfrm>
-      </p:grpSpPr>
-      <p:sp>
-        <p:nvSpPr>
-          <p:cNvPr id="7" name="Date Placeholder 1"/>
-          <p:cNvSpPr>
-            <a:spLocks noGrp="1"/>
-          </p:cNvSpPr>
-          <p:nvPr>
-            <p:ph type="dt" sz="half" idx="10"/>
-          </p:nvPr>
-        </p:nvSpPr>
-        <p:spPr/>
-        <p:txBody>
-          <a:bodyPr/>
-          <a:lstStyle/>
-          <a:p>
-            <a:fld id="{60135C24-EB33-6645-B51A-6348BD58F2AA}" type="datetimeFigureOut">
-              <a:rPr lang="en-US" smtClean="0"/>
-              <a:t>8/26/25</a:t>
-            </a:fld>
-            <a:endParaRPr lang="en-US"/>
-          </a:p>
-        </p:txBody>
-      </p:sp>
-      <p:sp>
-        <p:nvSpPr>
-          <p:cNvPr id="5" name="Footer Placeholder 2"/>
-          <p:cNvSpPr>
-            <a:spLocks noGrp="1"/>
-          </p:cNvSpPr>
-          <p:nvPr>
-            <p:ph type="ftr" sz="quarter" idx="11"/>
-          </p:nvPr>
-        </p:nvSpPr>
-        <p:spPr/>
-        <p:txBody>
-          <a:bodyPr/>
-          <a:lstStyle/>
-          <a:p>
-            <a:endParaRPr lang="en-US"/>
-          </a:p>
-        </p:txBody>
-      </p:sp>
-      <p:sp>
-        <p:nvSpPr>
-          <p:cNvPr id="6" name="Slide Number Placeholder 3"/>
-          <p:cNvSpPr>
-            <a:spLocks noGrp="1"/>
-          </p:cNvSpPr>
-          <p:nvPr>
-            <p:ph type="sldNum" sz="quarter" idx="12"/>
-          </p:nvPr>
-        </p:nvSpPr>
-        <p:spPr/>
-        <p:txBody>
-          <a:bodyPr/>
-          <a:lstStyle/>
-          <a:p>
-            <a:fld id="{292730AB-017E-7B48-BDF2-98302496DA1B}" type="slidenum">
-              <a:rPr lang="en-US" smtClean="0"/>
-              <a:t>‹#›</a:t>
-            </a:fld>
-            <a:endParaRPr lang="en-US"/>
-          </a:p>
-        </p:txBody>
-      </p:sp>
-    </p:spTree>
-    <p:extLst>
-      <p:ext uri="{BB962C8B-B14F-4D97-AF65-F5344CB8AC3E}">
-        <p14:creationId xmlns:p14="http://schemas.microsoft.com/office/powerpoint/2010/main" val="2218330549"/>
-      </p:ext>
-    </p:extLst>
-  </p:cSld>
-  <p:clrMapOvr>
-    <a:masterClrMapping/>
-  </p:clrMapOvr>
-</p:sldLayout>
-</file>
-
-<file path=ppt/slideLayouts/slideLayout8.xml><?xml version="1.0" encoding="utf-8"?>
-<p:sldLayout xmlns:a="http://schemas.openxmlformats.org/drawingml/2006/main" xmlns:r="http://schemas.openxmlformats.org/officeDocument/2006/relationships" xmlns:p="http://schemas.openxmlformats.org/presentationml/2006/main" type="objTx" preserve="1">
-  <p:cSld name="Content with Caption">
-    <p:spTree>
-      <p:nvGrpSpPr>
-        <p:cNvPr id="1" name=""/>
-        <p:cNvGrpSpPr/>
-        <p:nvPr/>
-      </p:nvGrpSpPr>
-      <p:grpSpPr>
-        <a:xfrm>
-          <a:off x="0" y="0"/>
-          <a:ext cx="0" cy="0"/>
-          <a:chOff x="0" y="0"/>
-          <a:chExt cx="0" cy="0"/>
-        </a:xfrm>
-      </p:grpSpPr>
-      <p:sp>
-        <p:nvSpPr>
-          <p:cNvPr id="2" name="Title 1"/>
-          <p:cNvSpPr>
-            <a:spLocks noGrp="1"/>
-          </p:cNvSpPr>
-          <p:nvPr>
-            <p:ph type="title"/>
-          </p:nvPr>
-        </p:nvSpPr>
-        <p:spPr>
-          <a:xfrm>
-            <a:off x="1154953" y="1447800"/>
-            <a:ext cx="3401064" cy="1447800"/>
-          </a:xfrm>
-        </p:spPr>
-        <p:txBody>
-          <a:bodyPr anchor="b"/>
-          <a:lstStyle>
-            <a:lvl1pPr algn="l">
-              <a:defRPr sz="2400" b="0"/>
-            </a:lvl1pPr>
-          </a:lstStyle>
-          <a:p>
-            <a:r>
-              <a:rPr lang="en-US"/>
-              <a:t>Click to edit Master title style</a:t>
-            </a:r>
-            <a:endParaRPr lang="en-US" dirty="0"/>
-          </a:p>
-        </p:txBody>
-      </p:sp>
-      <p:sp>
-        <p:nvSpPr>
-          <p:cNvPr id="3" name="Content Placeholder 2"/>
-          <p:cNvSpPr>
-            <a:spLocks noGrp="1"/>
-          </p:cNvSpPr>
-          <p:nvPr>
-            <p:ph idx="1"/>
-          </p:nvPr>
-        </p:nvSpPr>
-        <p:spPr>
-          <a:xfrm>
-            <a:off x="4784616" y="1447800"/>
-            <a:ext cx="5195997" cy="4572000"/>
-          </a:xfrm>
-        </p:spPr>
-        <p:txBody>
-          <a:bodyPr anchor="ctr">
-            <a:normAutofit/>
-          </a:bodyPr>
-          <a:lstStyle>
-            <a:lvl1pPr>
-              <a:defRPr sz="2000"/>
-            </a:lvl1pPr>
-            <a:lvl2pPr>
-              <a:defRPr sz="1800"/>
-            </a:lvl2pPr>
-            <a:lvl3pPr>
-              <a:defRPr sz="1600"/>
-            </a:lvl3pPr>
-            <a:lvl4pPr>
-              <a:defRPr sz="1400"/>
-            </a:lvl4pPr>
-            <a:lvl5pPr>
-              <a:defRPr sz="1400"/>
-            </a:lvl5pPr>
-            <a:lvl6pPr>
-              <a:defRPr sz="1400"/>
-            </a:lvl6pPr>
-            <a:lvl7pPr>
-              <a:defRPr sz="1400"/>
-            </a:lvl7pPr>
-            <a:lvl8pPr>
-              <a:defRPr sz="1400"/>
-            </a:lvl8pPr>
-            <a:lvl9pPr>
-              <a:defRPr sz="1400"/>
-            </a:lvl9pPr>
-          </a:lstStyle>
-          <a:p>
-            <a:pPr lvl="0"/>
-            <a:r>
-              <a:rPr lang="en-US"/>
-              <a:t>Click to edit Master text styles</a:t>
-            </a:r>
-          </a:p>
-          <a:p>
-            <a:pPr lvl="1"/>
-            <a:r>
-              <a:rPr lang="en-US"/>
-              <a:t>Second level</a:t>
-            </a:r>
-          </a:p>
-          <a:p>
-            <a:pPr lvl="2"/>
-            <a:r>
-              <a:rPr lang="en-US"/>
-              <a:t>Third level</a:t>
-            </a:r>
-          </a:p>
-          <a:p>
-            <a:pPr lvl="3"/>
-            <a:r>
-              <a:rPr lang="en-US"/>
-              <a:t>Fourth level</a:t>
-            </a:r>
-          </a:p>
-          <a:p>
-            <a:pPr lvl="4"/>
-            <a:r>
-              <a:rPr lang="en-US"/>
-              <a:t>Fifth level</a:t>
-            </a:r>
-            <a:endParaRPr lang="en-US" dirty="0"/>
-          </a:p>
-        </p:txBody>
-      </p:sp>
-      <p:sp>
-        <p:nvSpPr>
-          <p:cNvPr id="4" name="Text Placeholder 3"/>
-          <p:cNvSpPr>
-            <a:spLocks noGrp="1"/>
-          </p:cNvSpPr>
-          <p:nvPr>
-            <p:ph type="body" sz="half" idx="2"/>
-          </p:nvPr>
-        </p:nvSpPr>
-        <p:spPr>
-          <a:xfrm>
-            <a:off x="1154953" y="3129280"/>
-            <a:ext cx="3401063" cy="2895599"/>
-          </a:xfrm>
-        </p:spPr>
-        <p:txBody>
-          <a:bodyPr/>
-          <a:lstStyle>
-            <a:lvl1pPr marL="0" indent="0">
-              <a:buNone/>
-              <a:defRPr sz="1400"/>
-            </a:lvl1pPr>
-            <a:lvl2pPr marL="457200" indent="0">
-              <a:buNone/>
-              <a:defRPr sz="1200"/>
-            </a:lvl2pPr>
-            <a:lvl3pPr marL="914400" indent="0">
-              <a:buNone/>
-              <a:defRPr sz="1000"/>
-            </a:lvl3pPr>
-            <a:lvl4pPr marL="1371600" indent="0">
-              <a:buNone/>
-              <a:defRPr sz="900"/>
-            </a:lvl4pPr>
-            <a:lvl5pPr marL="1828800" indent="0">
-              <a:buNone/>
-              <a:defRPr sz="900"/>
-            </a:lvl5pPr>
-            <a:lvl6pPr marL="2286000" indent="0">
-              <a:buNone/>
-              <a:defRPr sz="900"/>
-            </a:lvl6pPr>
-            <a:lvl7pPr marL="2743200" indent="0">
-              <a:buNone/>
-              <a:defRPr sz="900"/>
-            </a:lvl7pPr>
-            <a:lvl8pPr marL="3200400" indent="0">
-              <a:buNone/>
-              <a:defRPr sz="900"/>
-            </a:lvl8pPr>
-            <a:lvl9pPr marL="3657600" indent="0">
-              <a:buNone/>
-              <a:defRPr sz="900"/>
-            </a:lvl9pPr>
-          </a:lstStyle>
-          <a:p>
-            <a:pPr lvl="0"/>
-            <a:r>
-              <a:rPr lang="en-US"/>
-              <a:t>Click to edit Master text styles</a:t>
-            </a:r>
-          </a:p>
-        </p:txBody>
-      </p:sp>
-      <p:sp>
-        <p:nvSpPr>
-          <p:cNvPr id="7" name="Date Placeholder 4"/>
-          <p:cNvSpPr>
-            <a:spLocks noGrp="1"/>
-          </p:cNvSpPr>
-          <p:nvPr>
-            <p:ph type="dt" sz="half" idx="10"/>
-          </p:nvPr>
-        </p:nvSpPr>
-        <p:spPr/>
-        <p:txBody>
-          <a:bodyPr/>
-          <a:lstStyle/>
-          <a:p>
-            <a:fld id="{60135C24-EB33-6645-B51A-6348BD58F2AA}" type="datetimeFigureOut">
-              <a:rPr lang="en-US" smtClean="0"/>
-              <a:t>8/26/25</a:t>
-            </a:fld>
-            <a:endParaRPr lang="en-US"/>
-          </a:p>
-        </p:txBody>
-      </p:sp>
-      <p:sp>
-        <p:nvSpPr>
-          <p:cNvPr id="5" name="Footer Placeholder 5"/>
-          <p:cNvSpPr>
-            <a:spLocks noGrp="1"/>
-          </p:cNvSpPr>
-          <p:nvPr>
-            <p:ph type="ftr" sz="quarter" idx="11"/>
-          </p:nvPr>
-        </p:nvSpPr>
-        <p:spPr/>
-        <p:txBody>
-          <a:bodyPr/>
-          <a:lstStyle/>
-          <a:p>
-            <a:endParaRPr lang="en-US"/>
-          </a:p>
-        </p:txBody>
-      </p:sp>
-      <p:sp>
-        <p:nvSpPr>
-          <p:cNvPr id="6" name="Slide Number Placeholder 6"/>
-          <p:cNvSpPr>
-            <a:spLocks noGrp="1"/>
-          </p:cNvSpPr>
-          <p:nvPr>
-            <p:ph type="sldNum" sz="quarter" idx="12"/>
-          </p:nvPr>
-        </p:nvSpPr>
-        <p:spPr/>
-        <p:txBody>
-          <a:bodyPr/>
-          <a:lstStyle/>
-          <a:p>
-            <a:fld id="{292730AB-017E-7B48-BDF2-98302496DA1B}" type="slidenum">
-              <a:rPr lang="en-US" smtClean="0"/>
-              <a:t>‹#›</a:t>
-            </a:fld>
-            <a:endParaRPr lang="en-US"/>
-          </a:p>
-        </p:txBody>
-      </p:sp>
-    </p:spTree>
-    <p:extLst>
-      <p:ext uri="{BB962C8B-B14F-4D97-AF65-F5344CB8AC3E}">
-        <p14:creationId xmlns:p14="http://schemas.microsoft.com/office/powerpoint/2010/main" val="371445298"/>
-      </p:ext>
-    </p:extLst>
-  </p:cSld>
-  <p:clrMapOvr>
-    <a:masterClrMapping/>
-  </p:clrMapOvr>
-</p:sldLayout>
-</file>
-
-<file path=ppt/slideLayouts/slideLayout9.xml><?xml version="1.0" encoding="utf-8"?>
-<p:sldLayout xmlns:a="http://schemas.openxmlformats.org/drawingml/2006/main" xmlns:r="http://schemas.openxmlformats.org/officeDocument/2006/relationships" xmlns:p="http://schemas.openxmlformats.org/presentationml/2006/main" type="picTx" preserve="1">
-  <p:cSld name="Picture with Caption">
-    <p:spTree>
-      <p:nvGrpSpPr>
-        <p:cNvPr id="1" name=""/>
-        <p:cNvGrpSpPr/>
-        <p:nvPr/>
-      </p:nvGrpSpPr>
-      <p:grpSpPr>
-        <a:xfrm>
-          <a:off x="0" y="0"/>
-          <a:ext cx="0" cy="0"/>
-          <a:chOff x="0" y="0"/>
-          <a:chExt cx="0" cy="0"/>
-        </a:xfrm>
-      </p:grpSpPr>
-      <p:sp>
-        <p:nvSpPr>
-          <p:cNvPr id="2" name="Title 1"/>
-          <p:cNvSpPr>
-            <a:spLocks noGrp="1"/>
-          </p:cNvSpPr>
-          <p:nvPr>
-            <p:ph type="title"/>
-          </p:nvPr>
-        </p:nvSpPr>
-        <p:spPr>
-          <a:xfrm>
-            <a:off x="1153907" y="1854192"/>
-            <a:ext cx="5092906" cy="1574808"/>
-          </a:xfrm>
-        </p:spPr>
-        <p:txBody>
-          <a:bodyPr anchor="b">
-            <a:normAutofit/>
-          </a:bodyPr>
-          <a:lstStyle>
-            <a:lvl1pPr algn="l">
-              <a:defRPr sz="3600" b="0"/>
-            </a:lvl1pPr>
-          </a:lstStyle>
-          <a:p>
-            <a:r>
-              <a:rPr lang="en-US"/>
-              <a:t>Click to edit Master title style</a:t>
-            </a:r>
-            <a:endParaRPr lang="en-US" dirty="0"/>
-          </a:p>
-        </p:txBody>
-      </p:sp>
-      <p:sp>
-        <p:nvSpPr>
-          <p:cNvPr id="3" name="Picture Placeholder 2"/>
-          <p:cNvSpPr>
-            <a:spLocks noGrp="1" noChangeAspect="1"/>
-          </p:cNvSpPr>
-          <p:nvPr>
-            <p:ph type="pic" idx="1"/>
-          </p:nvPr>
-        </p:nvSpPr>
-        <p:spPr>
-          <a:xfrm>
-            <a:off x="6949546" y="1143000"/>
-            <a:ext cx="3200400" cy="4572000"/>
-          </a:xfrm>
-          <a:prstGeom prst="roundRect">
-            <a:avLst>
-              <a:gd name="adj" fmla="val 1858"/>
-            </a:avLst>
-          </a:prstGeom>
-          <a:effectLst>
-            <a:outerShdw blurRad="50800" dist="50800" dir="5400000" algn="tl" rotWithShape="0">
-              <a:srgbClr val="000000">
-                <a:alpha val="43000"/>
-              </a:srgbClr>
-            </a:outerShdw>
-          </a:effectLst>
-        </p:spPr>
-        <p:txBody>
-          <a:bodyPr anchor="t">
-            <a:normAutofit/>
-          </a:bodyPr>
-          <a:lstStyle>
-            <a:lvl1pPr marL="0" indent="0" algn="ctr">
-              <a:buNone/>
-              <a:defRPr sz="1600"/>
-            </a:lvl1pPr>
-            <a:lvl2pPr marL="457200" indent="0">
-              <a:buNone/>
-              <a:defRPr sz="1600"/>
-            </a:lvl2pPr>
-            <a:lvl3pPr marL="914400" indent="0">
-              <a:buNone/>
-              <a:defRPr sz="1600"/>
-            </a:lvl3pPr>
-            <a:lvl4pPr marL="1371600" indent="0">
-              <a:buNone/>
-              <a:defRPr sz="1600"/>
-            </a:lvl4pPr>
-            <a:lvl5pPr marL="1828800" indent="0">
-              <a:buNone/>
-              <a:defRPr sz="1600"/>
-            </a:lvl5pPr>
-            <a:lvl6pPr marL="2286000" indent="0">
-              <a:buNone/>
-              <a:defRPr sz="1600"/>
-            </a:lvl6pPr>
-            <a:lvl7pPr marL="2743200" indent="0">
-              <a:buNone/>
-              <a:defRPr sz="1600"/>
-            </a:lvl7pPr>
-            <a:lvl8pPr marL="3200400" indent="0">
-              <a:buNone/>
-              <a:defRPr sz="1600"/>
-            </a:lvl8pPr>
-            <a:lvl9pPr marL="3657600" indent="0">
-              <a:buNone/>
-              <a:defRPr sz="1600"/>
-            </a:lvl9pPr>
-          </a:lstStyle>
-          <a:p>
-            <a:r>
-              <a:rPr lang="en-US"/>
-              <a:t>Click icon to add picture</a:t>
-            </a:r>
-            <a:endParaRPr lang="en-US" dirty="0"/>
-          </a:p>
-        </p:txBody>
-      </p:sp>
-      <p:sp>
-        <p:nvSpPr>
-          <p:cNvPr id="4" name="Text Placeholder 3"/>
-          <p:cNvSpPr>
-            <a:spLocks noGrp="1"/>
-          </p:cNvSpPr>
-          <p:nvPr>
-            <p:ph type="body" sz="half" idx="2"/>
-          </p:nvPr>
-        </p:nvSpPr>
-        <p:spPr>
-          <a:xfrm>
-            <a:off x="1154954" y="3657600"/>
-            <a:ext cx="5084979" cy="1371600"/>
-          </a:xfrm>
-        </p:spPr>
-        <p:txBody>
-          <a:bodyPr>
-            <a:normAutofit/>
-          </a:bodyPr>
-          <a:lstStyle>
-            <a:lvl1pPr marL="0" indent="0">
-              <a:buNone/>
-              <a:defRPr sz="1400"/>
-            </a:lvl1pPr>
-            <a:lvl2pPr marL="457200" indent="0">
-              <a:buNone/>
-              <a:defRPr sz="1200"/>
-            </a:lvl2pPr>
-            <a:lvl3pPr marL="914400" indent="0">
-              <a:buNone/>
-              <a:defRPr sz="1000"/>
-            </a:lvl3pPr>
-            <a:lvl4pPr marL="1371600" indent="0">
-              <a:buNone/>
-              <a:defRPr sz="900"/>
-            </a:lvl4pPr>
-            <a:lvl5pPr marL="1828800" indent="0">
-              <a:buNone/>
-              <a:defRPr sz="900"/>
-            </a:lvl5pPr>
-            <a:lvl6pPr marL="2286000" indent="0">
-              <a:buNone/>
-              <a:defRPr sz="900"/>
-            </a:lvl6pPr>
-            <a:lvl7pPr marL="2743200" indent="0">
-              <a:buNone/>
-              <a:defRPr sz="900"/>
-            </a:lvl7pPr>
-            <a:lvl8pPr marL="3200400" indent="0">
-              <a:buNone/>
-              <a:defRPr sz="900"/>
-            </a:lvl8pPr>
-            <a:lvl9pPr marL="3657600" indent="0">
-              <a:buNone/>
-              <a:defRPr sz="900"/>
-            </a:lvl9pPr>
-          </a:lstStyle>
-          <a:p>
-            <a:pPr lvl="0"/>
-            <a:r>
-              <a:rPr lang="en-US"/>
-              <a:t>Click to edit Master text styles</a:t>
-            </a:r>
-          </a:p>
-        </p:txBody>
-      </p:sp>
-      <p:sp>
-        <p:nvSpPr>
-          <p:cNvPr id="5" name="Date Placeholder 4"/>
-          <p:cNvSpPr>
-            <a:spLocks noGrp="1"/>
-          </p:cNvSpPr>
-          <p:nvPr>
-            <p:ph type="dt" sz="half" idx="10"/>
-          </p:nvPr>
-        </p:nvSpPr>
-        <p:spPr/>
-        <p:txBody>
-          <a:bodyPr/>
-          <a:lstStyle/>
-          <a:p>
-            <a:fld id="{60135C24-EB33-6645-B51A-6348BD58F2AA}" type="datetimeFigureOut">
-              <a:rPr lang="en-US" smtClean="0"/>
-              <a:t>8/26/25</a:t>
-            </a:fld>
-            <a:endParaRPr lang="en-US"/>
-          </a:p>
-        </p:txBody>
-      </p:sp>
-      <p:sp>
-        <p:nvSpPr>
-          <p:cNvPr id="6" name="Footer Placeholder 5"/>
-          <p:cNvSpPr>
-            <a:spLocks noGrp="1"/>
-          </p:cNvSpPr>
-          <p:nvPr>
-            <p:ph type="ftr" sz="quarter" idx="11"/>
-          </p:nvPr>
-        </p:nvSpPr>
-        <p:spPr/>
-        <p:txBody>
-          <a:bodyPr/>
-          <a:lstStyle/>
-          <a:p>
-            <a:endParaRPr lang="en-US"/>
-          </a:p>
-        </p:txBody>
-      </p:sp>
-      <p:sp>
-        <p:nvSpPr>
-          <p:cNvPr id="7" name="Slide Number Placeholder 6"/>
-          <p:cNvSpPr>
-            <a:spLocks noGrp="1"/>
-          </p:cNvSpPr>
-          <p:nvPr>
-            <p:ph type="sldNum" sz="quarter" idx="12"/>
-          </p:nvPr>
-        </p:nvSpPr>
-        <p:spPr/>
-        <p:txBody>
-          <a:bodyPr/>
-          <a:lstStyle/>
-          <a:p>
-            <a:fld id="{292730AB-017E-7B48-BDF2-98302496DA1B}" type="slidenum">
-              <a:rPr lang="en-US" smtClean="0"/>
-              <a:t>‹#›</a:t>
-            </a:fld>
-            <a:endParaRPr lang="en-US"/>
-          </a:p>
-        </p:txBody>
-      </p:sp>
-    </p:spTree>
-    <p:extLst>
-      <p:ext uri="{BB962C8B-B14F-4D97-AF65-F5344CB8AC3E}">
-        <p14:creationId xmlns:p14="http://schemas.microsoft.com/office/powerpoint/2010/main" val="3745621846"/>
+        <p14:creationId xmlns:p14="http://schemas.microsoft.com/office/powerpoint/2010/main" val="1115015391"/>
       </p:ext>
     </p:extLst>
   </p:cSld>
@@ -6232,8 +4113,8 @@
 <p:sldMaster xmlns:a="http://schemas.openxmlformats.org/drawingml/2006/main" xmlns:r="http://schemas.openxmlformats.org/officeDocument/2006/relationships" xmlns:p="http://schemas.openxmlformats.org/presentationml/2006/main">
   <p:cSld>
     <p:bg>
-      <p:bgRef idx="1003">
-        <a:schemeClr val="bg2"/>
+      <p:bgRef idx="1001">
+        <a:schemeClr val="bg1"/>
       </p:bgRef>
     </p:bg>
     <p:spTree>
@@ -6250,120 +4131,37 @@
           <a:chExt cx="0" cy="0"/>
         </a:xfrm>
       </p:grpSpPr>
-      <p:pic>
-        <p:nvPicPr>
-          <p:cNvPr id="8" name="Picture 7"/>
-          <p:cNvPicPr>
-            <a:picLocks noChangeAspect="1"/>
-          </p:cNvPicPr>
+      <p:sp>
+        <p:nvSpPr>
+          <p:cNvPr id="7" name="Rectangle 6"/>
+          <p:cNvSpPr/>
           <p:nvPr/>
-        </p:nvPicPr>
-        <p:blipFill rotWithShape="1">
-          <a:blip r:embed="rId19">
-            <a:extLst>
-              <a:ext uri="{28A0092B-C50C-407E-A947-70E740481C1C}">
-                <a14:useLocalDpi xmlns:a14="http://schemas.microsoft.com/office/drawing/2010/main" val="0"/>
-              </a:ext>
-            </a:extLst>
-          </a:blip>
-          <a:srcRect l="3613"/>
-          <a:stretch/>
-        </p:blipFill>
+        </p:nvSpPr>
         <p:spPr>
           <a:xfrm>
-            <a:off x="0" y="2669685"/>
-            <a:ext cx="4037012" cy="4188315"/>
+            <a:off x="1" y="6400800"/>
+            <a:ext cx="12192000" cy="457200"/>
           </a:xfrm>
           <a:prstGeom prst="rect">
             <a:avLst/>
           </a:prstGeom>
-        </p:spPr>
-      </p:pic>
-      <p:pic>
-        <p:nvPicPr>
-          <p:cNvPr id="7" name="Picture 6"/>
-          <p:cNvPicPr>
-            <a:picLocks noChangeAspect="1"/>
-          </p:cNvPicPr>
-          <p:nvPr/>
-        </p:nvPicPr>
-        <p:blipFill rotWithShape="1">
-          <a:blip r:embed="rId20">
-            <a:extLst>
-              <a:ext uri="{28A0092B-C50C-407E-A947-70E740481C1C}">
-                <a14:useLocalDpi xmlns:a14="http://schemas.microsoft.com/office/drawing/2010/main" val="0"/>
-              </a:ext>
-            </a:extLst>
-          </a:blip>
-          <a:srcRect l="35640"/>
-          <a:stretch/>
-        </p:blipFill>
-        <p:spPr>
-          <a:xfrm>
-            <a:off x="0" y="2892347"/>
-            <a:ext cx="1522412" cy="2365453"/>
-          </a:xfrm>
-          <a:prstGeom prst="rect">
-            <a:avLst/>
-          </a:prstGeom>
-        </p:spPr>
-      </p:pic>
-      <p:sp>
-        <p:nvSpPr>
-          <p:cNvPr id="16" name="Oval 15"/>
-          <p:cNvSpPr/>
-          <p:nvPr/>
-        </p:nvSpPr>
-        <p:spPr>
-          <a:xfrm>
-            <a:off x="8609012" y="1676400"/>
-            <a:ext cx="2819400" cy="2819400"/>
-          </a:xfrm>
-          <a:prstGeom prst="ellipse">
-            <a:avLst/>
-          </a:prstGeom>
-          <a:gradFill flip="none" rotWithShape="1">
-            <a:gsLst>
-              <a:gs pos="0">
-                <a:schemeClr val="bg2">
-                  <a:lumMod val="60000"/>
-                  <a:lumOff val="40000"/>
-                  <a:alpha val="7000"/>
-                </a:schemeClr>
-              </a:gs>
-              <a:gs pos="69000">
-                <a:schemeClr val="bg2">
-                  <a:lumMod val="60000"/>
-                  <a:lumOff val="40000"/>
-                  <a:alpha val="0"/>
-                </a:schemeClr>
-              </a:gs>
-              <a:gs pos="36000">
-                <a:schemeClr val="bg2">
-                  <a:lumMod val="60000"/>
-                  <a:lumOff val="40000"/>
-                  <a:alpha val="6000"/>
-                </a:schemeClr>
-              </a:gs>
-            </a:gsLst>
-            <a:path path="circle">
-              <a:fillToRect l="50000" t="50000" r="50000" b="50000"/>
-            </a:path>
-            <a:tileRect/>
-          </a:gradFill>
+          <a:solidFill>
+            <a:schemeClr val="accent2"/>
+          </a:solidFill>
           <a:ln>
             <a:noFill/>
           </a:ln>
-          <a:effectLst/>
         </p:spPr>
         <p:style>
-          <a:lnRef idx="1">
-            <a:schemeClr val="accent1"/>
+          <a:lnRef idx="2">
+            <a:schemeClr val="accent1">
+              <a:shade val="50000"/>
+            </a:schemeClr>
           </a:lnRef>
-          <a:fillRef idx="3">
+          <a:fillRef idx="1">
             <a:schemeClr val="accent1"/>
           </a:fillRef>
-          <a:effectRef idx="2">
+          <a:effectRef idx="0">
             <a:schemeClr val="accent1"/>
           </a:effectRef>
           <a:fontRef idx="minor">
@@ -6371,74 +4169,16 @@
           </a:fontRef>
         </p:style>
       </p:sp>
-      <p:pic>
-        <p:nvPicPr>
-          <p:cNvPr id="9" name="Picture 8"/>
-          <p:cNvPicPr>
-            <a:picLocks noChangeAspect="1"/>
-          </p:cNvPicPr>
+      <p:sp>
+        <p:nvSpPr>
+          <p:cNvPr id="9" name="Rectangle 8"/>
+          <p:cNvSpPr/>
           <p:nvPr/>
-        </p:nvPicPr>
-        <p:blipFill rotWithShape="1">
-          <a:blip r:embed="rId21">
-            <a:extLst>
-              <a:ext uri="{28A0092B-C50C-407E-A947-70E740481C1C}">
-                <a14:useLocalDpi xmlns:a14="http://schemas.microsoft.com/office/drawing/2010/main" val="0"/>
-              </a:ext>
-            </a:extLst>
-          </a:blip>
-          <a:srcRect t="28813"/>
-          <a:stretch/>
-        </p:blipFill>
+        </p:nvSpPr>
         <p:spPr>
           <a:xfrm>
-            <a:off x="7999412" y="0"/>
-            <a:ext cx="1603387" cy="1141407"/>
-          </a:xfrm>
-          <a:prstGeom prst="rect">
-            <a:avLst/>
-          </a:prstGeom>
-        </p:spPr>
-      </p:pic>
-      <p:pic>
-        <p:nvPicPr>
-          <p:cNvPr id="10" name="Picture 9"/>
-          <p:cNvPicPr>
-            <a:picLocks noChangeAspect="1"/>
-          </p:cNvPicPr>
-          <p:nvPr/>
-        </p:nvPicPr>
-        <p:blipFill rotWithShape="1">
-          <a:blip r:embed="rId22">
-            <a:extLst>
-              <a:ext uri="{28A0092B-C50C-407E-A947-70E740481C1C}">
-                <a14:useLocalDpi xmlns:a14="http://schemas.microsoft.com/office/drawing/2010/main" val="0"/>
-              </a:ext>
-            </a:extLst>
-          </a:blip>
-          <a:srcRect b="23320"/>
-          <a:stretch/>
-        </p:blipFill>
-        <p:spPr>
-          <a:xfrm>
-            <a:off x="8605878" y="6096000"/>
-            <a:ext cx="993734" cy="762000"/>
-          </a:xfrm>
-          <a:prstGeom prst="rect">
-            <a:avLst/>
-          </a:prstGeom>
-        </p:spPr>
-      </p:pic>
-      <p:sp>
-        <p:nvSpPr>
-          <p:cNvPr id="14" name="Rectangle 13"/>
-          <p:cNvSpPr/>
-          <p:nvPr/>
-        </p:nvSpPr>
-        <p:spPr>
-          <a:xfrm>
-            <a:off x="10437812" y="0"/>
-            <a:ext cx="685800" cy="1143000"/>
+            <a:off x="0" y="6334316"/>
+            <a:ext cx="12192001" cy="65998"/>
           </a:xfrm>
           <a:prstGeom prst="rect">
             <a:avLst/>
@@ -6451,13 +4191,15 @@
           </a:ln>
         </p:spPr>
         <p:style>
-          <a:lnRef idx="1">
-            <a:schemeClr val="accent1"/>
+          <a:lnRef idx="2">
+            <a:schemeClr val="accent1">
+              <a:shade val="50000"/>
+            </a:schemeClr>
           </a:lnRef>
-          <a:fillRef idx="3">
+          <a:fillRef idx="1">
             <a:schemeClr val="accent1"/>
           </a:fillRef>
-          <a:effectRef idx="2">
+          <a:effectRef idx="0">
             <a:schemeClr val="accent1"/>
           </a:effectRef>
           <a:fontRef idx="minor">
@@ -6477,24 +4219,23 @@
         </p:nvSpPr>
         <p:spPr>
           <a:xfrm>
-            <a:off x="646111" y="452718"/>
-            <a:ext cx="9404723" cy="1400530"/>
+            <a:off x="1097280" y="286603"/>
+            <a:ext cx="10058400" cy="1450757"/>
           </a:xfrm>
           <a:prstGeom prst="rect">
             <a:avLst/>
           </a:prstGeom>
         </p:spPr>
         <p:txBody>
-          <a:bodyPr vert="horz" lIns="91440" tIns="45720" rIns="91440" bIns="45720" rtlCol="0" anchor="t">
-            <a:noAutofit/>
+          <a:bodyPr vert="horz" lIns="91440" tIns="45720" rIns="91440" bIns="45720" rtlCol="0" anchor="b">
+            <a:normAutofit/>
           </a:bodyPr>
           <a:lstStyle/>
           <a:p>
             <a:r>
-              <a:rPr lang="en-US"/>
+              <a:rPr lang="en-US" dirty="0"/>
               <a:t>Click to edit Master title style</a:t>
             </a:r>
-            <a:endParaRPr lang="en-US" dirty="0"/>
           </a:p>
         </p:txBody>
       </p:sp>
@@ -6510,15 +4251,15 @@
         </p:nvSpPr>
         <p:spPr>
           <a:xfrm>
-            <a:off x="1103312" y="2052918"/>
-            <a:ext cx="8946541" cy="4195481"/>
+            <a:off x="1097280" y="1845734"/>
+            <a:ext cx="10058400" cy="4023360"/>
           </a:xfrm>
           <a:prstGeom prst="rect">
             <a:avLst/>
           </a:prstGeom>
         </p:spPr>
         <p:txBody>
-          <a:bodyPr vert="horz" lIns="91440" tIns="45720" rIns="91440" bIns="45720" rtlCol="0">
+          <a:bodyPr vert="horz" lIns="0" tIns="45720" rIns="0" bIns="45720" rtlCol="0">
             <a:normAutofit/>
           </a:bodyPr>
           <a:lstStyle/>
@@ -6571,24 +4312,21 @@
           </p:nvPr>
         </p:nvSpPr>
         <p:spPr>
-          <a:xfrm rot="5400000">
-            <a:off x="10155639" y="1790701"/>
-            <a:ext cx="990599" cy="304799"/>
+          <a:xfrm>
+            <a:off x="1097280" y="6459785"/>
+            <a:ext cx="2472271" cy="365125"/>
           </a:xfrm>
           <a:prstGeom prst="rect">
             <a:avLst/>
           </a:prstGeom>
         </p:spPr>
         <p:txBody>
-          <a:bodyPr vert="horz" lIns="91440" tIns="45720" rIns="91440" bIns="45720" rtlCol="0" anchor="t"/>
+          <a:bodyPr vert="horz" lIns="91440" tIns="45720" rIns="91440" bIns="45720" rtlCol="0" anchor="ctr"/>
           <a:lstStyle>
             <a:lvl1pPr algn="l">
-              <a:defRPr sz="1100" b="0" i="0">
+              <a:defRPr sz="900">
                 <a:solidFill>
-                  <a:schemeClr val="tx1">
-                    <a:tint val="75000"/>
-                    <a:alpha val="60000"/>
-                  </a:schemeClr>
+                  <a:srgbClr val="FFFFFF"/>
                 </a:solidFill>
               </a:defRPr>
             </a:lvl1pPr>
@@ -6596,7 +4334,7 @@
           <a:p>
             <a:fld id="{60135C24-EB33-6645-B51A-6348BD58F2AA}" type="datetimeFigureOut">
               <a:rPr lang="en-US" smtClean="0"/>
-              <a:t>8/26/25</a:t>
+              <a:t>8/3/2026</a:t>
             </a:fld>
             <a:endParaRPr lang="en-US"/>
           </a:p>
@@ -6613,24 +4351,21 @@
           </p:nvPr>
         </p:nvSpPr>
         <p:spPr>
-          <a:xfrm rot="5400000">
-            <a:off x="8951573" y="3225297"/>
-            <a:ext cx="3859795" cy="304801"/>
+          <a:xfrm>
+            <a:off x="3686185" y="6459785"/>
+            <a:ext cx="4822804" cy="365125"/>
           </a:xfrm>
           <a:prstGeom prst="rect">
             <a:avLst/>
           </a:prstGeom>
         </p:spPr>
         <p:txBody>
-          <a:bodyPr vert="horz" lIns="91440" tIns="45720" rIns="91440" bIns="45720" rtlCol="0" anchor="b"/>
+          <a:bodyPr vert="horz" lIns="91440" tIns="45720" rIns="91440" bIns="45720" rtlCol="0" anchor="ctr"/>
           <a:lstStyle>
-            <a:lvl1pPr algn="l">
-              <a:defRPr sz="1100" b="0" i="0">
+            <a:lvl1pPr algn="ctr">
+              <a:defRPr sz="900" cap="all" baseline="0">
                 <a:solidFill>
-                  <a:schemeClr val="tx1">
-                    <a:tint val="75000"/>
-                    <a:alpha val="60000"/>
-                  </a:schemeClr>
+                  <a:srgbClr val="FFFFFF"/>
                 </a:solidFill>
               </a:defRPr>
             </a:lvl1pPr>
@@ -6650,24 +4385,22 @@
             <p:ph type="sldNum" sz="quarter" idx="4"/>
           </p:nvPr>
         </p:nvSpPr>
-        <p:spPr bwMode="gray">
+        <p:spPr>
           <a:xfrm>
-            <a:off x="10352540" y="295729"/>
-            <a:ext cx="838199" cy="767687"/>
+            <a:off x="9900458" y="6459785"/>
+            <a:ext cx="1312025" cy="365125"/>
           </a:xfrm>
           <a:prstGeom prst="rect">
             <a:avLst/>
           </a:prstGeom>
         </p:spPr>
         <p:txBody>
-          <a:bodyPr vert="horz" lIns="91440" tIns="45720" rIns="91440" bIns="45720" rtlCol="0" anchor="b"/>
+          <a:bodyPr vert="horz" lIns="91440" tIns="45720" rIns="91440" bIns="45720" rtlCol="0" anchor="ctr"/>
           <a:lstStyle>
-            <a:lvl1pPr algn="ctr">
-              <a:defRPr sz="2800" b="0" i="0">
+            <a:lvl1pPr algn="r">
+              <a:defRPr sz="1050">
                 <a:solidFill>
-                  <a:schemeClr val="tx1">
-                    <a:tint val="75000"/>
-                  </a:schemeClr>
+                  <a:srgbClr val="FFFFFF"/>
                 </a:solidFill>
               </a:defRPr>
             </a:lvl1pPr>
@@ -6681,330 +4414,331 @@
           </a:p>
         </p:txBody>
       </p:sp>
+      <p:cxnSp>
+        <p:nvCxnSpPr>
+          <p:cNvPr id="10" name="Straight Connector 9"/>
+          <p:cNvCxnSpPr/>
+          <p:nvPr/>
+        </p:nvCxnSpPr>
+        <p:spPr>
+          <a:xfrm>
+            <a:off x="1193532" y="1737845"/>
+            <a:ext cx="9966960" cy="0"/>
+          </a:xfrm>
+          <a:prstGeom prst="line">
+            <a:avLst/>
+          </a:prstGeom>
+          <a:ln w="6350">
+            <a:solidFill>
+              <a:schemeClr val="tx1">
+                <a:lumMod val="50000"/>
+                <a:lumOff val="50000"/>
+              </a:schemeClr>
+            </a:solidFill>
+          </a:ln>
+        </p:spPr>
+        <p:style>
+          <a:lnRef idx="1">
+            <a:schemeClr val="accent1"/>
+          </a:lnRef>
+          <a:fillRef idx="0">
+            <a:schemeClr val="accent1"/>
+          </a:fillRef>
+          <a:effectRef idx="0">
+            <a:schemeClr val="accent1"/>
+          </a:effectRef>
+          <a:fontRef idx="minor">
+            <a:schemeClr val="tx1"/>
+          </a:fontRef>
+        </p:style>
+      </p:cxnSp>
     </p:spTree>
     <p:extLst>
       <p:ext uri="{BB962C8B-B14F-4D97-AF65-F5344CB8AC3E}">
-        <p14:creationId xmlns:p14="http://schemas.microsoft.com/office/powerpoint/2010/main" val="2982794753"/>
+        <p14:creationId xmlns:p14="http://schemas.microsoft.com/office/powerpoint/2010/main" val="4148007214"/>
       </p:ext>
     </p:extLst>
   </p:cSld>
-  <p:clrMap bg1="dk1" tx1="lt1" bg2="dk2" tx2="lt2" accent1="accent1" accent2="accent2" accent3="accent3" accent4="accent4" accent5="accent5" accent6="accent6" hlink="hlink" folHlink="folHlink"/>
+  <p:clrMap bg1="lt1" tx1="dk1" bg2="lt2" tx2="dk2" accent1="accent1" accent2="accent2" accent3="accent3" accent4="accent4" accent5="accent5" accent6="accent6" hlink="hlink" folHlink="folHlink"/>
   <p:sldLayoutIdLst>
-    <p:sldLayoutId id="2147483691" r:id="rId1"/>
-    <p:sldLayoutId id="2147483692" r:id="rId2"/>
-    <p:sldLayoutId id="2147483693" r:id="rId3"/>
-    <p:sldLayoutId id="2147483694" r:id="rId4"/>
-    <p:sldLayoutId id="2147483695" r:id="rId5"/>
-    <p:sldLayoutId id="2147483696" r:id="rId6"/>
-    <p:sldLayoutId id="2147483697" r:id="rId7"/>
-    <p:sldLayoutId id="2147483698" r:id="rId8"/>
-    <p:sldLayoutId id="2147483699" r:id="rId9"/>
-    <p:sldLayoutId id="2147483700" r:id="rId10"/>
-    <p:sldLayoutId id="2147483701" r:id="rId11"/>
-    <p:sldLayoutId id="2147483702" r:id="rId12"/>
-    <p:sldLayoutId id="2147483703" r:id="rId13"/>
-    <p:sldLayoutId id="2147483704" r:id="rId14"/>
-    <p:sldLayoutId id="2147483705" r:id="rId15"/>
-    <p:sldLayoutId id="2147483706" r:id="rId16"/>
-    <p:sldLayoutId id="2147483707" r:id="rId17"/>
+    <p:sldLayoutId id="2147483733" r:id="rId1"/>
+    <p:sldLayoutId id="2147483734" r:id="rId2"/>
+    <p:sldLayoutId id="2147483735" r:id="rId3"/>
+    <p:sldLayoutId id="2147483736" r:id="rId4"/>
+    <p:sldLayoutId id="2147483737" r:id="rId5"/>
+    <p:sldLayoutId id="2147483738" r:id="rId6"/>
+    <p:sldLayoutId id="2147483739" r:id="rId7"/>
+    <p:sldLayoutId id="2147483740" r:id="rId8"/>
+    <p:sldLayoutId id="2147483741" r:id="rId9"/>
+    <p:sldLayoutId id="2147483742" r:id="rId10"/>
+    <p:sldLayoutId id="2147483743" r:id="rId11"/>
   </p:sldLayoutIdLst>
   <p:txStyles>
     <p:titleStyle>
-      <a:lvl1pPr algn="l" defTabSz="457200" rtl="0" eaLnBrk="1" latinLnBrk="0" hangingPunct="1">
+      <a:lvl1pPr algn="l" defTabSz="914400" rtl="0" eaLnBrk="1" latinLnBrk="0" hangingPunct="1">
+        <a:lnSpc>
+          <a:spcPct val="85000"/>
+        </a:lnSpc>
         <a:spcBef>
           <a:spcPct val="0"/>
         </a:spcBef>
         <a:buNone/>
-        <a:defRPr sz="4200" b="0" i="0" kern="1200">
+        <a:defRPr sz="4800" kern="1200" spc="-50" baseline="0">
           <a:solidFill>
-            <a:schemeClr val="tx2"/>
+            <a:schemeClr val="tx1">
+              <a:lumMod val="75000"/>
+              <a:lumOff val="25000"/>
+            </a:schemeClr>
           </a:solidFill>
-          <a:latin typeface="+mj-lt"/>
+          <a:latin typeface="Caladea" panose="02040503050406030204" pitchFamily="18" charset="0"/>
           <a:ea typeface="+mj-ea"/>
           <a:cs typeface="+mj-cs"/>
         </a:defRPr>
       </a:lvl1pPr>
-      <a:lvl2pPr eaLnBrk="1" hangingPunct="1">
-        <a:defRPr>
+    </p:titleStyle>
+    <p:bodyStyle>
+      <a:lvl1pPr marL="91440" indent="-91440" algn="l" defTabSz="914400" rtl="0" eaLnBrk="1" latinLnBrk="0" hangingPunct="1">
+        <a:lnSpc>
+          <a:spcPct val="90000"/>
+        </a:lnSpc>
+        <a:spcBef>
+          <a:spcPts val="1200"/>
+        </a:spcBef>
+        <a:spcAft>
+          <a:spcPts val="200"/>
+        </a:spcAft>
+        <a:buClr>
+          <a:schemeClr val="accent1"/>
+        </a:buClr>
+        <a:buSzPct val="100000"/>
+        <a:buFont typeface="Calibri" panose="020F0502020204030204" pitchFamily="34" charset="0"/>
+        <a:buChar char=" "/>
+        <a:defRPr sz="2000" kern="1200">
           <a:solidFill>
-            <a:schemeClr val="tx2"/>
+            <a:schemeClr val="tx1">
+              <a:lumMod val="75000"/>
+              <a:lumOff val="25000"/>
+            </a:schemeClr>
           </a:solidFill>
+          <a:latin typeface="+mn-lt"/>
+          <a:ea typeface="+mn-ea"/>
+          <a:cs typeface="+mn-cs"/>
+        </a:defRPr>
+      </a:lvl1pPr>
+      <a:lvl2pPr marL="384048" indent="-182880" algn="l" defTabSz="914400" rtl="0" eaLnBrk="1" latinLnBrk="0" hangingPunct="1">
+        <a:lnSpc>
+          <a:spcPct val="90000"/>
+        </a:lnSpc>
+        <a:spcBef>
+          <a:spcPts val="200"/>
+        </a:spcBef>
+        <a:spcAft>
+          <a:spcPts val="400"/>
+        </a:spcAft>
+        <a:buClr>
+          <a:schemeClr val="accent1"/>
+        </a:buClr>
+        <a:buFont typeface="Calibri" pitchFamily="34" charset="0"/>
+        <a:buChar char="◦"/>
+        <a:defRPr sz="1800" kern="1200">
+          <a:solidFill>
+            <a:schemeClr val="tx1">
+              <a:lumMod val="75000"/>
+              <a:lumOff val="25000"/>
+            </a:schemeClr>
+          </a:solidFill>
+          <a:latin typeface="+mn-lt"/>
+          <a:ea typeface="+mn-ea"/>
+          <a:cs typeface="+mn-cs"/>
         </a:defRPr>
       </a:lvl2pPr>
-      <a:lvl3pPr eaLnBrk="1" hangingPunct="1">
-        <a:defRPr>
+      <a:lvl3pPr marL="566928" indent="-182880" algn="l" defTabSz="914400" rtl="0" eaLnBrk="1" latinLnBrk="0" hangingPunct="1">
+        <a:lnSpc>
+          <a:spcPct val="90000"/>
+        </a:lnSpc>
+        <a:spcBef>
+          <a:spcPts val="200"/>
+        </a:spcBef>
+        <a:spcAft>
+          <a:spcPts val="400"/>
+        </a:spcAft>
+        <a:buClr>
+          <a:schemeClr val="accent1"/>
+        </a:buClr>
+        <a:buFont typeface="Calibri" pitchFamily="34" charset="0"/>
+        <a:buChar char="◦"/>
+        <a:defRPr sz="1400" kern="1200">
           <a:solidFill>
-            <a:schemeClr val="tx2"/>
+            <a:schemeClr val="tx1">
+              <a:lumMod val="75000"/>
+              <a:lumOff val="25000"/>
+            </a:schemeClr>
           </a:solidFill>
+          <a:latin typeface="+mn-lt"/>
+          <a:ea typeface="+mn-ea"/>
+          <a:cs typeface="+mn-cs"/>
         </a:defRPr>
       </a:lvl3pPr>
-      <a:lvl4pPr eaLnBrk="1" hangingPunct="1">
-        <a:defRPr>
+      <a:lvl4pPr marL="749808" indent="-182880" algn="l" defTabSz="914400" rtl="0" eaLnBrk="1" latinLnBrk="0" hangingPunct="1">
+        <a:lnSpc>
+          <a:spcPct val="90000"/>
+        </a:lnSpc>
+        <a:spcBef>
+          <a:spcPts val="200"/>
+        </a:spcBef>
+        <a:spcAft>
+          <a:spcPts val="400"/>
+        </a:spcAft>
+        <a:buClr>
+          <a:schemeClr val="accent1"/>
+        </a:buClr>
+        <a:buFont typeface="Calibri" pitchFamily="34" charset="0"/>
+        <a:buChar char="◦"/>
+        <a:defRPr sz="1400" kern="1200">
           <a:solidFill>
-            <a:schemeClr val="tx2"/>
+            <a:schemeClr val="tx1">
+              <a:lumMod val="75000"/>
+              <a:lumOff val="25000"/>
+            </a:schemeClr>
           </a:solidFill>
+          <a:latin typeface="+mn-lt"/>
+          <a:ea typeface="+mn-ea"/>
+          <a:cs typeface="+mn-cs"/>
         </a:defRPr>
       </a:lvl4pPr>
-      <a:lvl5pPr eaLnBrk="1" hangingPunct="1">
-        <a:defRPr>
+      <a:lvl5pPr marL="932688" indent="-182880" algn="l" defTabSz="914400" rtl="0" eaLnBrk="1" latinLnBrk="0" hangingPunct="1">
+        <a:lnSpc>
+          <a:spcPct val="90000"/>
+        </a:lnSpc>
+        <a:spcBef>
+          <a:spcPts val="200"/>
+        </a:spcBef>
+        <a:spcAft>
+          <a:spcPts val="400"/>
+        </a:spcAft>
+        <a:buClr>
+          <a:schemeClr val="accent1"/>
+        </a:buClr>
+        <a:buFont typeface="Calibri" pitchFamily="34" charset="0"/>
+        <a:buChar char="◦"/>
+        <a:defRPr sz="1400" kern="1200">
           <a:solidFill>
-            <a:schemeClr val="tx2"/>
+            <a:schemeClr val="tx1">
+              <a:lumMod val="75000"/>
+              <a:lumOff val="25000"/>
+            </a:schemeClr>
           </a:solidFill>
+          <a:latin typeface="+mn-lt"/>
+          <a:ea typeface="+mn-ea"/>
+          <a:cs typeface="+mn-cs"/>
         </a:defRPr>
       </a:lvl5pPr>
-      <a:lvl6pPr eaLnBrk="1" hangingPunct="1">
-        <a:defRPr>
+      <a:lvl6pPr marL="1100000" indent="-228600" algn="l" defTabSz="914400" rtl="0" eaLnBrk="1" latinLnBrk="0" hangingPunct="1">
+        <a:lnSpc>
+          <a:spcPct val="90000"/>
+        </a:lnSpc>
+        <a:spcBef>
+          <a:spcPts val="200"/>
+        </a:spcBef>
+        <a:spcAft>
+          <a:spcPts val="400"/>
+        </a:spcAft>
+        <a:buClr>
+          <a:schemeClr val="accent1"/>
+        </a:buClr>
+        <a:buFont typeface="Calibri" pitchFamily="34" charset="0"/>
+        <a:buChar char="◦"/>
+        <a:defRPr sz="1400" kern="1200">
           <a:solidFill>
-            <a:schemeClr val="tx2"/>
+            <a:schemeClr val="tx1">
+              <a:lumMod val="75000"/>
+              <a:lumOff val="25000"/>
+            </a:schemeClr>
           </a:solidFill>
+          <a:latin typeface="+mn-lt"/>
+          <a:ea typeface="+mn-ea"/>
+          <a:cs typeface="+mn-cs"/>
         </a:defRPr>
       </a:lvl6pPr>
-      <a:lvl7pPr eaLnBrk="1" hangingPunct="1">
-        <a:defRPr>
+      <a:lvl7pPr marL="1300000" indent="-228600" algn="l" defTabSz="914400" rtl="0" eaLnBrk="1" latinLnBrk="0" hangingPunct="1">
+        <a:lnSpc>
+          <a:spcPct val="90000"/>
+        </a:lnSpc>
+        <a:spcBef>
+          <a:spcPts val="200"/>
+        </a:spcBef>
+        <a:spcAft>
+          <a:spcPts val="400"/>
+        </a:spcAft>
+        <a:buClr>
+          <a:schemeClr val="accent1"/>
+        </a:buClr>
+        <a:buFont typeface="Calibri" pitchFamily="34" charset="0"/>
+        <a:buChar char="◦"/>
+        <a:defRPr sz="1400" kern="1200">
           <a:solidFill>
-            <a:schemeClr val="tx2"/>
+            <a:schemeClr val="tx1">
+              <a:lumMod val="75000"/>
+              <a:lumOff val="25000"/>
+            </a:schemeClr>
           </a:solidFill>
+          <a:latin typeface="+mn-lt"/>
+          <a:ea typeface="+mn-ea"/>
+          <a:cs typeface="+mn-cs"/>
         </a:defRPr>
       </a:lvl7pPr>
-      <a:lvl8pPr eaLnBrk="1" hangingPunct="1">
-        <a:defRPr>
+      <a:lvl8pPr marL="1500000" indent="-228600" algn="l" defTabSz="914400" rtl="0" eaLnBrk="1" latinLnBrk="0" hangingPunct="1">
+        <a:lnSpc>
+          <a:spcPct val="90000"/>
+        </a:lnSpc>
+        <a:spcBef>
+          <a:spcPts val="200"/>
+        </a:spcBef>
+        <a:spcAft>
+          <a:spcPts val="400"/>
+        </a:spcAft>
+        <a:buClr>
+          <a:schemeClr val="accent1"/>
+        </a:buClr>
+        <a:buFont typeface="Calibri" pitchFamily="34" charset="0"/>
+        <a:buChar char="◦"/>
+        <a:defRPr sz="1400" kern="1200">
           <a:solidFill>
-            <a:schemeClr val="tx2"/>
+            <a:schemeClr val="tx1">
+              <a:lumMod val="75000"/>
+              <a:lumOff val="25000"/>
+            </a:schemeClr>
           </a:solidFill>
+          <a:latin typeface="+mn-lt"/>
+          <a:ea typeface="+mn-ea"/>
+          <a:cs typeface="+mn-cs"/>
         </a:defRPr>
       </a:lvl8pPr>
-      <a:lvl9pPr eaLnBrk="1" hangingPunct="1">
-        <a:defRPr>
-          <a:solidFill>
-            <a:schemeClr val="tx2"/>
-          </a:solidFill>
-        </a:defRPr>
-      </a:lvl9pPr>
-    </p:titleStyle>
-    <p:bodyStyle>
-      <a:lvl1pPr marL="342900" indent="-342900" algn="l" defTabSz="457200" rtl="0" eaLnBrk="1" latinLnBrk="0" hangingPunct="1">
+      <a:lvl9pPr marL="1700000" indent="-228600" algn="l" defTabSz="914400" rtl="0" eaLnBrk="1" latinLnBrk="0" hangingPunct="1">
+        <a:lnSpc>
+          <a:spcPct val="90000"/>
+        </a:lnSpc>
         <a:spcBef>
-          <a:spcPts val="1000"/>
+          <a:spcPts val="200"/>
         </a:spcBef>
         <a:spcAft>
-          <a:spcPts val="0"/>
+          <a:spcPts val="400"/>
         </a:spcAft>
         <a:buClr>
-          <a:schemeClr val="bg2">
-            <a:lumMod val="40000"/>
-            <a:lumOff val="60000"/>
-          </a:schemeClr>
+          <a:schemeClr val="accent1"/>
         </a:buClr>
-        <a:buSzPct val="80000"/>
-        <a:buFont typeface="Wingdings 3" charset="2"/>
-        <a:buChar char=""/>
-        <a:defRPr sz="2000" b="0" i="0" kern="1200">
+        <a:buFont typeface="Calibri" pitchFamily="34" charset="0"/>
+        <a:buChar char="◦"/>
+        <a:defRPr sz="1400" kern="1200">
           <a:solidFill>
-            <a:schemeClr val="tx1"/>
+            <a:schemeClr val="tx1">
+              <a:lumMod val="75000"/>
+              <a:lumOff val="25000"/>
+            </a:schemeClr>
           </a:solidFill>
-          <a:latin typeface="+mj-lt"/>
-          <a:ea typeface="+mj-ea"/>
-          <a:cs typeface="+mj-cs"/>
-        </a:defRPr>
-      </a:lvl1pPr>
-      <a:lvl2pPr marL="742950" indent="-285750" algn="l" defTabSz="457200" rtl="0" eaLnBrk="1" latinLnBrk="0" hangingPunct="1">
-        <a:spcBef>
-          <a:spcPts val="1000"/>
-        </a:spcBef>
-        <a:spcAft>
-          <a:spcPts val="0"/>
-        </a:spcAft>
-        <a:buClr>
-          <a:schemeClr val="bg2">
-            <a:lumMod val="40000"/>
-            <a:lumOff val="60000"/>
-          </a:schemeClr>
-        </a:buClr>
-        <a:buSzPct val="80000"/>
-        <a:buFont typeface="Wingdings 3" charset="2"/>
-        <a:buChar char=""/>
-        <a:defRPr sz="1800" b="0" i="0" kern="1200">
-          <a:solidFill>
-            <a:schemeClr val="tx1"/>
-          </a:solidFill>
-          <a:latin typeface="+mj-lt"/>
-          <a:ea typeface="+mj-ea"/>
-          <a:cs typeface="+mj-cs"/>
-        </a:defRPr>
-      </a:lvl2pPr>
-      <a:lvl3pPr marL="1143000" indent="-228600" algn="l" defTabSz="457200" rtl="0" eaLnBrk="1" latinLnBrk="0" hangingPunct="1">
-        <a:spcBef>
-          <a:spcPts val="1000"/>
-        </a:spcBef>
-        <a:spcAft>
-          <a:spcPts val="0"/>
-        </a:spcAft>
-        <a:buClr>
-          <a:schemeClr val="bg2">
-            <a:lumMod val="40000"/>
-            <a:lumOff val="60000"/>
-          </a:schemeClr>
-        </a:buClr>
-        <a:buSzPct val="80000"/>
-        <a:buFont typeface="Wingdings 3" charset="2"/>
-        <a:buChar char=""/>
-        <a:defRPr sz="1600" b="0" i="0" kern="1200">
-          <a:solidFill>
-            <a:schemeClr val="tx1"/>
-          </a:solidFill>
-          <a:latin typeface="+mj-lt"/>
-          <a:ea typeface="+mj-ea"/>
-          <a:cs typeface="+mj-cs"/>
-        </a:defRPr>
-      </a:lvl3pPr>
-      <a:lvl4pPr marL="1600200" indent="-228600" algn="l" defTabSz="457200" rtl="0" eaLnBrk="1" latinLnBrk="0" hangingPunct="1">
-        <a:spcBef>
-          <a:spcPts val="1000"/>
-        </a:spcBef>
-        <a:spcAft>
-          <a:spcPts val="0"/>
-        </a:spcAft>
-        <a:buClr>
-          <a:schemeClr val="bg2">
-            <a:lumMod val="40000"/>
-            <a:lumOff val="60000"/>
-          </a:schemeClr>
-        </a:buClr>
-        <a:buSzPct val="80000"/>
-        <a:buFont typeface="Wingdings 3" charset="2"/>
-        <a:buChar char=""/>
-        <a:defRPr sz="1400" b="0" i="0" kern="1200">
-          <a:solidFill>
-            <a:schemeClr val="tx1"/>
-          </a:solidFill>
-          <a:latin typeface="+mj-lt"/>
-          <a:ea typeface="+mj-ea"/>
-          <a:cs typeface="+mj-cs"/>
-        </a:defRPr>
-      </a:lvl4pPr>
-      <a:lvl5pPr marL="2057400" indent="-228600" algn="l" defTabSz="457200" rtl="0" eaLnBrk="1" latinLnBrk="0" hangingPunct="1">
-        <a:spcBef>
-          <a:spcPts val="1000"/>
-        </a:spcBef>
-        <a:spcAft>
-          <a:spcPts val="0"/>
-        </a:spcAft>
-        <a:buClr>
-          <a:schemeClr val="bg2">
-            <a:lumMod val="40000"/>
-            <a:lumOff val="60000"/>
-          </a:schemeClr>
-        </a:buClr>
-        <a:buSzPct val="80000"/>
-        <a:buFont typeface="Wingdings 3" charset="2"/>
-        <a:buChar char=""/>
-        <a:defRPr sz="1400" b="0" i="0" kern="1200">
-          <a:solidFill>
-            <a:schemeClr val="tx1"/>
-          </a:solidFill>
-          <a:latin typeface="+mj-lt"/>
-          <a:ea typeface="+mj-ea"/>
-          <a:cs typeface="+mj-cs"/>
-        </a:defRPr>
-      </a:lvl5pPr>
-      <a:lvl6pPr marL="2506000" indent="-228600" algn="l" defTabSz="457200" rtl="0" eaLnBrk="1" latinLnBrk="0" hangingPunct="1">
-        <a:spcBef>
-          <a:spcPts val="1000"/>
-        </a:spcBef>
-        <a:spcAft>
-          <a:spcPts val="0"/>
-        </a:spcAft>
-        <a:buClr>
-          <a:schemeClr val="bg2">
-            <a:lumMod val="40000"/>
-            <a:lumOff val="60000"/>
-          </a:schemeClr>
-        </a:buClr>
-        <a:buSzPct val="80000"/>
-        <a:buFont typeface="Wingdings 3" charset="2"/>
-        <a:buChar char=""/>
-        <a:defRPr sz="1400" b="0" i="0" kern="1200">
-          <a:solidFill>
-            <a:schemeClr val="tx1"/>
-          </a:solidFill>
-          <a:latin typeface="+mj-lt"/>
-          <a:ea typeface="+mj-ea"/>
-          <a:cs typeface="+mj-cs"/>
-        </a:defRPr>
-      </a:lvl6pPr>
-      <a:lvl7pPr marL="2971800" indent="-228600" algn="l" defTabSz="457200" rtl="0" eaLnBrk="1" latinLnBrk="0" hangingPunct="1">
-        <a:spcBef>
-          <a:spcPts val="1000"/>
-        </a:spcBef>
-        <a:spcAft>
-          <a:spcPts val="0"/>
-        </a:spcAft>
-        <a:buClr>
-          <a:schemeClr val="bg2">
-            <a:lumMod val="40000"/>
-            <a:lumOff val="60000"/>
-          </a:schemeClr>
-        </a:buClr>
-        <a:buSzPct val="80000"/>
-        <a:buFont typeface="Wingdings 3" charset="2"/>
-        <a:buChar char=""/>
-        <a:defRPr sz="1400" b="0" i="0" kern="1200">
-          <a:solidFill>
-            <a:schemeClr val="tx1"/>
-          </a:solidFill>
-          <a:latin typeface="+mj-lt"/>
-          <a:ea typeface="+mj-ea"/>
-          <a:cs typeface="+mj-cs"/>
-        </a:defRPr>
-      </a:lvl7pPr>
-      <a:lvl8pPr marL="3429000" indent="-228600" algn="l" defTabSz="457200" rtl="0" eaLnBrk="1" latinLnBrk="0" hangingPunct="1">
-        <a:spcBef>
-          <a:spcPts val="1000"/>
-        </a:spcBef>
-        <a:spcAft>
-          <a:spcPts val="0"/>
-        </a:spcAft>
-        <a:buClr>
-          <a:schemeClr val="bg2">
-            <a:lumMod val="40000"/>
-            <a:lumOff val="60000"/>
-          </a:schemeClr>
-        </a:buClr>
-        <a:buSzPct val="80000"/>
-        <a:buFont typeface="Wingdings 3" charset="2"/>
-        <a:buChar char=""/>
-        <a:defRPr sz="1400" b="0" i="0" kern="1200">
-          <a:solidFill>
-            <a:schemeClr val="tx1"/>
-          </a:solidFill>
-          <a:latin typeface="+mj-lt"/>
-          <a:ea typeface="+mj-ea"/>
-          <a:cs typeface="+mj-cs"/>
-        </a:defRPr>
-      </a:lvl8pPr>
-      <a:lvl9pPr marL="3886200" indent="-228600" algn="l" defTabSz="457200" rtl="0" eaLnBrk="1" latinLnBrk="0" hangingPunct="1">
-        <a:spcBef>
-          <a:spcPts val="1000"/>
-        </a:spcBef>
-        <a:spcAft>
-          <a:spcPts val="0"/>
-        </a:spcAft>
-        <a:buClr>
-          <a:schemeClr val="bg2">
-            <a:lumMod val="40000"/>
-            <a:lumOff val="60000"/>
-          </a:schemeClr>
-        </a:buClr>
-        <a:buSzPct val="80000"/>
-        <a:buFont typeface="Wingdings 3" charset="2"/>
-        <a:buChar char=""/>
-        <a:defRPr sz="1400" b="0" i="0" kern="1200">
-          <a:solidFill>
-            <a:schemeClr val="tx1"/>
-          </a:solidFill>
-          <a:latin typeface="+mj-lt"/>
-          <a:ea typeface="+mj-ea"/>
-          <a:cs typeface="+mj-cs"/>
+          <a:latin typeface="+mn-lt"/>
+          <a:ea typeface="+mn-ea"/>
+          <a:cs typeface="+mn-cs"/>
         </a:defRPr>
       </a:lvl9pPr>
     </p:bodyStyle>
@@ -7012,7 +4746,7 @@
       <a:defPPr>
         <a:defRPr lang="en-US"/>
       </a:defPPr>
-      <a:lvl1pPr marL="0" algn="l" defTabSz="457200" rtl="0" eaLnBrk="1" latinLnBrk="0" hangingPunct="1">
+      <a:lvl1pPr marL="0" algn="l" defTabSz="914400" rtl="0" eaLnBrk="1" latinLnBrk="0" hangingPunct="1">
         <a:defRPr sz="1800" kern="1200">
           <a:solidFill>
             <a:schemeClr val="tx1"/>
@@ -7022,7 +4756,7 @@
           <a:cs typeface="+mn-cs"/>
         </a:defRPr>
       </a:lvl1pPr>
-      <a:lvl2pPr marL="457200" algn="l" defTabSz="457200" rtl="0" eaLnBrk="1" latinLnBrk="0" hangingPunct="1">
+      <a:lvl2pPr marL="457200" algn="l" defTabSz="914400" rtl="0" eaLnBrk="1" latinLnBrk="0" hangingPunct="1">
         <a:defRPr sz="1800" kern="1200">
           <a:solidFill>
             <a:schemeClr val="tx1"/>
@@ -7032,7 +4766,7 @@
           <a:cs typeface="+mn-cs"/>
         </a:defRPr>
       </a:lvl2pPr>
-      <a:lvl3pPr marL="914400" algn="l" defTabSz="457200" rtl="0" eaLnBrk="1" latinLnBrk="0" hangingPunct="1">
+      <a:lvl3pPr marL="914400" algn="l" defTabSz="914400" rtl="0" eaLnBrk="1" latinLnBrk="0" hangingPunct="1">
         <a:defRPr sz="1800" kern="1200">
           <a:solidFill>
             <a:schemeClr val="tx1"/>
@@ -7042,7 +4776,7 @@
           <a:cs typeface="+mn-cs"/>
         </a:defRPr>
       </a:lvl3pPr>
-      <a:lvl4pPr marL="1371600" algn="l" defTabSz="457200" rtl="0" eaLnBrk="1" latinLnBrk="0" hangingPunct="1">
+      <a:lvl4pPr marL="1371600" algn="l" defTabSz="914400" rtl="0" eaLnBrk="1" latinLnBrk="0" hangingPunct="1">
         <a:defRPr sz="1800" kern="1200">
           <a:solidFill>
             <a:schemeClr val="tx1"/>
@@ -7052,7 +4786,7 @@
           <a:cs typeface="+mn-cs"/>
         </a:defRPr>
       </a:lvl4pPr>
-      <a:lvl5pPr marL="1828800" algn="l" defTabSz="457200" rtl="0" eaLnBrk="1" latinLnBrk="0" hangingPunct="1">
+      <a:lvl5pPr marL="1828800" algn="l" defTabSz="914400" rtl="0" eaLnBrk="1" latinLnBrk="0" hangingPunct="1">
         <a:defRPr sz="1800" kern="1200">
           <a:solidFill>
             <a:schemeClr val="tx1"/>
@@ -7062,7 +4796,7 @@
           <a:cs typeface="+mn-cs"/>
         </a:defRPr>
       </a:lvl5pPr>
-      <a:lvl6pPr marL="2286000" algn="l" defTabSz="457200" rtl="0" eaLnBrk="1" latinLnBrk="0" hangingPunct="1">
+      <a:lvl6pPr marL="2286000" algn="l" defTabSz="914400" rtl="0" eaLnBrk="1" latinLnBrk="0" hangingPunct="1">
         <a:defRPr sz="1800" kern="1200">
           <a:solidFill>
             <a:schemeClr val="tx1"/>
@@ -7072,7 +4806,7 @@
           <a:cs typeface="+mn-cs"/>
         </a:defRPr>
       </a:lvl6pPr>
-      <a:lvl7pPr marL="2743200" algn="l" defTabSz="457200" rtl="0" eaLnBrk="1" latinLnBrk="0" hangingPunct="1">
+      <a:lvl7pPr marL="2743200" algn="l" defTabSz="914400" rtl="0" eaLnBrk="1" latinLnBrk="0" hangingPunct="1">
         <a:defRPr sz="1800" kern="1200">
           <a:solidFill>
             <a:schemeClr val="tx1"/>
@@ -7082,7 +4816,7 @@
           <a:cs typeface="+mn-cs"/>
         </a:defRPr>
       </a:lvl7pPr>
-      <a:lvl8pPr marL="3200400" algn="l" defTabSz="457200" rtl="0" eaLnBrk="1" latinLnBrk="0" hangingPunct="1">
+      <a:lvl8pPr marL="3200400" algn="l" defTabSz="914400" rtl="0" eaLnBrk="1" latinLnBrk="0" hangingPunct="1">
         <a:defRPr sz="1800" kern="1200">
           <a:solidFill>
             <a:schemeClr val="tx1"/>
@@ -7092,7 +4826,7 @@
           <a:cs typeface="+mn-cs"/>
         </a:defRPr>
       </a:lvl8pPr>
-      <a:lvl9pPr marL="3657600" algn="l" defTabSz="457200" rtl="0" eaLnBrk="1" latinLnBrk="0" hangingPunct="1">
+      <a:lvl9pPr marL="3657600" algn="l" defTabSz="914400" rtl="0" eaLnBrk="1" latinLnBrk="0" hangingPunct="1">
         <a:defRPr sz="1800" kern="1200">
           <a:solidFill>
             <a:schemeClr val="tx1"/>
@@ -7182,19 +4916,19 @@
           <a:p>
             <a:r>
               <a:rPr lang="en-US" dirty="0"/>
-              <a:t>GEOG4300 /6300: Intro to data science</a:t>
+              <a:t>GEOG4300 /6300: Intro to data science (Lecture 2)</a:t>
             </a:r>
           </a:p>
           <a:p>
             <a:r>
               <a:rPr lang="en-US" dirty="0"/>
-              <a:t>Tuesday August 26, 2025</a:t>
+              <a:t>Fall 2026</a:t>
             </a:r>
           </a:p>
           <a:p>
             <a:r>
               <a:rPr lang="en-US" dirty="0"/>
-              <a:t>Prof. Anna Harper</a:t>
+              <a:t>Dr. Jerry Shannon</a:t>
             </a:r>
           </a:p>
         </p:txBody>
@@ -7276,7 +5010,7 @@
         <p:spPr/>
         <p:txBody>
           <a:bodyPr>
-            <a:normAutofit fontScale="92500" lnSpcReduction="10000"/>
+            <a:normAutofit fontScale="85000" lnSpcReduction="20000"/>
           </a:bodyPr>
           <a:lstStyle/>
           <a:p>
@@ -8022,61 +5756,61 @@
           <a:lstStyle/>
           <a:p>
             <a:r>
-              <a:rPr lang="en-US" dirty="0"/>
+              <a:rPr lang="en-US" sz="2400" dirty="0"/>
               <a:t>This week: Read </a:t>
             </a:r>
             <a:r>
-              <a:rPr lang="en-US" b="1" dirty="0"/>
+              <a:rPr lang="en-US" sz="2400" b="1" dirty="0"/>
               <a:t>R for Data Science</a:t>
             </a:r>
             <a:r>
-              <a:rPr lang="en-US" dirty="0"/>
+              <a:rPr lang="en-US" sz="2400" dirty="0"/>
               <a:t>, Chapter 3 (Data transformation).</a:t>
             </a:r>
           </a:p>
           <a:p>
             <a:r>
-              <a:rPr lang="en-US" dirty="0"/>
+              <a:rPr lang="en-US" sz="2400" dirty="0"/>
               <a:t>Concepts: </a:t>
             </a:r>
           </a:p>
           <a:p>
             <a:pPr lvl="1"/>
             <a:r>
-              <a:rPr lang="en-US" dirty="0"/>
+              <a:rPr lang="en-US" sz="2000" dirty="0"/>
               <a:t>Working with online datasets</a:t>
             </a:r>
           </a:p>
           <a:p>
             <a:pPr lvl="1"/>
             <a:r>
-              <a:rPr lang="en-US" dirty="0"/>
+              <a:rPr lang="en-US" sz="2000" dirty="0"/>
               <a:t>Methods of re-organizing datasets to get them into a desired format for analysis</a:t>
             </a:r>
           </a:p>
           <a:p>
             <a:r>
-              <a:rPr lang="en-US" dirty="0"/>
+              <a:rPr lang="en-US" sz="2400" dirty="0"/>
               <a:t>1) Finish S01-3: APIs and online data</a:t>
             </a:r>
           </a:p>
           <a:p>
             <a:r>
-              <a:rPr lang="en-US" dirty="0"/>
+              <a:rPr lang="en-US" sz="2400" dirty="0"/>
               <a:t>2) Talk about Lab 0</a:t>
             </a:r>
           </a:p>
           <a:p>
             <a:r>
-              <a:rPr lang="en-US" dirty="0"/>
+              <a:rPr lang="en-US" sz="2400" dirty="0"/>
               <a:t>3) Start on S02 scripts: You should continue to work through these on Thursday.</a:t>
             </a:r>
           </a:p>
           <a:p>
-            <a:endParaRPr lang="en-US" dirty="0"/>
-          </a:p>
-          <a:p>
-            <a:endParaRPr lang="en-US" b="1" dirty="0"/>
+            <a:endParaRPr lang="en-US" sz="2400" dirty="0"/>
+          </a:p>
+          <a:p>
+            <a:endParaRPr lang="en-US" sz="2400" b="1" dirty="0"/>
           </a:p>
         </p:txBody>
       </p:sp>
@@ -8345,7 +6079,7 @@
         </p:spPr>
         <p:txBody>
           <a:bodyPr>
-            <a:normAutofit fontScale="92500" lnSpcReduction="10000"/>
+            <a:normAutofit fontScale="92500"/>
           </a:bodyPr>
           <a:lstStyle/>
           <a:p>
@@ -8773,7 +6507,9 @@
         </p:nvSpPr>
         <p:spPr/>
         <p:txBody>
-          <a:bodyPr/>
+          <a:bodyPr>
+            <a:normAutofit/>
+          </a:bodyPr>
           <a:lstStyle/>
           <a:p>
             <a:r>
@@ -8916,7 +6652,9 @@
         </p:nvSpPr>
         <p:spPr/>
         <p:txBody>
-          <a:bodyPr/>
+          <a:bodyPr>
+            <a:normAutofit/>
+          </a:bodyPr>
           <a:lstStyle/>
           <a:p>
             <a:r>
@@ -9054,7 +6792,7 @@
         <p:spPr/>
         <p:txBody>
           <a:bodyPr>
-            <a:normAutofit fontScale="55000" lnSpcReduction="20000"/>
+            <a:normAutofit fontScale="32500" lnSpcReduction="20000"/>
           </a:bodyPr>
           <a:lstStyle/>
           <a:p>
@@ -9182,52 +6920,52 @@
 </file>
 
 <file path=ppt/theme/theme1.xml><?xml version="1.0" encoding="utf-8"?>
-<a:theme xmlns:a="http://schemas.openxmlformats.org/drawingml/2006/main" name="Ion">
+<a:theme xmlns:a="http://schemas.openxmlformats.org/drawingml/2006/main" name="Retrospect">
   <a:themeElements>
-    <a:clrScheme name="Ion">
+    <a:clrScheme name="Retrospect">
       <a:dk1>
-        <a:sysClr val="windowText" lastClr="000000"/>
+        <a:srgbClr val="000000"/>
       </a:dk1>
       <a:lt1>
         <a:sysClr val="window" lastClr="FFFFFF"/>
       </a:lt1>
       <a:dk2>
-        <a:srgbClr val="1E5155"/>
+        <a:srgbClr val="637052"/>
       </a:dk2>
       <a:lt2>
-        <a:srgbClr val="EBEBEB"/>
+        <a:srgbClr val="CCDDEA"/>
       </a:lt2>
       <a:accent1>
-        <a:srgbClr val="B01513"/>
+        <a:srgbClr val="E48312"/>
       </a:accent1>
       <a:accent2>
-        <a:srgbClr val="EA6312"/>
+        <a:srgbClr val="BD582C"/>
       </a:accent2>
       <a:accent3>
-        <a:srgbClr val="E6B729"/>
+        <a:srgbClr val="865640"/>
       </a:accent3>
       <a:accent4>
-        <a:srgbClr val="6AAC90"/>
+        <a:srgbClr val="9B8357"/>
       </a:accent4>
       <a:accent5>
-        <a:srgbClr val="54849A"/>
+        <a:srgbClr val="C2BC80"/>
       </a:accent5>
       <a:accent6>
-        <a:srgbClr val="9E5E9B"/>
+        <a:srgbClr val="94A088"/>
       </a:accent6>
       <a:hlink>
-        <a:srgbClr val="58C1BA"/>
+        <a:srgbClr val="2998E3"/>
       </a:hlink>
       <a:folHlink>
-        <a:srgbClr val="9DFFCB"/>
+        <a:srgbClr val="8C8C8C"/>
       </a:folHlink>
     </a:clrScheme>
-    <a:fontScheme name="Ion">
+    <a:fontScheme name="Retrospect">
       <a:majorFont>
-        <a:latin typeface="Century Gothic" panose="020B0502020202020204"/>
+        <a:latin typeface="Calibri Light" panose="020F0302020204030204"/>
         <a:ea typeface=""/>
         <a:cs typeface=""/>
-        <a:font script="Jpan" typeface="メイリオ"/>
+        <a:font script="Jpan" typeface="ＭＳ Ｐゴシック"/>
         <a:font script="Hang" typeface="맑은 고딕"/>
         <a:font script="Hans" typeface="宋体"/>
         <a:font script="Hant" typeface="新細明體"/>
@@ -9259,10 +6997,10 @@
         <a:font script="Geor" typeface="Sylfaen"/>
       </a:majorFont>
       <a:minorFont>
-        <a:latin typeface="Century Gothic" panose="020B0502020202020204"/>
+        <a:latin typeface="Calibri" panose="020F0502020204030204"/>
         <a:ea typeface=""/>
         <a:cs typeface=""/>
-        <a:font script="Jpan" typeface="メイリオ"/>
+        <a:font script="Jpan" typeface="ＭＳ Ｐゴシック"/>
         <a:font script="Hang" typeface="맑은 고딕"/>
         <a:font script="Hans" typeface="宋体"/>
         <a:font script="Hant" typeface="新細明體"/>
@@ -9294,7 +7032,7 @@
         <a:font script="Geor" typeface="Sylfaen"/>
       </a:minorFont>
     </a:fontScheme>
-    <a:fmtScheme name="Ion">
+    <a:fmtScheme name="Retrospect">
       <a:fillStyleLst>
         <a:solidFill>
           <a:schemeClr val="phClr"/>
@@ -9303,52 +7041,77 @@
           <a:gsLst>
             <a:gs pos="0">
               <a:schemeClr val="phClr">
-                <a:tint val="64000"/>
-                <a:lumMod val="118000"/>
+                <a:tint val="65000"/>
+                <a:shade val="92000"/>
+                <a:satMod val="130000"/>
+              </a:schemeClr>
+            </a:gs>
+            <a:gs pos="45000">
+              <a:schemeClr val="phClr">
+                <a:tint val="60000"/>
+                <a:shade val="99000"/>
+                <a:satMod val="120000"/>
               </a:schemeClr>
             </a:gs>
             <a:gs pos="100000">
               <a:schemeClr val="phClr">
-                <a:tint val="92000"/>
-                <a:alpha val="100000"/>
-                <a:lumMod val="110000"/>
+                <a:tint val="55000"/>
+                <a:satMod val="140000"/>
               </a:schemeClr>
             </a:gs>
           </a:gsLst>
-          <a:lin ang="5400000" scaled="0"/>
+          <a:path path="circle">
+            <a:fillToRect l="100000" t="100000" r="100000" b="100000"/>
+          </a:path>
         </a:gradFill>
         <a:gradFill rotWithShape="1">
           <a:gsLst>
             <a:gs pos="0">
               <a:schemeClr val="phClr">
-                <a:tint val="98000"/>
-                <a:lumMod val="114000"/>
+                <a:shade val="85000"/>
+                <a:satMod val="130000"/>
+              </a:schemeClr>
+            </a:gs>
+            <a:gs pos="34000">
+              <a:schemeClr val="phClr">
+                <a:shade val="87000"/>
+                <a:satMod val="125000"/>
+              </a:schemeClr>
+            </a:gs>
+            <a:gs pos="70000">
+              <a:schemeClr val="phClr">
+                <a:tint val="100000"/>
+                <a:shade val="90000"/>
+                <a:satMod val="130000"/>
               </a:schemeClr>
             </a:gs>
             <a:gs pos="100000">
               <a:schemeClr val="phClr">
-                <a:shade val="90000"/>
-                <a:lumMod val="84000"/>
+                <a:tint val="100000"/>
+                <a:shade val="100000"/>
+                <a:satMod val="110000"/>
               </a:schemeClr>
             </a:gs>
           </a:gsLst>
-          <a:lin ang="5400000" scaled="0"/>
+          <a:path path="circle">
+            <a:fillToRect l="100000" t="100000" r="100000" b="100000"/>
+          </a:path>
         </a:gradFill>
       </a:fillStyleLst>
       <a:lnStyleLst>
-        <a:ln w="9525" cap="rnd" cmpd="sng" algn="ctr">
+        <a:ln w="12700" cap="flat" cmpd="sng" algn="ctr">
           <a:solidFill>
             <a:schemeClr val="phClr"/>
           </a:solidFill>
           <a:prstDash val="solid"/>
         </a:ln>
-        <a:ln w="19050" cap="rnd" cmpd="sng" algn="ctr">
+        <a:ln w="15875" cap="flat" cmpd="sng" algn="ctr">
           <a:solidFill>
             <a:schemeClr val="phClr"/>
           </a:solidFill>
           <a:prstDash val="solid"/>
         </a:ln>
-        <a:ln w="28575" cap="rnd" cmpd="sng" algn="ctr">
+        <a:ln w="25400" cap="flat" cmpd="sng" algn="ctr">
           <a:solidFill>
             <a:schemeClr val="phClr"/>
           </a:solidFill>
@@ -9361,16 +7124,16 @@
         </a:effectStyle>
         <a:effectStyle>
           <a:effectLst>
-            <a:outerShdw blurRad="38100" dist="25400" dir="5400000" rotWithShape="0">
+            <a:outerShdw blurRad="38100" dist="25400" dir="2700000" algn="br" rotWithShape="0">
               <a:srgbClr val="000000">
-                <a:alpha val="45000"/>
+                <a:alpha val="60000"/>
               </a:srgbClr>
             </a:outerShdw>
           </a:effectLst>
         </a:effectStyle>
         <a:effectStyle>
           <a:effectLst>
-            <a:outerShdw blurRad="63500" dist="38100" dir="5400000" rotWithShape="0">
+            <a:outerShdw blurRad="44450" dist="25400" dir="2700000" algn="br" rotWithShape="0">
               <a:srgbClr val="000000">
                 <a:alpha val="60000"/>
               </a:srgbClr>
@@ -9380,10 +7143,12 @@
             <a:camera prst="orthographicFront">
               <a:rot lat="0" lon="0" rev="0"/>
             </a:camera>
-            <a:lightRig rig="threePt" dir="tl"/>
+            <a:lightRig rig="threePt" dir="t">
+              <a:rot lat="0" lon="0" rev="19800000"/>
+            </a:lightRig>
           </a:scene3d>
-          <a:sp3d prstMaterial="plastic">
-            <a:bevelT w="0" h="0"/>
+          <a:sp3d prstMaterial="flat">
+            <a:bevelT w="25400" h="31750"/>
           </a:sp3d>
         </a:effectStyle>
       </a:effectStyleLst>
@@ -9391,49 +7156,39 @@
         <a:solidFill>
           <a:schemeClr val="phClr"/>
         </a:solidFill>
+        <a:solidFill>
+          <a:schemeClr val="phClr">
+            <a:tint val="90000"/>
+            <a:shade val="97000"/>
+            <a:satMod val="130000"/>
+          </a:schemeClr>
+        </a:solidFill>
         <a:gradFill rotWithShape="1">
           <a:gsLst>
             <a:gs pos="0">
               <a:schemeClr val="phClr">
-                <a:tint val="97000"/>
-                <a:hueMod val="88000"/>
+                <a:tint val="96000"/>
+                <a:shade val="99000"/>
+                <a:satMod val="140000"/>
+              </a:schemeClr>
+            </a:gs>
+            <a:gs pos="65000">
+              <a:schemeClr val="phClr">
+                <a:tint val="100000"/>
+                <a:shade val="80000"/>
                 <a:satMod val="130000"/>
-                <a:lumMod val="124000"/>
               </a:schemeClr>
             </a:gs>
             <a:gs pos="100000">
               <a:schemeClr val="phClr">
-                <a:tint val="96000"/>
-                <a:shade val="88000"/>
-                <a:hueMod val="108000"/>
-                <a:satMod val="164000"/>
-                <a:lumMod val="76000"/>
+                <a:tint val="100000"/>
+                <a:shade val="48000"/>
+                <a:satMod val="120000"/>
               </a:schemeClr>
             </a:gs>
           </a:gsLst>
-          <a:path path="circle">
-            <a:fillToRect l="45000" t="65000" r="125000" b="100000"/>
-          </a:path>
+          <a:lin ang="16200000" scaled="0"/>
         </a:gradFill>
-        <a:blipFill rotWithShape="1">
-          <a:blip xmlns:r="http://schemas.openxmlformats.org/officeDocument/2006/relationships" r:embed="rId1">
-            <a:duotone>
-              <a:schemeClr val="phClr">
-                <a:shade val="69000"/>
-                <a:hueMod val="108000"/>
-                <a:satMod val="164000"/>
-                <a:lumMod val="74000"/>
-              </a:schemeClr>
-              <a:schemeClr val="phClr">
-                <a:tint val="96000"/>
-                <a:hueMod val="88000"/>
-                <a:satMod val="140000"/>
-                <a:lumMod val="132000"/>
-              </a:schemeClr>
-            </a:duotone>
-          </a:blip>
-          <a:stretch/>
-        </a:blipFill>
       </a:bgFillStyleLst>
     </a:fmtScheme>
   </a:themeElements>
@@ -9441,7 +7196,7 @@
   <a:extraClrSchemeLst/>
   <a:extLst>
     <a:ext uri="{05A4C25C-085E-4340-85A3-A5531E510DB2}">
-      <thm15:themeFamily xmlns:thm15="http://schemas.microsoft.com/office/thememl/2012/main" name="Ion" id="{B8441ADB-2E43-4AF7-B97A-BD870242C6A8}" vid="{292E63A9-BB86-4E3D-B92A-7223C6510D2E}"/>
+      <thm15:themeFamily xmlns:thm15="http://schemas.microsoft.com/office/thememl/2012/main" name="Retrospect" id="{5F128B03-DCCA-4EEB-AB3B-CF2899314A46}" vid="{3F1AAB62-24C6-49D2-8E01-B56FAC9A3DCD}"/>
     </a:ext>
   </a:extLst>
 </a:theme>
